--- a/presentation.pptx
+++ b/presentation.pptx
@@ -5,23 +5,22 @@
     <p:sldMasterId id="2147483648" r:id="rId1"/>
   </p:sldMasterIdLst>
   <p:sldIdLst>
-    <p:sldId id="256" r:id="rId7"/>
-    <p:sldId id="257" r:id="rId8"/>
-    <p:sldId id="258" r:id="rId9"/>
-    <p:sldId id="259" r:id="rId10"/>
-    <p:sldId id="260" r:id="rId11"/>
-    <p:sldId id="261" r:id="rId12"/>
-    <p:sldId id="262" r:id="rId13"/>
-    <p:sldId id="263" r:id="rId14"/>
-    <p:sldId id="264" r:id="rId15"/>
-    <p:sldId id="265" r:id="rId16"/>
-    <p:sldId id="266" r:id="rId17"/>
-    <p:sldId id="267" r:id="rId18"/>
-    <p:sldId id="268" r:id="rId19"/>
-    <p:sldId id="269" r:id="rId20"/>
-    <p:sldId id="270" r:id="rId21"/>
+    <p:sldId id="256" r:id="rId2"/>
+    <p:sldId id="257" r:id="rId3"/>
+    <p:sldId id="258" r:id="rId4"/>
+    <p:sldId id="259" r:id="rId5"/>
+    <p:sldId id="260" r:id="rId6"/>
+    <p:sldId id="261" r:id="rId7"/>
+    <p:sldId id="262" r:id="rId8"/>
+    <p:sldId id="263" r:id="rId9"/>
+    <p:sldId id="264" r:id="rId10"/>
+    <p:sldId id="265" r:id="rId11"/>
+    <p:sldId id="266" r:id="rId12"/>
+    <p:sldId id="268" r:id="rId13"/>
+    <p:sldId id="269" r:id="rId14"/>
+    <p:sldId id="270" r:id="rId15"/>
   </p:sldIdLst>
-  <p:sldSz cx="12188952" cy="6858000" type="screen4x3"/>
+  <p:sldSz cx="12188825" cy="6858000"/>
   <p:notesSz cx="6858000" cy="9144000"/>
   <p:defaultTextStyle>
     <a:defPPr>
@@ -118,6 +117,22 @@
       </a:defRPr>
     </a:lvl9pPr>
   </p:defaultTextStyle>
+  <p:extLst>
+    <p:ext uri="{EFAFB233-063F-42B5-8137-9DF3F51BA10A}">
+      <p15:sldGuideLst xmlns:p15="http://schemas.microsoft.com/office/powerpoint/2012/main">
+        <p15:guide id="1" orient="horz" pos="2160">
+          <p15:clr>
+            <a:srgbClr val="A4A3A4"/>
+          </p15:clr>
+        </p15:guide>
+        <p15:guide id="2" pos="2880">
+          <p15:clr>
+            <a:srgbClr val="A4A3A4"/>
+          </p15:clr>
+        </p15:guide>
+      </p15:sldGuideLst>
+    </p:ext>
+  </p:extLst>
 </p:presentation>
 </file>
 
@@ -159,10 +174,9 @@
           <a:lstStyle/>
           <a:p>
             <a:r>
-              <a:rPr lang="en-US" smtClean="0"/>
+              <a:rPr lang="en-US"/>
               <a:t>Click to edit Master title style</a:t>
             </a:r>
-            <a:endParaRPr lang="en-US"/>
           </a:p>
         </p:txBody>
       </p:sp>
@@ -278,10 +292,9 @@
           </a:lstStyle>
           <a:p>
             <a:r>
-              <a:rPr lang="en-US" smtClean="0"/>
+              <a:rPr lang="en-US"/>
               <a:t>Click to edit Master subtitle style</a:t>
             </a:r>
-            <a:endParaRPr lang="en-US"/>
           </a:p>
         </p:txBody>
       </p:sp>
@@ -302,7 +315,7 @@
           <a:p>
             <a:fld id="{5BCAD085-E8A6-8845-BD4E-CB4CCA059FC4}" type="datetimeFigureOut">
               <a:rPr lang="en-US" smtClean="0"/>
-              <a:t>1/27/13</a:t>
+              <a:t>5/12/2026</a:t>
             </a:fld>
             <a:endParaRPr lang="en-US"/>
           </a:p>
@@ -396,10 +409,9 @@
           <a:lstStyle/>
           <a:p>
             <a:r>
-              <a:rPr lang="en-US" smtClean="0"/>
+              <a:rPr lang="en-US"/>
               <a:t>Click to edit Master title style</a:t>
             </a:r>
-            <a:endParaRPr lang="en-US"/>
           </a:p>
         </p:txBody>
       </p:sp>
@@ -420,38 +432,37 @@
           <a:p>
             <a:pPr lvl="0"/>
             <a:r>
-              <a:rPr lang="en-US" smtClean="0"/>
+              <a:rPr lang="en-US"/>
               <a:t>Click to edit Master text styles</a:t>
             </a:r>
           </a:p>
           <a:p>
             <a:pPr lvl="1"/>
             <a:r>
-              <a:rPr lang="en-US" smtClean="0"/>
+              <a:rPr lang="en-US"/>
               <a:t>Second level</a:t>
             </a:r>
           </a:p>
           <a:p>
             <a:pPr lvl="2"/>
             <a:r>
-              <a:rPr lang="en-US" smtClean="0"/>
+              <a:rPr lang="en-US"/>
               <a:t>Third level</a:t>
             </a:r>
           </a:p>
           <a:p>
             <a:pPr lvl="3"/>
             <a:r>
-              <a:rPr lang="en-US" smtClean="0"/>
+              <a:rPr lang="en-US"/>
               <a:t>Fourth level</a:t>
             </a:r>
           </a:p>
           <a:p>
             <a:pPr lvl="4"/>
             <a:r>
-              <a:rPr lang="en-US" smtClean="0"/>
+              <a:rPr lang="en-US"/>
               <a:t>Fifth level</a:t>
             </a:r>
-            <a:endParaRPr lang="en-US"/>
           </a:p>
         </p:txBody>
       </p:sp>
@@ -472,7 +483,7 @@
           <a:p>
             <a:fld id="{5BCAD085-E8A6-8845-BD4E-CB4CCA059FC4}" type="datetimeFigureOut">
               <a:rPr lang="en-US" smtClean="0"/>
-              <a:t>1/27/13</a:t>
+              <a:t>5/12/2026</a:t>
             </a:fld>
             <a:endParaRPr lang="en-US"/>
           </a:p>
@@ -571,10 +582,9 @@
           <a:lstStyle/>
           <a:p>
             <a:r>
-              <a:rPr lang="en-US" smtClean="0"/>
+              <a:rPr lang="en-US"/>
               <a:t>Click to edit Master title style</a:t>
             </a:r>
-            <a:endParaRPr lang="en-US"/>
           </a:p>
         </p:txBody>
       </p:sp>
@@ -600,38 +610,37 @@
           <a:p>
             <a:pPr lvl="0"/>
             <a:r>
-              <a:rPr lang="en-US" smtClean="0"/>
+              <a:rPr lang="en-US"/>
               <a:t>Click to edit Master text styles</a:t>
             </a:r>
           </a:p>
           <a:p>
             <a:pPr lvl="1"/>
             <a:r>
-              <a:rPr lang="en-US" smtClean="0"/>
+              <a:rPr lang="en-US"/>
               <a:t>Second level</a:t>
             </a:r>
           </a:p>
           <a:p>
             <a:pPr lvl="2"/>
             <a:r>
-              <a:rPr lang="en-US" smtClean="0"/>
+              <a:rPr lang="en-US"/>
               <a:t>Third level</a:t>
             </a:r>
           </a:p>
           <a:p>
             <a:pPr lvl="3"/>
             <a:r>
-              <a:rPr lang="en-US" smtClean="0"/>
+              <a:rPr lang="en-US"/>
               <a:t>Fourth level</a:t>
             </a:r>
           </a:p>
           <a:p>
             <a:pPr lvl="4"/>
             <a:r>
-              <a:rPr lang="en-US" smtClean="0"/>
+              <a:rPr lang="en-US"/>
               <a:t>Fifth level</a:t>
             </a:r>
-            <a:endParaRPr lang="en-US"/>
           </a:p>
         </p:txBody>
       </p:sp>
@@ -652,7 +661,7 @@
           <a:p>
             <a:fld id="{5BCAD085-E8A6-8845-BD4E-CB4CCA059FC4}" type="datetimeFigureOut">
               <a:rPr lang="en-US" smtClean="0"/>
-              <a:t>1/27/13</a:t>
+              <a:t>5/12/2026</a:t>
             </a:fld>
             <a:endParaRPr lang="en-US"/>
           </a:p>
@@ -746,10 +755,9 @@
           <a:lstStyle/>
           <a:p>
             <a:r>
-              <a:rPr lang="en-US" smtClean="0"/>
+              <a:rPr lang="en-US"/>
               <a:t>Click to edit Master title style</a:t>
             </a:r>
-            <a:endParaRPr lang="en-US"/>
           </a:p>
         </p:txBody>
       </p:sp>
@@ -770,38 +778,37 @@
           <a:p>
             <a:pPr lvl="0"/>
             <a:r>
-              <a:rPr lang="en-US" smtClean="0"/>
+              <a:rPr lang="en-US"/>
               <a:t>Click to edit Master text styles</a:t>
             </a:r>
           </a:p>
           <a:p>
             <a:pPr lvl="1"/>
             <a:r>
-              <a:rPr lang="en-US" smtClean="0"/>
+              <a:rPr lang="en-US"/>
               <a:t>Second level</a:t>
             </a:r>
           </a:p>
           <a:p>
             <a:pPr lvl="2"/>
             <a:r>
-              <a:rPr lang="en-US" smtClean="0"/>
+              <a:rPr lang="en-US"/>
               <a:t>Third level</a:t>
             </a:r>
           </a:p>
           <a:p>
             <a:pPr lvl="3"/>
             <a:r>
-              <a:rPr lang="en-US" smtClean="0"/>
+              <a:rPr lang="en-US"/>
               <a:t>Fourth level</a:t>
             </a:r>
           </a:p>
           <a:p>
             <a:pPr lvl="4"/>
             <a:r>
-              <a:rPr lang="en-US" smtClean="0"/>
+              <a:rPr lang="en-US"/>
               <a:t>Fifth level</a:t>
             </a:r>
-            <a:endParaRPr lang="en-US"/>
           </a:p>
         </p:txBody>
       </p:sp>
@@ -822,7 +829,7 @@
           <a:p>
             <a:fld id="{5BCAD085-E8A6-8845-BD4E-CB4CCA059FC4}" type="datetimeFigureOut">
               <a:rPr lang="en-US" smtClean="0"/>
-              <a:t>1/27/13</a:t>
+              <a:t>5/12/2026</a:t>
             </a:fld>
             <a:endParaRPr lang="en-US"/>
           </a:p>
@@ -925,10 +932,9 @@
           </a:lstStyle>
           <a:p>
             <a:r>
-              <a:rPr lang="en-US" smtClean="0"/>
+              <a:rPr lang="en-US"/>
               <a:t>Click to edit Master title style</a:t>
             </a:r>
-            <a:endParaRPr lang="en-US"/>
           </a:p>
         </p:txBody>
       </p:sp>
@@ -1045,7 +1051,7 @@
           <a:p>
             <a:pPr lvl="0"/>
             <a:r>
-              <a:rPr lang="en-US" smtClean="0"/>
+              <a:rPr lang="en-US"/>
               <a:t>Click to edit Master text styles</a:t>
             </a:r>
           </a:p>
@@ -1068,7 +1074,7 @@
           <a:p>
             <a:fld id="{5BCAD085-E8A6-8845-BD4E-CB4CCA059FC4}" type="datetimeFigureOut">
               <a:rPr lang="en-US" smtClean="0"/>
-              <a:t>1/27/13</a:t>
+              <a:t>5/12/2026</a:t>
             </a:fld>
             <a:endParaRPr lang="en-US"/>
           </a:p>
@@ -1162,10 +1168,9 @@
           <a:lstStyle/>
           <a:p>
             <a:r>
-              <a:rPr lang="en-US" smtClean="0"/>
+              <a:rPr lang="en-US"/>
               <a:t>Click to edit Master title style</a:t>
             </a:r>
-            <a:endParaRPr lang="en-US"/>
           </a:p>
         </p:txBody>
       </p:sp>
@@ -1219,38 +1224,37 @@
           <a:p>
             <a:pPr lvl="0"/>
             <a:r>
-              <a:rPr lang="en-US" smtClean="0"/>
+              <a:rPr lang="en-US"/>
               <a:t>Click to edit Master text styles</a:t>
             </a:r>
           </a:p>
           <a:p>
             <a:pPr lvl="1"/>
             <a:r>
-              <a:rPr lang="en-US" smtClean="0"/>
+              <a:rPr lang="en-US"/>
               <a:t>Second level</a:t>
             </a:r>
           </a:p>
           <a:p>
             <a:pPr lvl="2"/>
             <a:r>
-              <a:rPr lang="en-US" smtClean="0"/>
+              <a:rPr lang="en-US"/>
               <a:t>Third level</a:t>
             </a:r>
           </a:p>
           <a:p>
             <a:pPr lvl="3"/>
             <a:r>
-              <a:rPr lang="en-US" smtClean="0"/>
+              <a:rPr lang="en-US"/>
               <a:t>Fourth level</a:t>
             </a:r>
           </a:p>
           <a:p>
             <a:pPr lvl="4"/>
             <a:r>
-              <a:rPr lang="en-US" smtClean="0"/>
+              <a:rPr lang="en-US"/>
               <a:t>Fifth level</a:t>
             </a:r>
-            <a:endParaRPr lang="en-US"/>
           </a:p>
         </p:txBody>
       </p:sp>
@@ -1304,38 +1308,37 @@
           <a:p>
             <a:pPr lvl="0"/>
             <a:r>
-              <a:rPr lang="en-US" smtClean="0"/>
+              <a:rPr lang="en-US"/>
               <a:t>Click to edit Master text styles</a:t>
             </a:r>
           </a:p>
           <a:p>
             <a:pPr lvl="1"/>
             <a:r>
-              <a:rPr lang="en-US" smtClean="0"/>
+              <a:rPr lang="en-US"/>
               <a:t>Second level</a:t>
             </a:r>
           </a:p>
           <a:p>
             <a:pPr lvl="2"/>
             <a:r>
-              <a:rPr lang="en-US" smtClean="0"/>
+              <a:rPr lang="en-US"/>
               <a:t>Third level</a:t>
             </a:r>
           </a:p>
           <a:p>
             <a:pPr lvl="3"/>
             <a:r>
-              <a:rPr lang="en-US" smtClean="0"/>
+              <a:rPr lang="en-US"/>
               <a:t>Fourth level</a:t>
             </a:r>
           </a:p>
           <a:p>
             <a:pPr lvl="4"/>
             <a:r>
-              <a:rPr lang="en-US" smtClean="0"/>
+              <a:rPr lang="en-US"/>
               <a:t>Fifth level</a:t>
             </a:r>
-            <a:endParaRPr lang="en-US"/>
           </a:p>
         </p:txBody>
       </p:sp>
@@ -1356,7 +1359,7 @@
           <a:p>
             <a:fld id="{5BCAD085-E8A6-8845-BD4E-CB4CCA059FC4}" type="datetimeFigureOut">
               <a:rPr lang="en-US" smtClean="0"/>
-              <a:t>1/27/13</a:t>
+              <a:t>5/12/2026</a:t>
             </a:fld>
             <a:endParaRPr lang="en-US"/>
           </a:p>
@@ -1454,10 +1457,9 @@
           </a:lstStyle>
           <a:p>
             <a:r>
-              <a:rPr lang="en-US" smtClean="0"/>
+              <a:rPr lang="en-US"/>
               <a:t>Click to edit Master title style</a:t>
             </a:r>
-            <a:endParaRPr lang="en-US"/>
           </a:p>
         </p:txBody>
       </p:sp>
@@ -1520,7 +1522,7 @@
           <a:p>
             <a:pPr lvl="0"/>
             <a:r>
-              <a:rPr lang="en-US" smtClean="0"/>
+              <a:rPr lang="en-US"/>
               <a:t>Click to edit Master text styles</a:t>
             </a:r>
           </a:p>
@@ -1576,38 +1578,37 @@
           <a:p>
             <a:pPr lvl="0"/>
             <a:r>
-              <a:rPr lang="en-US" smtClean="0"/>
+              <a:rPr lang="en-US"/>
               <a:t>Click to edit Master text styles</a:t>
             </a:r>
           </a:p>
           <a:p>
             <a:pPr lvl="1"/>
             <a:r>
-              <a:rPr lang="en-US" smtClean="0"/>
+              <a:rPr lang="en-US"/>
               <a:t>Second level</a:t>
             </a:r>
           </a:p>
           <a:p>
             <a:pPr lvl="2"/>
             <a:r>
-              <a:rPr lang="en-US" smtClean="0"/>
+              <a:rPr lang="en-US"/>
               <a:t>Third level</a:t>
             </a:r>
           </a:p>
           <a:p>
             <a:pPr lvl="3"/>
             <a:r>
-              <a:rPr lang="en-US" smtClean="0"/>
+              <a:rPr lang="en-US"/>
               <a:t>Fourth level</a:t>
             </a:r>
           </a:p>
           <a:p>
             <a:pPr lvl="4"/>
             <a:r>
-              <a:rPr lang="en-US" smtClean="0"/>
+              <a:rPr lang="en-US"/>
               <a:t>Fifth level</a:t>
             </a:r>
-            <a:endParaRPr lang="en-US"/>
           </a:p>
         </p:txBody>
       </p:sp>
@@ -1670,7 +1671,7 @@
           <a:p>
             <a:pPr lvl="0"/>
             <a:r>
-              <a:rPr lang="en-US" smtClean="0"/>
+              <a:rPr lang="en-US"/>
               <a:t>Click to edit Master text styles</a:t>
             </a:r>
           </a:p>
@@ -1726,38 +1727,37 @@
           <a:p>
             <a:pPr lvl="0"/>
             <a:r>
-              <a:rPr lang="en-US" smtClean="0"/>
+              <a:rPr lang="en-US"/>
               <a:t>Click to edit Master text styles</a:t>
             </a:r>
           </a:p>
           <a:p>
             <a:pPr lvl="1"/>
             <a:r>
-              <a:rPr lang="en-US" smtClean="0"/>
+              <a:rPr lang="en-US"/>
               <a:t>Second level</a:t>
             </a:r>
           </a:p>
           <a:p>
             <a:pPr lvl="2"/>
             <a:r>
-              <a:rPr lang="en-US" smtClean="0"/>
+              <a:rPr lang="en-US"/>
               <a:t>Third level</a:t>
             </a:r>
           </a:p>
           <a:p>
             <a:pPr lvl="3"/>
             <a:r>
-              <a:rPr lang="en-US" smtClean="0"/>
+              <a:rPr lang="en-US"/>
               <a:t>Fourth level</a:t>
             </a:r>
           </a:p>
           <a:p>
             <a:pPr lvl="4"/>
             <a:r>
-              <a:rPr lang="en-US" smtClean="0"/>
+              <a:rPr lang="en-US"/>
               <a:t>Fifth level</a:t>
             </a:r>
-            <a:endParaRPr lang="en-US"/>
           </a:p>
         </p:txBody>
       </p:sp>
@@ -1778,7 +1778,7 @@
           <a:p>
             <a:fld id="{5BCAD085-E8A6-8845-BD4E-CB4CCA059FC4}" type="datetimeFigureOut">
               <a:rPr lang="en-US" smtClean="0"/>
-              <a:t>1/27/13</a:t>
+              <a:t>5/12/2026</a:t>
             </a:fld>
             <a:endParaRPr lang="en-US"/>
           </a:p>
@@ -1872,10 +1872,9 @@
           <a:lstStyle/>
           <a:p>
             <a:r>
-              <a:rPr lang="en-US" smtClean="0"/>
+              <a:rPr lang="en-US"/>
               <a:t>Click to edit Master title style</a:t>
             </a:r>
-            <a:endParaRPr lang="en-US"/>
           </a:p>
         </p:txBody>
       </p:sp>
@@ -1896,7 +1895,7 @@
           <a:p>
             <a:fld id="{5BCAD085-E8A6-8845-BD4E-CB4CCA059FC4}" type="datetimeFigureOut">
               <a:rPr lang="en-US" smtClean="0"/>
-              <a:t>1/27/13</a:t>
+              <a:t>5/12/2026</a:t>
             </a:fld>
             <a:endParaRPr lang="en-US"/>
           </a:p>
@@ -1991,7 +1990,7 @@
           <a:p>
             <a:fld id="{5BCAD085-E8A6-8845-BD4E-CB4CCA059FC4}" type="datetimeFigureOut">
               <a:rPr lang="en-US" smtClean="0"/>
-              <a:t>1/27/13</a:t>
+              <a:t>5/12/2026</a:t>
             </a:fld>
             <a:endParaRPr lang="en-US"/>
           </a:p>
@@ -2094,10 +2093,9 @@
           </a:lstStyle>
           <a:p>
             <a:r>
-              <a:rPr lang="en-US" smtClean="0"/>
+              <a:rPr lang="en-US"/>
               <a:t>Click to edit Master title style</a:t>
             </a:r>
-            <a:endParaRPr lang="en-US"/>
           </a:p>
         </p:txBody>
       </p:sp>
@@ -2151,38 +2149,37 @@
           <a:p>
             <a:pPr lvl="0"/>
             <a:r>
-              <a:rPr lang="en-US" smtClean="0"/>
+              <a:rPr lang="en-US"/>
               <a:t>Click to edit Master text styles</a:t>
             </a:r>
           </a:p>
           <a:p>
             <a:pPr lvl="1"/>
             <a:r>
-              <a:rPr lang="en-US" smtClean="0"/>
+              <a:rPr lang="en-US"/>
               <a:t>Second level</a:t>
             </a:r>
           </a:p>
           <a:p>
             <a:pPr lvl="2"/>
             <a:r>
-              <a:rPr lang="en-US" smtClean="0"/>
+              <a:rPr lang="en-US"/>
               <a:t>Third level</a:t>
             </a:r>
           </a:p>
           <a:p>
             <a:pPr lvl="3"/>
             <a:r>
-              <a:rPr lang="en-US" smtClean="0"/>
+              <a:rPr lang="en-US"/>
               <a:t>Fourth level</a:t>
             </a:r>
           </a:p>
           <a:p>
             <a:pPr lvl="4"/>
             <a:r>
-              <a:rPr lang="en-US" smtClean="0"/>
+              <a:rPr lang="en-US"/>
               <a:t>Fifth level</a:t>
             </a:r>
-            <a:endParaRPr lang="en-US"/>
           </a:p>
         </p:txBody>
       </p:sp>
@@ -2245,7 +2242,7 @@
           <a:p>
             <a:pPr lvl="0"/>
             <a:r>
-              <a:rPr lang="en-US" smtClean="0"/>
+              <a:rPr lang="en-US"/>
               <a:t>Click to edit Master text styles</a:t>
             </a:r>
           </a:p>
@@ -2268,7 +2265,7 @@
           <a:p>
             <a:fld id="{5BCAD085-E8A6-8845-BD4E-CB4CCA059FC4}" type="datetimeFigureOut">
               <a:rPr lang="en-US" smtClean="0"/>
-              <a:t>1/27/13</a:t>
+              <a:t>5/12/2026</a:t>
             </a:fld>
             <a:endParaRPr lang="en-US"/>
           </a:p>
@@ -2371,10 +2368,9 @@
           </a:lstStyle>
           <a:p>
             <a:r>
-              <a:rPr lang="en-US" smtClean="0"/>
+              <a:rPr lang="en-US"/>
               <a:t>Click to edit Master title style</a:t>
             </a:r>
-            <a:endParaRPr lang="en-US"/>
           </a:p>
         </p:txBody>
       </p:sp>
@@ -2498,7 +2494,7 @@
           <a:p>
             <a:pPr lvl="0"/>
             <a:r>
-              <a:rPr lang="en-US" smtClean="0"/>
+              <a:rPr lang="en-US"/>
               <a:t>Click to edit Master text styles</a:t>
             </a:r>
           </a:p>
@@ -2521,7 +2517,7 @@
           <a:p>
             <a:fld id="{5BCAD085-E8A6-8845-BD4E-CB4CCA059FC4}" type="datetimeFigureOut">
               <a:rPr lang="en-US" smtClean="0"/>
-              <a:t>1/27/13</a:t>
+              <a:t>5/12/2026</a:t>
             </a:fld>
             <a:endParaRPr lang="en-US"/>
           </a:p>
@@ -2630,10 +2626,9 @@
           <a:lstStyle/>
           <a:p>
             <a:r>
-              <a:rPr lang="en-US" smtClean="0"/>
+              <a:rPr lang="en-US"/>
               <a:t>Click to edit Master title style</a:t>
             </a:r>
-            <a:endParaRPr lang="en-US"/>
           </a:p>
         </p:txBody>
       </p:sp>
@@ -2664,38 +2659,37 @@
           <a:p>
             <a:pPr lvl="0"/>
             <a:r>
-              <a:rPr lang="en-US" smtClean="0"/>
+              <a:rPr lang="en-US"/>
               <a:t>Click to edit Master text styles</a:t>
             </a:r>
           </a:p>
           <a:p>
             <a:pPr lvl="1"/>
             <a:r>
-              <a:rPr lang="en-US" smtClean="0"/>
+              <a:rPr lang="en-US"/>
               <a:t>Second level</a:t>
             </a:r>
           </a:p>
           <a:p>
             <a:pPr lvl="2"/>
             <a:r>
-              <a:rPr lang="en-US" smtClean="0"/>
+              <a:rPr lang="en-US"/>
               <a:t>Third level</a:t>
             </a:r>
           </a:p>
           <a:p>
             <a:pPr lvl="3"/>
             <a:r>
-              <a:rPr lang="en-US" smtClean="0"/>
+              <a:rPr lang="en-US"/>
               <a:t>Fourth level</a:t>
             </a:r>
           </a:p>
           <a:p>
             <a:pPr lvl="4"/>
             <a:r>
-              <a:rPr lang="en-US" smtClean="0"/>
+              <a:rPr lang="en-US"/>
               <a:t>Fifth level</a:t>
             </a:r>
-            <a:endParaRPr lang="en-US"/>
           </a:p>
         </p:txBody>
       </p:sp>
@@ -2734,7 +2728,7 @@
           <a:p>
             <a:fld id="{5BCAD085-E8A6-8845-BD4E-CB4CCA059FC4}" type="datetimeFigureOut">
               <a:rPr lang="en-US" smtClean="0"/>
-              <a:t>1/27/13</a:t>
+              <a:t>5/12/2026</a:t>
             </a:fld>
             <a:endParaRPr lang="en-US"/>
           </a:p>
@@ -3093,7 +3087,7 @@
 </file>
 
 <file path=ppt/slides/slide1.xml><?xml version="1.0" encoding="utf-8"?>
-<p:sld xmlns:a="http://schemas.openxmlformats.org/drawingml/2006/main" xmlns:p="http://schemas.openxmlformats.org/presentationml/2006/main" xmlns:r="http://schemas.openxmlformats.org/officeDocument/2006/relationships">
+<p:sld xmlns:a="http://schemas.openxmlformats.org/drawingml/2006/main" xmlns:r="http://schemas.openxmlformats.org/officeDocument/2006/relationships" xmlns:p="http://schemas.openxmlformats.org/presentationml/2006/main">
   <p:cSld>
     <p:spTree>
       <p:nvGrpSpPr>
@@ -3101,7 +3095,14 @@
         <p:cNvGrpSpPr/>
         <p:nvPr/>
       </p:nvGrpSpPr>
-      <p:grpSpPr/>
+      <p:grpSpPr>
+        <a:xfrm>
+          <a:off x="0" y="0"/>
+          <a:ext cx="0" cy="0"/>
+          <a:chOff x="0" y="0"/>
+          <a:chExt cx="0" cy="0"/>
+        </a:xfrm>
+      </p:grpSpPr>
       <p:sp>
         <p:nvSpPr>
           <p:cNvPr id="2" name="Rectangle 1"/>
@@ -3142,6 +3143,7 @@
           <a:lstStyle/>
           <a:p>
             <a:pPr algn="ctr"/>
+            <a:endParaRPr/>
           </a:p>
         </p:txBody>
       </p:sp>
@@ -3185,6 +3187,7 @@
           <a:lstStyle/>
           <a:p>
             <a:pPr algn="ctr"/>
+            <a:endParaRPr/>
           </a:p>
         </p:txBody>
       </p:sp>
@@ -3205,7 +3208,7 @@
           <a:noFill/>
         </p:spPr>
         <p:txBody>
-          <a:bodyPr wrap="square" lIns="45720" rIns="45720" tIns="18288" bIns="18288">
+          <a:bodyPr wrap="square" lIns="45720" tIns="18288" rIns="45720" bIns="18288">
             <a:spAutoFit/>
           </a:bodyPr>
           <a:lstStyle/>
@@ -3240,7 +3243,7 @@
           <a:noFill/>
         </p:spPr>
         <p:txBody>
-          <a:bodyPr wrap="square" lIns="45720" rIns="45720" tIns="18288" bIns="18288">
+          <a:bodyPr wrap="square" lIns="45720" tIns="18288" rIns="45720" bIns="18288">
             <a:spAutoFit/>
           </a:bodyPr>
           <a:lstStyle/>
@@ -3275,7 +3278,7 @@
           <a:noFill/>
         </p:spPr>
         <p:txBody>
-          <a:bodyPr wrap="square" lIns="45720" rIns="45720" tIns="18288" bIns="18288">
+          <a:bodyPr wrap="square" lIns="45720" tIns="18288" rIns="45720" bIns="18288">
             <a:spAutoFit/>
           </a:bodyPr>
           <a:lstStyle/>
@@ -3310,7 +3313,7 @@
           <a:noFill/>
         </p:spPr>
         <p:txBody>
-          <a:bodyPr wrap="square" lIns="45720" rIns="45720" tIns="18288" bIns="18288">
+          <a:bodyPr wrap="square" lIns="45720" tIns="18288" rIns="45720" bIns="18288">
             <a:spAutoFit/>
           </a:bodyPr>
           <a:lstStyle/>
@@ -3345,7 +3348,7 @@
           <a:noFill/>
         </p:spPr>
         <p:txBody>
-          <a:bodyPr wrap="square" lIns="45720" rIns="45720" tIns="18288" bIns="18288">
+          <a:bodyPr wrap="square" lIns="45720" tIns="18288" rIns="45720" bIns="18288">
             <a:spAutoFit/>
           </a:bodyPr>
           <a:lstStyle/>
@@ -3372,7 +3375,7 @@
 </file>
 
 <file path=ppt/slides/slide10.xml><?xml version="1.0" encoding="utf-8"?>
-<p:sld xmlns:a="http://schemas.openxmlformats.org/drawingml/2006/main" xmlns:p="http://schemas.openxmlformats.org/presentationml/2006/main" xmlns:r="http://schemas.openxmlformats.org/officeDocument/2006/relationships">
+<p:sld xmlns:a="http://schemas.openxmlformats.org/drawingml/2006/main" xmlns:r="http://schemas.openxmlformats.org/officeDocument/2006/relationships" xmlns:p="http://schemas.openxmlformats.org/presentationml/2006/main">
   <p:cSld>
     <p:spTree>
       <p:nvGrpSpPr>
@@ -3380,7 +3383,14 @@
         <p:cNvGrpSpPr/>
         <p:nvPr/>
       </p:nvGrpSpPr>
-      <p:grpSpPr/>
+      <p:grpSpPr>
+        <a:xfrm>
+          <a:off x="0" y="0"/>
+          <a:ext cx="0" cy="0"/>
+          <a:chOff x="0" y="0"/>
+          <a:chExt cx="0" cy="0"/>
+        </a:xfrm>
+      </p:grpSpPr>
       <p:sp>
         <p:nvSpPr>
           <p:cNvPr id="2" name="Rectangle 1"/>
@@ -3421,6 +3431,7 @@
           <a:lstStyle/>
           <a:p>
             <a:pPr algn="ctr"/>
+            <a:endParaRPr/>
           </a:p>
         </p:txBody>
       </p:sp>
@@ -3464,6 +3475,7 @@
           <a:lstStyle/>
           <a:p>
             <a:pPr algn="ctr"/>
+            <a:endParaRPr/>
           </a:p>
         </p:txBody>
       </p:sp>
@@ -3484,7 +3496,7 @@
           <a:noFill/>
         </p:spPr>
         <p:txBody>
-          <a:bodyPr wrap="square" lIns="45720" rIns="45720" tIns="18288" bIns="18288">
+          <a:bodyPr wrap="square" lIns="45720" tIns="18288" rIns="45720" bIns="18288">
             <a:spAutoFit/>
           </a:bodyPr>
           <a:lstStyle/>
@@ -3519,7 +3531,7 @@
           <a:noFill/>
         </p:spPr>
         <p:txBody>
-          <a:bodyPr wrap="square" lIns="45720" rIns="45720" tIns="18288" bIns="18288">
+          <a:bodyPr wrap="square" lIns="45720" tIns="18288" rIns="45720" bIns="18288">
             <a:spAutoFit/>
           </a:bodyPr>
           <a:lstStyle/>
@@ -3578,7 +3590,7 @@
           <a:noFill/>
         </p:spPr>
         <p:txBody>
-          <a:bodyPr wrap="square" lIns="45720" rIns="45720" tIns="18288" bIns="18288">
+          <a:bodyPr wrap="square" lIns="45720" tIns="18288" rIns="45720" bIns="18288">
             <a:spAutoFit/>
           </a:bodyPr>
           <a:lstStyle/>
@@ -3613,7 +3625,7 @@
           <a:noFill/>
         </p:spPr>
         <p:txBody>
-          <a:bodyPr wrap="square" lIns="45720" rIns="45720" tIns="18288" bIns="18288">
+          <a:bodyPr wrap="square" lIns="45720" tIns="18288" rIns="45720" bIns="18288">
             <a:spAutoFit/>
           </a:bodyPr>
           <a:lstStyle/>
@@ -3640,7 +3652,7 @@
 </file>
 
 <file path=ppt/slides/slide11.xml><?xml version="1.0" encoding="utf-8"?>
-<p:sld xmlns:a="http://schemas.openxmlformats.org/drawingml/2006/main" xmlns:p="http://schemas.openxmlformats.org/presentationml/2006/main" xmlns:r="http://schemas.openxmlformats.org/officeDocument/2006/relationships">
+<p:sld xmlns:a="http://schemas.openxmlformats.org/drawingml/2006/main" xmlns:r="http://schemas.openxmlformats.org/officeDocument/2006/relationships" xmlns:p="http://schemas.openxmlformats.org/presentationml/2006/main">
   <p:cSld>
     <p:spTree>
       <p:nvGrpSpPr>
@@ -3648,7 +3660,14 @@
         <p:cNvGrpSpPr/>
         <p:nvPr/>
       </p:nvGrpSpPr>
-      <p:grpSpPr/>
+      <p:grpSpPr>
+        <a:xfrm>
+          <a:off x="0" y="0"/>
+          <a:ext cx="0" cy="0"/>
+          <a:chOff x="0" y="0"/>
+          <a:chExt cx="0" cy="0"/>
+        </a:xfrm>
+      </p:grpSpPr>
       <p:sp>
         <p:nvSpPr>
           <p:cNvPr id="2" name="Rectangle 1"/>
@@ -3689,6 +3708,7 @@
           <a:lstStyle/>
           <a:p>
             <a:pPr algn="ctr"/>
+            <a:endParaRPr/>
           </a:p>
         </p:txBody>
       </p:sp>
@@ -3732,6 +3752,7 @@
           <a:lstStyle/>
           <a:p>
             <a:pPr algn="ctr"/>
+            <a:endParaRPr/>
           </a:p>
         </p:txBody>
       </p:sp>
@@ -3752,7 +3773,7 @@
           <a:noFill/>
         </p:spPr>
         <p:txBody>
-          <a:bodyPr wrap="square" lIns="45720" rIns="45720" tIns="18288" bIns="18288">
+          <a:bodyPr wrap="square" lIns="45720" tIns="18288" rIns="45720" bIns="18288">
             <a:spAutoFit/>
           </a:bodyPr>
           <a:lstStyle/>
@@ -3812,7 +3833,9 @@
         <p:txBody>
           <a:bodyPr rtlCol="0" anchor="ctr"/>
           <a:lstStyle/>
-          <a:p/>
+          <a:p>
+            <a:endParaRPr/>
+          </a:p>
         </p:txBody>
       </p:sp>
       <p:sp>
@@ -3832,7 +3855,7 @@
           <a:noFill/>
         </p:spPr>
         <p:txBody>
-          <a:bodyPr wrap="square" lIns="45720" rIns="45720" tIns="18288" bIns="18288">
+          <a:bodyPr wrap="square" lIns="45720" tIns="18288" rIns="45720" bIns="18288">
             <a:spAutoFit/>
           </a:bodyPr>
           <a:lstStyle/>
@@ -3867,7 +3890,7 @@
           <a:noFill/>
         </p:spPr>
         <p:txBody>
-          <a:bodyPr wrap="square" lIns="45720" rIns="45720" tIns="18288" bIns="18288">
+          <a:bodyPr wrap="square" lIns="45720" tIns="18288" rIns="45720" bIns="18288">
             <a:spAutoFit/>
           </a:bodyPr>
           <a:lstStyle/>
@@ -3902,7 +3925,7 @@
           <a:noFill/>
         </p:spPr>
         <p:txBody>
-          <a:bodyPr wrap="square" lIns="45720" rIns="45720" tIns="18288" bIns="18288">
+          <a:bodyPr wrap="square" lIns="45720" tIns="18288" rIns="45720" bIns="18288">
             <a:spAutoFit/>
           </a:bodyPr>
           <a:lstStyle/>
@@ -3937,7 +3960,7 @@
           <a:noFill/>
         </p:spPr>
         <p:txBody>
-          <a:bodyPr wrap="square" lIns="45720" rIns="45720" tIns="18288" bIns="18288">
+          <a:bodyPr wrap="square" lIns="45720" tIns="18288" rIns="45720" bIns="18288">
             <a:spAutoFit/>
           </a:bodyPr>
           <a:lstStyle/>
@@ -3972,7 +3995,7 @@
           <a:noFill/>
         </p:spPr>
         <p:txBody>
-          <a:bodyPr wrap="square" lIns="45720" rIns="45720" tIns="18288" bIns="18288">
+          <a:bodyPr wrap="square" lIns="45720" tIns="18288" rIns="45720" bIns="18288">
             <a:spAutoFit/>
           </a:bodyPr>
           <a:lstStyle/>
@@ -4007,7 +4030,7 @@
           <a:noFill/>
         </p:spPr>
         <p:txBody>
-          <a:bodyPr wrap="square" lIns="45720" rIns="45720" tIns="18288" bIns="18288">
+          <a:bodyPr wrap="square" lIns="45720" tIns="18288" rIns="45720" bIns="18288">
             <a:spAutoFit/>
           </a:bodyPr>
           <a:lstStyle/>
@@ -4067,7 +4090,9 @@
         <p:txBody>
           <a:bodyPr rtlCol="0" anchor="ctr"/>
           <a:lstStyle/>
-          <a:p/>
+          <a:p>
+            <a:endParaRPr/>
+          </a:p>
         </p:txBody>
       </p:sp>
       <p:sp>
@@ -4087,7 +4112,7 @@
           <a:noFill/>
         </p:spPr>
         <p:txBody>
-          <a:bodyPr wrap="square" lIns="45720" rIns="45720" tIns="18288" bIns="18288">
+          <a:bodyPr wrap="square" lIns="45720" tIns="18288" rIns="45720" bIns="18288">
             <a:spAutoFit/>
           </a:bodyPr>
           <a:lstStyle/>
@@ -4122,7 +4147,7 @@
           <a:noFill/>
         </p:spPr>
         <p:txBody>
-          <a:bodyPr wrap="square" lIns="45720" rIns="45720" tIns="18288" bIns="18288">
+          <a:bodyPr wrap="square" lIns="45720" tIns="18288" rIns="45720" bIns="18288">
             <a:spAutoFit/>
           </a:bodyPr>
           <a:lstStyle/>
@@ -4157,7 +4182,7 @@
           <a:noFill/>
         </p:spPr>
         <p:txBody>
-          <a:bodyPr wrap="square" lIns="45720" rIns="45720" tIns="18288" bIns="18288">
+          <a:bodyPr wrap="square" lIns="45720" tIns="18288" rIns="45720" bIns="18288">
             <a:spAutoFit/>
           </a:bodyPr>
           <a:lstStyle/>
@@ -4192,7 +4217,7 @@
           <a:noFill/>
         </p:spPr>
         <p:txBody>
-          <a:bodyPr wrap="square" lIns="45720" rIns="45720" tIns="18288" bIns="18288">
+          <a:bodyPr wrap="square" lIns="45720" tIns="18288" rIns="45720" bIns="18288">
             <a:spAutoFit/>
           </a:bodyPr>
           <a:lstStyle/>
@@ -4227,7 +4252,7 @@
           <a:noFill/>
         </p:spPr>
         <p:txBody>
-          <a:bodyPr wrap="square" lIns="45720" rIns="45720" tIns="18288" bIns="18288">
+          <a:bodyPr wrap="square" lIns="45720" tIns="18288" rIns="45720" bIns="18288">
             <a:spAutoFit/>
           </a:bodyPr>
           <a:lstStyle/>
@@ -4262,7 +4287,7 @@
           <a:noFill/>
         </p:spPr>
         <p:txBody>
-          <a:bodyPr wrap="square" lIns="45720" rIns="45720" tIns="18288" bIns="18288">
+          <a:bodyPr wrap="square" lIns="45720" tIns="18288" rIns="45720" bIns="18288">
             <a:spAutoFit/>
           </a:bodyPr>
           <a:lstStyle/>
@@ -4296,8 +4321,8 @@
         </p:blipFill>
         <p:spPr>
           <a:xfrm>
-            <a:off x="457200" y="3657600"/>
-            <a:ext cx="11247120" cy="6513957"/>
+            <a:off x="6293426" y="3608748"/>
+            <a:ext cx="5136574" cy="2974932"/>
           </a:xfrm>
           <a:prstGeom prst="rect">
             <a:avLst/>
@@ -4321,7 +4346,7 @@
           <a:noFill/>
         </p:spPr>
         <p:txBody>
-          <a:bodyPr wrap="square" lIns="45720" rIns="45720" tIns="18288" bIns="18288">
+          <a:bodyPr wrap="square" lIns="45720" tIns="18288" rIns="45720" bIns="18288">
             <a:spAutoFit/>
           </a:bodyPr>
           <a:lstStyle/>
@@ -4356,7 +4381,7 @@
           <a:noFill/>
         </p:spPr>
         <p:txBody>
-          <a:bodyPr wrap="square" lIns="45720" rIns="45720" tIns="18288" bIns="18288">
+          <a:bodyPr wrap="square" lIns="45720" tIns="18288" rIns="45720" bIns="18288">
             <a:spAutoFit/>
           </a:bodyPr>
           <a:lstStyle/>
@@ -4383,7 +4408,7 @@
 </file>
 
 <file path=ppt/slides/slide12.xml><?xml version="1.0" encoding="utf-8"?>
-<p:sld xmlns:a="http://schemas.openxmlformats.org/drawingml/2006/main" xmlns:p="http://schemas.openxmlformats.org/presentationml/2006/main" xmlns:r="http://schemas.openxmlformats.org/officeDocument/2006/relationships">
+<p:sld xmlns:a="http://schemas.openxmlformats.org/drawingml/2006/main" xmlns:r="http://schemas.openxmlformats.org/officeDocument/2006/relationships" xmlns:p="http://schemas.openxmlformats.org/presentationml/2006/main">
   <p:cSld>
     <p:spTree>
       <p:nvGrpSpPr>
@@ -4391,7 +4416,14 @@
         <p:cNvGrpSpPr/>
         <p:nvPr/>
       </p:nvGrpSpPr>
-      <p:grpSpPr/>
+      <p:grpSpPr>
+        <a:xfrm>
+          <a:off x="0" y="0"/>
+          <a:ext cx="0" cy="0"/>
+          <a:chOff x="0" y="0"/>
+          <a:chExt cx="0" cy="0"/>
+        </a:xfrm>
+      </p:grpSpPr>
       <p:sp>
         <p:nvSpPr>
           <p:cNvPr id="2" name="Rectangle 1"/>
@@ -4432,6 +4464,7 @@
           <a:lstStyle/>
           <a:p>
             <a:pPr algn="ctr"/>
+            <a:endParaRPr/>
           </a:p>
         </p:txBody>
       </p:sp>
@@ -4475,6 +4508,7 @@
           <a:lstStyle/>
           <a:p>
             <a:pPr algn="ctr"/>
+            <a:endParaRPr/>
           </a:p>
         </p:txBody>
       </p:sp>
@@ -4495,7 +4529,7 @@
           <a:noFill/>
         </p:spPr>
         <p:txBody>
-          <a:bodyPr wrap="square" lIns="45720" rIns="45720" tIns="18288" bIns="18288">
+          <a:bodyPr wrap="square" lIns="45720" tIns="18288" rIns="45720" bIns="18288">
             <a:spAutoFit/>
           </a:bodyPr>
           <a:lstStyle/>
@@ -4508,30 +4542,69 @@
                 </a:solidFill>
                 <a:latin typeface="Segoe UI"/>
               </a:rPr>
-              <a:t>Results — Bot Filter, Method, Header Limits</a:t>
-            </a:r>
-          </a:p>
-        </p:txBody>
-      </p:sp>
-      <p:sp>
-        <p:nvSpPr>
-          <p:cNvPr id="5" name="Rectangle 4"/>
+              <a:t>Results — Kubernetes Load Balancing</a:t>
+            </a:r>
+          </a:p>
+        </p:txBody>
+      </p:sp>
+      <p:sp>
+        <p:nvSpPr>
+          <p:cNvPr id="5" name="TextBox 4"/>
+          <p:cNvSpPr txBox="1"/>
+          <p:nvPr/>
+        </p:nvSpPr>
+        <p:spPr>
+          <a:xfrm>
+            <a:off x="457200" y="914400"/>
+            <a:ext cx="10972800" cy="457200"/>
+          </a:xfrm>
+          <a:prstGeom prst="rect">
+            <a:avLst/>
+          </a:prstGeom>
+          <a:noFill/>
+        </p:spPr>
+        <p:txBody>
+          <a:bodyPr wrap="square" lIns="45720" tIns="18288" rIns="45720" bIns="18288">
+            <a:spAutoFit/>
+          </a:bodyPr>
+          <a:lstStyle/>
+          <a:p>
+            <a:pPr algn="l"/>
+            <a:r>
+              <a:rPr sz="1400" b="0">
+                <a:solidFill>
+                  <a:srgbClr val="94A3B8"/>
+                </a:solidFill>
+                <a:latin typeface="Segoe UI"/>
+              </a:rPr>
+              <a:t>6 sequential requests to /api/info — pods responding (round-robin):</a:t>
+            </a:r>
+          </a:p>
+        </p:txBody>
+      </p:sp>
+      <p:sp>
+        <p:nvSpPr>
+          <p:cNvPr id="6" name="Rounded Rectangle 5"/>
           <p:cNvSpPr/>
           <p:nvPr/>
         </p:nvSpPr>
         <p:spPr>
           <a:xfrm>
-            <a:off x="457200" y="1188720"/>
-            <a:ext cx="11247120" cy="411480"/>
-          </a:xfrm>
-          <a:prstGeom prst="rect">
-            <a:avLst/>
+            <a:off x="1371600" y="1554480"/>
+            <a:ext cx="9144000" cy="457200"/>
+          </a:xfrm>
+          <a:prstGeom prst="roundRect">
+            <a:avLst>
+              <a:gd name="adj" fmla="val 20000"/>
+            </a:avLst>
           </a:prstGeom>
           <a:solidFill>
-            <a:srgbClr val="38BDF8"/>
+            <a:srgbClr val="1E293B"/>
           </a:solidFill>
-          <a:ln>
-            <a:noFill/>
+          <a:ln w="19050">
+            <a:solidFill>
+              <a:srgbClr val="38BDF8"/>
+            </a:solidFill>
           </a:ln>
         </p:spPr>
         <p:style>
@@ -4553,133 +4626,103 @@
           <a:lstStyle/>
           <a:p>
             <a:pPr algn="ctr"/>
-          </a:p>
-        </p:txBody>
-      </p:sp>
-      <p:sp>
-        <p:nvSpPr>
-          <p:cNvPr id="6" name="TextBox 5"/>
-          <p:cNvSpPr txBox="1"/>
-          <p:nvPr/>
-        </p:nvSpPr>
-        <p:spPr>
-          <a:xfrm>
-            <a:off x="548640" y="1234440"/>
-            <a:ext cx="4114800" cy="365760"/>
-          </a:xfrm>
-          <a:prstGeom prst="rect">
-            <a:avLst/>
-          </a:prstGeom>
-          <a:noFill/>
-        </p:spPr>
-        <p:txBody>
-          <a:bodyPr wrap="square" lIns="45720" rIns="45720" tIns="18288" bIns="18288">
+            <a:endParaRPr/>
+          </a:p>
+        </p:txBody>
+      </p:sp>
+      <p:sp>
+        <p:nvSpPr>
+          <p:cNvPr id="7" name="TextBox 6"/>
+          <p:cNvSpPr txBox="1"/>
+          <p:nvPr/>
+        </p:nvSpPr>
+        <p:spPr>
+          <a:xfrm>
+            <a:off x="1645920" y="1645920"/>
+            <a:ext cx="1828800" cy="274320"/>
+          </a:xfrm>
+          <a:prstGeom prst="rect">
+            <a:avLst/>
+          </a:prstGeom>
+          <a:noFill/>
+        </p:spPr>
+        <p:txBody>
+          <a:bodyPr wrap="square" lIns="45720" tIns="18288" rIns="45720" bIns="18288">
             <a:spAutoFit/>
           </a:bodyPr>
           <a:lstStyle/>
           <a:p>
             <a:pPr algn="l"/>
             <a:r>
-              <a:rPr sz="1400" b="1">
-                <a:solidFill>
-                  <a:srgbClr val="0F172A"/>
-                </a:solidFill>
-                <a:latin typeface="Segoe UI"/>
-              </a:rPr>
-              <a:t>Probe</a:t>
-            </a:r>
-          </a:p>
-        </p:txBody>
-      </p:sp>
-      <p:sp>
-        <p:nvSpPr>
-          <p:cNvPr id="7" name="TextBox 6"/>
-          <p:cNvSpPr txBox="1"/>
-          <p:nvPr/>
-        </p:nvSpPr>
-        <p:spPr>
-          <a:xfrm>
-            <a:off x="5029200" y="1234440"/>
-            <a:ext cx="4114800" cy="365760"/>
-          </a:xfrm>
-          <a:prstGeom prst="rect">
-            <a:avLst/>
-          </a:prstGeom>
-          <a:noFill/>
-        </p:spPr>
-        <p:txBody>
-          <a:bodyPr wrap="square" lIns="45720" rIns="45720" tIns="18288" bIns="18288">
+              <a:rPr sz="1300" b="1">
+                <a:solidFill>
+                  <a:srgbClr val="E2E8F0"/>
+                </a:solidFill>
+                <a:latin typeface="Segoe UI"/>
+              </a:rPr>
+              <a:t>Request 1</a:t>
+            </a:r>
+          </a:p>
+        </p:txBody>
+      </p:sp>
+      <p:sp>
+        <p:nvSpPr>
+          <p:cNvPr id="8" name="TextBox 7"/>
+          <p:cNvSpPr txBox="1"/>
+          <p:nvPr/>
+        </p:nvSpPr>
+        <p:spPr>
+          <a:xfrm>
+            <a:off x="3657600" y="1645920"/>
+            <a:ext cx="6400800" cy="274320"/>
+          </a:xfrm>
+          <a:prstGeom prst="rect">
+            <a:avLst/>
+          </a:prstGeom>
+          <a:noFill/>
+        </p:spPr>
+        <p:txBody>
+          <a:bodyPr wrap="square" lIns="45720" tIns="18288" rIns="45720" bIns="18288">
             <a:spAutoFit/>
           </a:bodyPr>
           <a:lstStyle/>
           <a:p>
             <a:pPr algn="l"/>
             <a:r>
-              <a:rPr sz="1400" b="1">
-                <a:solidFill>
-                  <a:srgbClr val="0F172A"/>
-                </a:solidFill>
-                <a:latin typeface="Segoe UI"/>
-              </a:rPr>
-              <a:t>Response</a:t>
-            </a:r>
-          </a:p>
-        </p:txBody>
-      </p:sp>
-      <p:sp>
-        <p:nvSpPr>
-          <p:cNvPr id="8" name="TextBox 7"/>
-          <p:cNvSpPr txBox="1"/>
-          <p:nvPr/>
-        </p:nvSpPr>
-        <p:spPr>
-          <a:xfrm>
-            <a:off x="7772400" y="1234440"/>
-            <a:ext cx="4114800" cy="365760"/>
-          </a:xfrm>
-          <a:prstGeom prst="rect">
-            <a:avLst/>
-          </a:prstGeom>
-          <a:noFill/>
-        </p:spPr>
-        <p:txBody>
-          <a:bodyPr wrap="square" lIns="45720" rIns="45720" tIns="18288" bIns="18288">
-            <a:spAutoFit/>
-          </a:bodyPr>
-          <a:lstStyle/>
-          <a:p>
-            <a:pPr algn="l"/>
-            <a:r>
-              <a:rPr sz="1400" b="1">
-                <a:solidFill>
-                  <a:srgbClr val="0F172A"/>
-                </a:solidFill>
-                <a:latin typeface="Segoe UI"/>
-              </a:rPr>
-              <a:t>Outcome</a:t>
-            </a:r>
-          </a:p>
-        </p:txBody>
-      </p:sp>
-      <p:sp>
-        <p:nvSpPr>
-          <p:cNvPr id="9" name="Rectangle 8"/>
+              <a:rPr sz="1300" b="0">
+                <a:solidFill>
+                  <a:srgbClr val="38BDF8"/>
+                </a:solidFill>
+                <a:latin typeface="Consolas"/>
+              </a:rPr>
+              <a:t>backend-85689c8775-22ml6</a:t>
+            </a:r>
+          </a:p>
+        </p:txBody>
+      </p:sp>
+      <p:sp>
+        <p:nvSpPr>
+          <p:cNvPr id="9" name="Rounded Rectangle 8"/>
           <p:cNvSpPr/>
           <p:nvPr/>
         </p:nvSpPr>
         <p:spPr>
           <a:xfrm>
-            <a:off x="457200" y="1645920"/>
-            <a:ext cx="11247120" cy="365760"/>
-          </a:xfrm>
-          <a:prstGeom prst="rect">
-            <a:avLst/>
+            <a:off x="1371600" y="2057400"/>
+            <a:ext cx="9144000" cy="457200"/>
+          </a:xfrm>
+          <a:prstGeom prst="roundRect">
+            <a:avLst>
+              <a:gd name="adj" fmla="val 20000"/>
+            </a:avLst>
           </a:prstGeom>
           <a:solidFill>
             <a:srgbClr val="1E293B"/>
           </a:solidFill>
-          <a:ln>
-            <a:noFill/>
+          <a:ln w="19050">
+            <a:solidFill>
+              <a:srgbClr val="6EE7B7"/>
+            </a:solidFill>
           </a:ln>
         </p:spPr>
         <p:style>
@@ -4701,6 +4744,7 @@
           <a:lstStyle/>
           <a:p>
             <a:pPr algn="ctr"/>
+            <a:endParaRPr/>
           </a:p>
         </p:txBody>
       </p:sp>
@@ -4712,227 +4756,91 @@
         </p:nvSpPr>
         <p:spPr>
           <a:xfrm>
-            <a:off x="548640" y="1691640"/>
-            <a:ext cx="4389120" cy="365760"/>
-          </a:xfrm>
-          <a:prstGeom prst="rect">
-            <a:avLst/>
-          </a:prstGeom>
-          <a:noFill/>
-        </p:spPr>
-        <p:txBody>
-          <a:bodyPr wrap="square" lIns="45720" rIns="45720" tIns="18288" bIns="18288">
+            <a:off x="1645920" y="2148840"/>
+            <a:ext cx="1828800" cy="274320"/>
+          </a:xfrm>
+          <a:prstGeom prst="rect">
+            <a:avLst/>
+          </a:prstGeom>
+          <a:noFill/>
+        </p:spPr>
+        <p:txBody>
+          <a:bodyPr wrap="square" lIns="45720" tIns="18288" rIns="45720" bIns="18288">
             <a:spAutoFit/>
           </a:bodyPr>
           <a:lstStyle/>
           <a:p>
             <a:pPr algn="l"/>
             <a:r>
-              <a:rPr sz="1200" b="0">
+              <a:rPr sz="1300" b="1">
                 <a:solidFill>
                   <a:srgbClr val="E2E8F0"/>
                 </a:solidFill>
+                <a:latin typeface="Segoe UI"/>
+              </a:rPr>
+              <a:t>Request 2</a:t>
+            </a:r>
+          </a:p>
+        </p:txBody>
+      </p:sp>
+      <p:sp>
+        <p:nvSpPr>
+          <p:cNvPr id="11" name="TextBox 10"/>
+          <p:cNvSpPr txBox="1"/>
+          <p:nvPr/>
+        </p:nvSpPr>
+        <p:spPr>
+          <a:xfrm>
+            <a:off x="3657600" y="2148840"/>
+            <a:ext cx="6400800" cy="274320"/>
+          </a:xfrm>
+          <a:prstGeom prst="rect">
+            <a:avLst/>
+          </a:prstGeom>
+          <a:noFill/>
+        </p:spPr>
+        <p:txBody>
+          <a:bodyPr wrap="square" lIns="45720" tIns="18288" rIns="45720" bIns="18288">
+            <a:spAutoFit/>
+          </a:bodyPr>
+          <a:lstStyle/>
+          <a:p>
+            <a:pPr algn="l"/>
+            <a:r>
+              <a:rPr sz="1300" b="0">
+                <a:solidFill>
+                  <a:srgbClr val="6EE7B7"/>
+                </a:solidFill>
                 <a:latin typeface="Consolas"/>
               </a:rPr>
-              <a:t>Empty User-Agent</a:t>
-            </a:r>
-          </a:p>
-        </p:txBody>
-      </p:sp>
-      <p:sp>
-        <p:nvSpPr>
-          <p:cNvPr id="11" name="TextBox 10"/>
-          <p:cNvSpPr txBox="1"/>
-          <p:nvPr/>
-        </p:nvSpPr>
-        <p:spPr>
-          <a:xfrm>
-            <a:off x="5029200" y="1691640"/>
-            <a:ext cx="2560320" cy="365760"/>
-          </a:xfrm>
-          <a:prstGeom prst="rect">
-            <a:avLst/>
-          </a:prstGeom>
-          <a:noFill/>
-        </p:spPr>
-        <p:txBody>
-          <a:bodyPr wrap="square" lIns="45720" rIns="45720" tIns="18288" bIns="18288">
-            <a:spAutoFit/>
-          </a:bodyPr>
-          <a:lstStyle/>
-          <a:p>
-            <a:pPr algn="l"/>
-            <a:r>
-              <a:rPr sz="1200" b="1">
-                <a:solidFill>
-                  <a:srgbClr val="38BDF8"/>
-                </a:solidFill>
-                <a:latin typeface="Consolas"/>
-              </a:rPr>
-              <a:t>HTTP 403</a:t>
-            </a:r>
-          </a:p>
-        </p:txBody>
-      </p:sp>
-      <p:sp>
-        <p:nvSpPr>
-          <p:cNvPr id="12" name="TextBox 11"/>
-          <p:cNvSpPr txBox="1"/>
-          <p:nvPr/>
-        </p:nvSpPr>
-        <p:spPr>
-          <a:xfrm>
-            <a:off x="7772400" y="1691640"/>
-            <a:ext cx="4114800" cy="365760"/>
-          </a:xfrm>
-          <a:prstGeom prst="rect">
-            <a:avLst/>
-          </a:prstGeom>
-          <a:noFill/>
-        </p:spPr>
-        <p:txBody>
-          <a:bodyPr wrap="square" lIns="45720" rIns="45720" tIns="18288" bIns="18288">
-            <a:spAutoFit/>
-          </a:bodyPr>
-          <a:lstStyle/>
-          <a:p>
-            <a:pPr algn="l"/>
-            <a:r>
-              <a:rPr sz="1200" b="1">
-                <a:solidFill>
-                  <a:srgbClr val="6EE7B7"/>
-                </a:solidFill>
-                <a:latin typeface="Segoe UI"/>
-              </a:rPr>
-              <a:t>BLOCKED</a:t>
-            </a:r>
-          </a:p>
-        </p:txBody>
-      </p:sp>
-      <p:sp>
-        <p:nvSpPr>
-          <p:cNvPr id="13" name="TextBox 12"/>
-          <p:cNvSpPr txBox="1"/>
-          <p:nvPr/>
-        </p:nvSpPr>
-        <p:spPr>
-          <a:xfrm>
-            <a:off x="548640" y="2057400"/>
-            <a:ext cx="4389120" cy="365760"/>
-          </a:xfrm>
-          <a:prstGeom prst="rect">
-            <a:avLst/>
-          </a:prstGeom>
-          <a:noFill/>
-        </p:spPr>
-        <p:txBody>
-          <a:bodyPr wrap="square" lIns="45720" rIns="45720" tIns="18288" bIns="18288">
-            <a:spAutoFit/>
-          </a:bodyPr>
-          <a:lstStyle/>
-          <a:p>
-            <a:pPr algn="l"/>
-            <a:r>
-              <a:rPr sz="1200" b="0">
-                <a:solidFill>
-                  <a:srgbClr val="E2E8F0"/>
-                </a:solidFill>
-                <a:latin typeface="Consolas"/>
-              </a:rPr>
-              <a:t>sqlmap/1.5</a:t>
-            </a:r>
-          </a:p>
-        </p:txBody>
-      </p:sp>
-      <p:sp>
-        <p:nvSpPr>
-          <p:cNvPr id="14" name="TextBox 13"/>
-          <p:cNvSpPr txBox="1"/>
-          <p:nvPr/>
-        </p:nvSpPr>
-        <p:spPr>
-          <a:xfrm>
-            <a:off x="5029200" y="2057400"/>
-            <a:ext cx="2560320" cy="365760"/>
-          </a:xfrm>
-          <a:prstGeom prst="rect">
-            <a:avLst/>
-          </a:prstGeom>
-          <a:noFill/>
-        </p:spPr>
-        <p:txBody>
-          <a:bodyPr wrap="square" lIns="45720" rIns="45720" tIns="18288" bIns="18288">
-            <a:spAutoFit/>
-          </a:bodyPr>
-          <a:lstStyle/>
-          <a:p>
-            <a:pPr algn="l"/>
-            <a:r>
-              <a:rPr sz="1200" b="1">
-                <a:solidFill>
-                  <a:srgbClr val="38BDF8"/>
-                </a:solidFill>
-                <a:latin typeface="Consolas"/>
-              </a:rPr>
-              <a:t>HTTP 403</a:t>
-            </a:r>
-          </a:p>
-        </p:txBody>
-      </p:sp>
-      <p:sp>
-        <p:nvSpPr>
-          <p:cNvPr id="15" name="TextBox 14"/>
-          <p:cNvSpPr txBox="1"/>
-          <p:nvPr/>
-        </p:nvSpPr>
-        <p:spPr>
-          <a:xfrm>
-            <a:off x="7772400" y="2057400"/>
-            <a:ext cx="4114800" cy="365760"/>
-          </a:xfrm>
-          <a:prstGeom prst="rect">
-            <a:avLst/>
-          </a:prstGeom>
-          <a:noFill/>
-        </p:spPr>
-        <p:txBody>
-          <a:bodyPr wrap="square" lIns="45720" rIns="45720" tIns="18288" bIns="18288">
-            <a:spAutoFit/>
-          </a:bodyPr>
-          <a:lstStyle/>
-          <a:p>
-            <a:pPr algn="l"/>
-            <a:r>
-              <a:rPr sz="1200" b="1">
-                <a:solidFill>
-                  <a:srgbClr val="6EE7B7"/>
-                </a:solidFill>
-                <a:latin typeface="Segoe UI"/>
-              </a:rPr>
-              <a:t>BLOCKED</a:t>
-            </a:r>
-          </a:p>
-        </p:txBody>
-      </p:sp>
-      <p:sp>
-        <p:nvSpPr>
-          <p:cNvPr id="16" name="Rectangle 15"/>
+              <a:t>backend-85689c8775-zddq8</a:t>
+            </a:r>
+          </a:p>
+        </p:txBody>
+      </p:sp>
+      <p:sp>
+        <p:nvSpPr>
+          <p:cNvPr id="12" name="Rounded Rectangle 11"/>
           <p:cNvSpPr/>
           <p:nvPr/>
         </p:nvSpPr>
         <p:spPr>
           <a:xfrm>
-            <a:off x="457200" y="2377440"/>
-            <a:ext cx="11247120" cy="365760"/>
-          </a:xfrm>
-          <a:prstGeom prst="rect">
-            <a:avLst/>
+            <a:off x="1371600" y="2560320"/>
+            <a:ext cx="9144000" cy="457200"/>
+          </a:xfrm>
+          <a:prstGeom prst="roundRect">
+            <a:avLst>
+              <a:gd name="adj" fmla="val 20000"/>
+            </a:avLst>
           </a:prstGeom>
           <a:solidFill>
             <a:srgbClr val="1E293B"/>
           </a:solidFill>
-          <a:ln>
-            <a:noFill/>
+          <a:ln w="19050">
+            <a:solidFill>
+              <a:srgbClr val="38BDF8"/>
+            </a:solidFill>
           </a:ln>
         </p:spPr>
         <p:style>
@@ -4954,238 +4862,103 @@
           <a:lstStyle/>
           <a:p>
             <a:pPr algn="ctr"/>
-          </a:p>
-        </p:txBody>
-      </p:sp>
-      <p:sp>
-        <p:nvSpPr>
-          <p:cNvPr id="17" name="TextBox 16"/>
-          <p:cNvSpPr txBox="1"/>
-          <p:nvPr/>
-        </p:nvSpPr>
-        <p:spPr>
-          <a:xfrm>
-            <a:off x="548640" y="2423160"/>
-            <a:ext cx="4389120" cy="365760"/>
-          </a:xfrm>
-          <a:prstGeom prst="rect">
-            <a:avLst/>
-          </a:prstGeom>
-          <a:noFill/>
-        </p:spPr>
-        <p:txBody>
-          <a:bodyPr wrap="square" lIns="45720" rIns="45720" tIns="18288" bIns="18288">
+            <a:endParaRPr/>
+          </a:p>
+        </p:txBody>
+      </p:sp>
+      <p:sp>
+        <p:nvSpPr>
+          <p:cNvPr id="13" name="TextBox 12"/>
+          <p:cNvSpPr txBox="1"/>
+          <p:nvPr/>
+        </p:nvSpPr>
+        <p:spPr>
+          <a:xfrm>
+            <a:off x="1645920" y="2651760"/>
+            <a:ext cx="1828800" cy="274320"/>
+          </a:xfrm>
+          <a:prstGeom prst="rect">
+            <a:avLst/>
+          </a:prstGeom>
+          <a:noFill/>
+        </p:spPr>
+        <p:txBody>
+          <a:bodyPr wrap="square" lIns="45720" tIns="18288" rIns="45720" bIns="18288">
             <a:spAutoFit/>
           </a:bodyPr>
           <a:lstStyle/>
           <a:p>
             <a:pPr algn="l"/>
             <a:r>
-              <a:rPr sz="1200" b="0">
+              <a:rPr sz="1300" b="1">
                 <a:solidFill>
                   <a:srgbClr val="E2E8F0"/>
                 </a:solidFill>
+                <a:latin typeface="Segoe UI"/>
+              </a:rPr>
+              <a:t>Request 3</a:t>
+            </a:r>
+          </a:p>
+        </p:txBody>
+      </p:sp>
+      <p:sp>
+        <p:nvSpPr>
+          <p:cNvPr id="14" name="TextBox 13"/>
+          <p:cNvSpPr txBox="1"/>
+          <p:nvPr/>
+        </p:nvSpPr>
+        <p:spPr>
+          <a:xfrm>
+            <a:off x="3657600" y="2651760"/>
+            <a:ext cx="6400800" cy="274320"/>
+          </a:xfrm>
+          <a:prstGeom prst="rect">
+            <a:avLst/>
+          </a:prstGeom>
+          <a:noFill/>
+        </p:spPr>
+        <p:txBody>
+          <a:bodyPr wrap="square" lIns="45720" tIns="18288" rIns="45720" bIns="18288">
+            <a:spAutoFit/>
+          </a:bodyPr>
+          <a:lstStyle/>
+          <a:p>
+            <a:pPr algn="l"/>
+            <a:r>
+              <a:rPr sz="1300" b="0">
+                <a:solidFill>
+                  <a:srgbClr val="38BDF8"/>
+                </a:solidFill>
                 <a:latin typeface="Consolas"/>
               </a:rPr>
-              <a:t>nikto/2.1</a:t>
-            </a:r>
-          </a:p>
-        </p:txBody>
-      </p:sp>
-      <p:sp>
-        <p:nvSpPr>
-          <p:cNvPr id="18" name="TextBox 17"/>
-          <p:cNvSpPr txBox="1"/>
-          <p:nvPr/>
-        </p:nvSpPr>
-        <p:spPr>
-          <a:xfrm>
-            <a:off x="5029200" y="2423160"/>
-            <a:ext cx="2560320" cy="365760"/>
-          </a:xfrm>
-          <a:prstGeom prst="rect">
-            <a:avLst/>
-          </a:prstGeom>
-          <a:noFill/>
-        </p:spPr>
-        <p:txBody>
-          <a:bodyPr wrap="square" lIns="45720" rIns="45720" tIns="18288" bIns="18288">
-            <a:spAutoFit/>
-          </a:bodyPr>
-          <a:lstStyle/>
-          <a:p>
-            <a:pPr algn="l"/>
-            <a:r>
-              <a:rPr sz="1200" b="1">
-                <a:solidFill>
-                  <a:srgbClr val="38BDF8"/>
-                </a:solidFill>
-                <a:latin typeface="Consolas"/>
-              </a:rPr>
-              <a:t>HTTP 403</a:t>
-            </a:r>
-          </a:p>
-        </p:txBody>
-      </p:sp>
-      <p:sp>
-        <p:nvSpPr>
-          <p:cNvPr id="19" name="TextBox 18"/>
-          <p:cNvSpPr txBox="1"/>
-          <p:nvPr/>
-        </p:nvSpPr>
-        <p:spPr>
-          <a:xfrm>
-            <a:off x="7772400" y="2423160"/>
-            <a:ext cx="4114800" cy="365760"/>
-          </a:xfrm>
-          <a:prstGeom prst="rect">
-            <a:avLst/>
-          </a:prstGeom>
-          <a:noFill/>
-        </p:spPr>
-        <p:txBody>
-          <a:bodyPr wrap="square" lIns="45720" rIns="45720" tIns="18288" bIns="18288">
-            <a:spAutoFit/>
-          </a:bodyPr>
-          <a:lstStyle/>
-          <a:p>
-            <a:pPr algn="l"/>
-            <a:r>
-              <a:rPr sz="1200" b="1">
-                <a:solidFill>
-                  <a:srgbClr val="6EE7B7"/>
-                </a:solidFill>
-                <a:latin typeface="Segoe UI"/>
-              </a:rPr>
-              <a:t>BLOCKED</a:t>
-            </a:r>
-          </a:p>
-        </p:txBody>
-      </p:sp>
-      <p:sp>
-        <p:nvSpPr>
-          <p:cNvPr id="20" name="TextBox 19"/>
-          <p:cNvSpPr txBox="1"/>
-          <p:nvPr/>
-        </p:nvSpPr>
-        <p:spPr>
-          <a:xfrm>
-            <a:off x="548640" y="2788920"/>
-            <a:ext cx="4389120" cy="365760"/>
-          </a:xfrm>
-          <a:prstGeom prst="rect">
-            <a:avLst/>
-          </a:prstGeom>
-          <a:noFill/>
-        </p:spPr>
-        <p:txBody>
-          <a:bodyPr wrap="square" lIns="45720" rIns="45720" tIns="18288" bIns="18288">
-            <a:spAutoFit/>
-          </a:bodyPr>
-          <a:lstStyle/>
-          <a:p>
-            <a:pPr algn="l"/>
-            <a:r>
-              <a:rPr sz="1200" b="0">
-                <a:solidFill>
-                  <a:srgbClr val="E2E8F0"/>
-                </a:solidFill>
-                <a:latin typeface="Consolas"/>
-              </a:rPr>
-              <a:t>Mozilla/5.0</a:t>
-            </a:r>
-          </a:p>
-        </p:txBody>
-      </p:sp>
-      <p:sp>
-        <p:nvSpPr>
-          <p:cNvPr id="21" name="TextBox 20"/>
-          <p:cNvSpPr txBox="1"/>
-          <p:nvPr/>
-        </p:nvSpPr>
-        <p:spPr>
-          <a:xfrm>
-            <a:off x="5029200" y="2788920"/>
-            <a:ext cx="2560320" cy="365760"/>
-          </a:xfrm>
-          <a:prstGeom prst="rect">
-            <a:avLst/>
-          </a:prstGeom>
-          <a:noFill/>
-        </p:spPr>
-        <p:txBody>
-          <a:bodyPr wrap="square" lIns="45720" rIns="45720" tIns="18288" bIns="18288">
-            <a:spAutoFit/>
-          </a:bodyPr>
-          <a:lstStyle/>
-          <a:p>
-            <a:pPr algn="l"/>
-            <a:r>
-              <a:rPr sz="1200" b="1">
-                <a:solidFill>
-                  <a:srgbClr val="38BDF8"/>
-                </a:solidFill>
-                <a:latin typeface="Consolas"/>
-              </a:rPr>
-              <a:t>HTTP 200</a:t>
-            </a:r>
-          </a:p>
-        </p:txBody>
-      </p:sp>
-      <p:sp>
-        <p:nvSpPr>
-          <p:cNvPr id="22" name="TextBox 21"/>
-          <p:cNvSpPr txBox="1"/>
-          <p:nvPr/>
-        </p:nvSpPr>
-        <p:spPr>
-          <a:xfrm>
-            <a:off x="7772400" y="2788920"/>
-            <a:ext cx="4114800" cy="365760"/>
-          </a:xfrm>
-          <a:prstGeom prst="rect">
-            <a:avLst/>
-          </a:prstGeom>
-          <a:noFill/>
-        </p:spPr>
-        <p:txBody>
-          <a:bodyPr wrap="square" lIns="45720" rIns="45720" tIns="18288" bIns="18288">
-            <a:spAutoFit/>
-          </a:bodyPr>
-          <a:lstStyle/>
-          <a:p>
-            <a:pPr algn="l"/>
-            <a:r>
-              <a:rPr sz="1200" b="1">
-                <a:solidFill>
-                  <a:srgbClr val="6EE7B7"/>
-                </a:solidFill>
-                <a:latin typeface="Segoe UI"/>
-              </a:rPr>
-              <a:t>ALLOWED</a:t>
-            </a:r>
-          </a:p>
-        </p:txBody>
-      </p:sp>
-      <p:sp>
-        <p:nvSpPr>
-          <p:cNvPr id="23" name="Rectangle 22"/>
+              <a:t>backend-85689c8775-22ml6</a:t>
+            </a:r>
+          </a:p>
+        </p:txBody>
+      </p:sp>
+      <p:sp>
+        <p:nvSpPr>
+          <p:cNvPr id="15" name="Rounded Rectangle 14"/>
           <p:cNvSpPr/>
           <p:nvPr/>
         </p:nvSpPr>
         <p:spPr>
           <a:xfrm>
-            <a:off x="457200" y="3108960"/>
-            <a:ext cx="11247120" cy="365760"/>
-          </a:xfrm>
-          <a:prstGeom prst="rect">
-            <a:avLst/>
+            <a:off x="1371600" y="3063240"/>
+            <a:ext cx="9144000" cy="457200"/>
+          </a:xfrm>
+          <a:prstGeom prst="roundRect">
+            <a:avLst>
+              <a:gd name="adj" fmla="val 20000"/>
+            </a:avLst>
           </a:prstGeom>
           <a:solidFill>
             <a:srgbClr val="1E293B"/>
           </a:solidFill>
-          <a:ln>
-            <a:noFill/>
+          <a:ln w="19050">
+            <a:solidFill>
+              <a:srgbClr val="38BDF8"/>
+            </a:solidFill>
           </a:ln>
         </p:spPr>
         <p:style>
@@ -5207,238 +4980,103 @@
           <a:lstStyle/>
           <a:p>
             <a:pPr algn="ctr"/>
-          </a:p>
-        </p:txBody>
-      </p:sp>
-      <p:sp>
-        <p:nvSpPr>
-          <p:cNvPr id="24" name="TextBox 23"/>
-          <p:cNvSpPr txBox="1"/>
-          <p:nvPr/>
-        </p:nvSpPr>
-        <p:spPr>
-          <a:xfrm>
-            <a:off x="548640" y="3154680"/>
-            <a:ext cx="4389120" cy="365760"/>
-          </a:xfrm>
-          <a:prstGeom prst="rect">
-            <a:avLst/>
-          </a:prstGeom>
-          <a:noFill/>
-        </p:spPr>
-        <p:txBody>
-          <a:bodyPr wrap="square" lIns="45720" rIns="45720" tIns="18288" bIns="18288">
+            <a:endParaRPr/>
+          </a:p>
+        </p:txBody>
+      </p:sp>
+      <p:sp>
+        <p:nvSpPr>
+          <p:cNvPr id="16" name="TextBox 15"/>
+          <p:cNvSpPr txBox="1"/>
+          <p:nvPr/>
+        </p:nvSpPr>
+        <p:spPr>
+          <a:xfrm>
+            <a:off x="1645920" y="3154680"/>
+            <a:ext cx="1828800" cy="274320"/>
+          </a:xfrm>
+          <a:prstGeom prst="rect">
+            <a:avLst/>
+          </a:prstGeom>
+          <a:noFill/>
+        </p:spPr>
+        <p:txBody>
+          <a:bodyPr wrap="square" lIns="45720" tIns="18288" rIns="45720" bIns="18288">
             <a:spAutoFit/>
           </a:bodyPr>
           <a:lstStyle/>
           <a:p>
             <a:pPr algn="l"/>
             <a:r>
-              <a:rPr sz="1200" b="0">
+              <a:rPr sz="1300" b="1">
                 <a:solidFill>
                   <a:srgbClr val="E2E8F0"/>
                 </a:solidFill>
+                <a:latin typeface="Segoe UI"/>
+              </a:rPr>
+              <a:t>Request 4</a:t>
+            </a:r>
+          </a:p>
+        </p:txBody>
+      </p:sp>
+      <p:sp>
+        <p:nvSpPr>
+          <p:cNvPr id="17" name="TextBox 16"/>
+          <p:cNvSpPr txBox="1"/>
+          <p:nvPr/>
+        </p:nvSpPr>
+        <p:spPr>
+          <a:xfrm>
+            <a:off x="3657600" y="3154680"/>
+            <a:ext cx="6400800" cy="274320"/>
+          </a:xfrm>
+          <a:prstGeom prst="rect">
+            <a:avLst/>
+          </a:prstGeom>
+          <a:noFill/>
+        </p:spPr>
+        <p:txBody>
+          <a:bodyPr wrap="square" lIns="45720" tIns="18288" rIns="45720" bIns="18288">
+            <a:spAutoFit/>
+          </a:bodyPr>
+          <a:lstStyle/>
+          <a:p>
+            <a:pPr algn="l"/>
+            <a:r>
+              <a:rPr sz="1300" b="0">
+                <a:solidFill>
+                  <a:srgbClr val="38BDF8"/>
+                </a:solidFill>
                 <a:latin typeface="Consolas"/>
               </a:rPr>
-              <a:t>DELETE /</a:t>
-            </a:r>
-          </a:p>
-        </p:txBody>
-      </p:sp>
-      <p:sp>
-        <p:nvSpPr>
-          <p:cNvPr id="25" name="TextBox 24"/>
-          <p:cNvSpPr txBox="1"/>
-          <p:nvPr/>
-        </p:nvSpPr>
-        <p:spPr>
-          <a:xfrm>
-            <a:off x="5029200" y="3154680"/>
-            <a:ext cx="2560320" cy="365760"/>
-          </a:xfrm>
-          <a:prstGeom prst="rect">
-            <a:avLst/>
-          </a:prstGeom>
-          <a:noFill/>
-        </p:spPr>
-        <p:txBody>
-          <a:bodyPr wrap="square" lIns="45720" rIns="45720" tIns="18288" bIns="18288">
-            <a:spAutoFit/>
-          </a:bodyPr>
-          <a:lstStyle/>
-          <a:p>
-            <a:pPr algn="l"/>
-            <a:r>
-              <a:rPr sz="1200" b="1">
-                <a:solidFill>
-                  <a:srgbClr val="38BDF8"/>
-                </a:solidFill>
-                <a:latin typeface="Consolas"/>
-              </a:rPr>
-              <a:t>—</a:t>
-            </a:r>
-          </a:p>
-        </p:txBody>
-      </p:sp>
-      <p:sp>
-        <p:nvSpPr>
-          <p:cNvPr id="26" name="TextBox 25"/>
-          <p:cNvSpPr txBox="1"/>
-          <p:nvPr/>
-        </p:nvSpPr>
-        <p:spPr>
-          <a:xfrm>
-            <a:off x="7772400" y="3154680"/>
-            <a:ext cx="4114800" cy="365760"/>
-          </a:xfrm>
-          <a:prstGeom prst="rect">
-            <a:avLst/>
-          </a:prstGeom>
-          <a:noFill/>
-        </p:spPr>
-        <p:txBody>
-          <a:bodyPr wrap="square" lIns="45720" rIns="45720" tIns="18288" bIns="18288">
-            <a:spAutoFit/>
-          </a:bodyPr>
-          <a:lstStyle/>
-          <a:p>
-            <a:pPr algn="l"/>
-            <a:r>
-              <a:rPr sz="1200" b="1">
-                <a:solidFill>
-                  <a:srgbClr val="6EE7B7"/>
-                </a:solidFill>
-                <a:latin typeface="Segoe UI"/>
-              </a:rPr>
-              <a:t>Connection closed</a:t>
-            </a:r>
-          </a:p>
-        </p:txBody>
-      </p:sp>
-      <p:sp>
-        <p:nvSpPr>
-          <p:cNvPr id="27" name="TextBox 26"/>
-          <p:cNvSpPr txBox="1"/>
-          <p:nvPr/>
-        </p:nvSpPr>
-        <p:spPr>
-          <a:xfrm>
-            <a:off x="548640" y="3520440"/>
-            <a:ext cx="4389120" cy="365760"/>
-          </a:xfrm>
-          <a:prstGeom prst="rect">
-            <a:avLst/>
-          </a:prstGeom>
-          <a:noFill/>
-        </p:spPr>
-        <p:txBody>
-          <a:bodyPr wrap="square" lIns="45720" rIns="45720" tIns="18288" bIns="18288">
-            <a:spAutoFit/>
-          </a:bodyPr>
-          <a:lstStyle/>
-          <a:p>
-            <a:pPr algn="l"/>
-            <a:r>
-              <a:rPr sz="1200" b="0">
-                <a:solidFill>
-                  <a:srgbClr val="E2E8F0"/>
-                </a:solidFill>
-                <a:latin typeface="Consolas"/>
-              </a:rPr>
-              <a:t>PUT /</a:t>
-            </a:r>
-          </a:p>
-        </p:txBody>
-      </p:sp>
-      <p:sp>
-        <p:nvSpPr>
-          <p:cNvPr id="28" name="TextBox 27"/>
-          <p:cNvSpPr txBox="1"/>
-          <p:nvPr/>
-        </p:nvSpPr>
-        <p:spPr>
-          <a:xfrm>
-            <a:off x="5029200" y="3520440"/>
-            <a:ext cx="2560320" cy="365760"/>
-          </a:xfrm>
-          <a:prstGeom prst="rect">
-            <a:avLst/>
-          </a:prstGeom>
-          <a:noFill/>
-        </p:spPr>
-        <p:txBody>
-          <a:bodyPr wrap="square" lIns="45720" rIns="45720" tIns="18288" bIns="18288">
-            <a:spAutoFit/>
-          </a:bodyPr>
-          <a:lstStyle/>
-          <a:p>
-            <a:pPr algn="l"/>
-            <a:r>
-              <a:rPr sz="1200" b="1">
-                <a:solidFill>
-                  <a:srgbClr val="38BDF8"/>
-                </a:solidFill>
-                <a:latin typeface="Consolas"/>
-              </a:rPr>
-              <a:t>—</a:t>
-            </a:r>
-          </a:p>
-        </p:txBody>
-      </p:sp>
-      <p:sp>
-        <p:nvSpPr>
-          <p:cNvPr id="29" name="TextBox 28"/>
-          <p:cNvSpPr txBox="1"/>
-          <p:nvPr/>
-        </p:nvSpPr>
-        <p:spPr>
-          <a:xfrm>
-            <a:off x="7772400" y="3520440"/>
-            <a:ext cx="4114800" cy="365760"/>
-          </a:xfrm>
-          <a:prstGeom prst="rect">
-            <a:avLst/>
-          </a:prstGeom>
-          <a:noFill/>
-        </p:spPr>
-        <p:txBody>
-          <a:bodyPr wrap="square" lIns="45720" rIns="45720" tIns="18288" bIns="18288">
-            <a:spAutoFit/>
-          </a:bodyPr>
-          <a:lstStyle/>
-          <a:p>
-            <a:pPr algn="l"/>
-            <a:r>
-              <a:rPr sz="1200" b="1">
-                <a:solidFill>
-                  <a:srgbClr val="6EE7B7"/>
-                </a:solidFill>
-                <a:latin typeface="Segoe UI"/>
-              </a:rPr>
-              <a:t>Connection closed</a:t>
-            </a:r>
-          </a:p>
-        </p:txBody>
-      </p:sp>
-      <p:sp>
-        <p:nvSpPr>
-          <p:cNvPr id="30" name="Rectangle 29"/>
+              <a:t>backend-85689c8775-22ml6</a:t>
+            </a:r>
+          </a:p>
+        </p:txBody>
+      </p:sp>
+      <p:sp>
+        <p:nvSpPr>
+          <p:cNvPr id="18" name="Rounded Rectangle 17"/>
           <p:cNvSpPr/>
           <p:nvPr/>
         </p:nvSpPr>
         <p:spPr>
           <a:xfrm>
-            <a:off x="457200" y="3840480"/>
-            <a:ext cx="11247120" cy="365760"/>
-          </a:xfrm>
-          <a:prstGeom prst="rect">
-            <a:avLst/>
+            <a:off x="1371600" y="3566160"/>
+            <a:ext cx="9144000" cy="457200"/>
+          </a:xfrm>
+          <a:prstGeom prst="roundRect">
+            <a:avLst>
+              <a:gd name="adj" fmla="val 20000"/>
+            </a:avLst>
           </a:prstGeom>
           <a:solidFill>
             <a:srgbClr val="1E293B"/>
           </a:solidFill>
-          <a:ln>
-            <a:noFill/>
+          <a:ln w="19050">
+            <a:solidFill>
+              <a:srgbClr val="6EE7B7"/>
+            </a:solidFill>
           </a:ln>
         </p:spPr>
         <p:style>
@@ -5460,238 +5098,103 @@
           <a:lstStyle/>
           <a:p>
             <a:pPr algn="ctr"/>
-          </a:p>
-        </p:txBody>
-      </p:sp>
-      <p:sp>
-        <p:nvSpPr>
-          <p:cNvPr id="31" name="TextBox 30"/>
-          <p:cNvSpPr txBox="1"/>
-          <p:nvPr/>
-        </p:nvSpPr>
-        <p:spPr>
-          <a:xfrm>
-            <a:off x="548640" y="3886200"/>
-            <a:ext cx="4389120" cy="365760"/>
-          </a:xfrm>
-          <a:prstGeom prst="rect">
-            <a:avLst/>
-          </a:prstGeom>
-          <a:noFill/>
-        </p:spPr>
-        <p:txBody>
-          <a:bodyPr wrap="square" lIns="45720" rIns="45720" tIns="18288" bIns="18288">
+            <a:endParaRPr/>
+          </a:p>
+        </p:txBody>
+      </p:sp>
+      <p:sp>
+        <p:nvSpPr>
+          <p:cNvPr id="19" name="TextBox 18"/>
+          <p:cNvSpPr txBox="1"/>
+          <p:nvPr/>
+        </p:nvSpPr>
+        <p:spPr>
+          <a:xfrm>
+            <a:off x="1645920" y="3657600"/>
+            <a:ext cx="1828800" cy="274320"/>
+          </a:xfrm>
+          <a:prstGeom prst="rect">
+            <a:avLst/>
+          </a:prstGeom>
+          <a:noFill/>
+        </p:spPr>
+        <p:txBody>
+          <a:bodyPr wrap="square" lIns="45720" tIns="18288" rIns="45720" bIns="18288">
             <a:spAutoFit/>
           </a:bodyPr>
           <a:lstStyle/>
           <a:p>
             <a:pPr algn="l"/>
             <a:r>
-              <a:rPr sz="1200" b="0">
+              <a:rPr sz="1300" b="1">
                 <a:solidFill>
                   <a:srgbClr val="E2E8F0"/>
                 </a:solidFill>
+                <a:latin typeface="Segoe UI"/>
+              </a:rPr>
+              <a:t>Request 5</a:t>
+            </a:r>
+          </a:p>
+        </p:txBody>
+      </p:sp>
+      <p:sp>
+        <p:nvSpPr>
+          <p:cNvPr id="20" name="TextBox 19"/>
+          <p:cNvSpPr txBox="1"/>
+          <p:nvPr/>
+        </p:nvSpPr>
+        <p:spPr>
+          <a:xfrm>
+            <a:off x="3657600" y="3657600"/>
+            <a:ext cx="6400800" cy="274320"/>
+          </a:xfrm>
+          <a:prstGeom prst="rect">
+            <a:avLst/>
+          </a:prstGeom>
+          <a:noFill/>
+        </p:spPr>
+        <p:txBody>
+          <a:bodyPr wrap="square" lIns="45720" tIns="18288" rIns="45720" bIns="18288">
+            <a:spAutoFit/>
+          </a:bodyPr>
+          <a:lstStyle/>
+          <a:p>
+            <a:pPr algn="l"/>
+            <a:r>
+              <a:rPr sz="1300" b="0">
+                <a:solidFill>
+                  <a:srgbClr val="6EE7B7"/>
+                </a:solidFill>
                 <a:latin typeface="Consolas"/>
               </a:rPr>
-              <a:t>PATCH /</a:t>
-            </a:r>
-          </a:p>
-        </p:txBody>
-      </p:sp>
-      <p:sp>
-        <p:nvSpPr>
-          <p:cNvPr id="32" name="TextBox 31"/>
-          <p:cNvSpPr txBox="1"/>
-          <p:nvPr/>
-        </p:nvSpPr>
-        <p:spPr>
-          <a:xfrm>
-            <a:off x="5029200" y="3886200"/>
-            <a:ext cx="2560320" cy="365760"/>
-          </a:xfrm>
-          <a:prstGeom prst="rect">
-            <a:avLst/>
-          </a:prstGeom>
-          <a:noFill/>
-        </p:spPr>
-        <p:txBody>
-          <a:bodyPr wrap="square" lIns="45720" rIns="45720" tIns="18288" bIns="18288">
-            <a:spAutoFit/>
-          </a:bodyPr>
-          <a:lstStyle/>
-          <a:p>
-            <a:pPr algn="l"/>
-            <a:r>
-              <a:rPr sz="1200" b="1">
-                <a:solidFill>
-                  <a:srgbClr val="38BDF8"/>
-                </a:solidFill>
-                <a:latin typeface="Consolas"/>
-              </a:rPr>
-              <a:t>—</a:t>
-            </a:r>
-          </a:p>
-        </p:txBody>
-      </p:sp>
-      <p:sp>
-        <p:nvSpPr>
-          <p:cNvPr id="33" name="TextBox 32"/>
-          <p:cNvSpPr txBox="1"/>
-          <p:nvPr/>
-        </p:nvSpPr>
-        <p:spPr>
-          <a:xfrm>
-            <a:off x="7772400" y="3886200"/>
-            <a:ext cx="4114800" cy="365760"/>
-          </a:xfrm>
-          <a:prstGeom prst="rect">
-            <a:avLst/>
-          </a:prstGeom>
-          <a:noFill/>
-        </p:spPr>
-        <p:txBody>
-          <a:bodyPr wrap="square" lIns="45720" rIns="45720" tIns="18288" bIns="18288">
-            <a:spAutoFit/>
-          </a:bodyPr>
-          <a:lstStyle/>
-          <a:p>
-            <a:pPr algn="l"/>
-            <a:r>
-              <a:rPr sz="1200" b="1">
-                <a:solidFill>
-                  <a:srgbClr val="6EE7B7"/>
-                </a:solidFill>
-                <a:latin typeface="Segoe UI"/>
-              </a:rPr>
-              <a:t>Connection closed</a:t>
-            </a:r>
-          </a:p>
-        </p:txBody>
-      </p:sp>
-      <p:sp>
-        <p:nvSpPr>
-          <p:cNvPr id="34" name="TextBox 33"/>
-          <p:cNvSpPr txBox="1"/>
-          <p:nvPr/>
-        </p:nvSpPr>
-        <p:spPr>
-          <a:xfrm>
-            <a:off x="548640" y="4251960"/>
-            <a:ext cx="4389120" cy="365760"/>
-          </a:xfrm>
-          <a:prstGeom prst="rect">
-            <a:avLst/>
-          </a:prstGeom>
-          <a:noFill/>
-        </p:spPr>
-        <p:txBody>
-          <a:bodyPr wrap="square" lIns="45720" rIns="45720" tIns="18288" bIns="18288">
-            <a:spAutoFit/>
-          </a:bodyPr>
-          <a:lstStyle/>
-          <a:p>
-            <a:pPr algn="l"/>
-            <a:r>
-              <a:rPr sz="1200" b="0">
-                <a:solidFill>
-                  <a:srgbClr val="E2E8F0"/>
-                </a:solidFill>
-                <a:latin typeface="Consolas"/>
-              </a:rPr>
-              <a:t>OPTIONS /</a:t>
-            </a:r>
-          </a:p>
-        </p:txBody>
-      </p:sp>
-      <p:sp>
-        <p:nvSpPr>
-          <p:cNvPr id="35" name="TextBox 34"/>
-          <p:cNvSpPr txBox="1"/>
-          <p:nvPr/>
-        </p:nvSpPr>
-        <p:spPr>
-          <a:xfrm>
-            <a:off x="5029200" y="4251960"/>
-            <a:ext cx="2560320" cy="365760"/>
-          </a:xfrm>
-          <a:prstGeom prst="rect">
-            <a:avLst/>
-          </a:prstGeom>
-          <a:noFill/>
-        </p:spPr>
-        <p:txBody>
-          <a:bodyPr wrap="square" lIns="45720" rIns="45720" tIns="18288" bIns="18288">
-            <a:spAutoFit/>
-          </a:bodyPr>
-          <a:lstStyle/>
-          <a:p>
-            <a:pPr algn="l"/>
-            <a:r>
-              <a:rPr sz="1200" b="1">
-                <a:solidFill>
-                  <a:srgbClr val="38BDF8"/>
-                </a:solidFill>
-                <a:latin typeface="Consolas"/>
-              </a:rPr>
-              <a:t>—</a:t>
-            </a:r>
-          </a:p>
-        </p:txBody>
-      </p:sp>
-      <p:sp>
-        <p:nvSpPr>
-          <p:cNvPr id="36" name="TextBox 35"/>
-          <p:cNvSpPr txBox="1"/>
-          <p:nvPr/>
-        </p:nvSpPr>
-        <p:spPr>
-          <a:xfrm>
-            <a:off x="7772400" y="4251960"/>
-            <a:ext cx="4114800" cy="365760"/>
-          </a:xfrm>
-          <a:prstGeom prst="rect">
-            <a:avLst/>
-          </a:prstGeom>
-          <a:noFill/>
-        </p:spPr>
-        <p:txBody>
-          <a:bodyPr wrap="square" lIns="45720" rIns="45720" tIns="18288" bIns="18288">
-            <a:spAutoFit/>
-          </a:bodyPr>
-          <a:lstStyle/>
-          <a:p>
-            <a:pPr algn="l"/>
-            <a:r>
-              <a:rPr sz="1200" b="1">
-                <a:solidFill>
-                  <a:srgbClr val="6EE7B7"/>
-                </a:solidFill>
-                <a:latin typeface="Segoe UI"/>
-              </a:rPr>
-              <a:t>Connection closed</a:t>
-            </a:r>
-          </a:p>
-        </p:txBody>
-      </p:sp>
-      <p:sp>
-        <p:nvSpPr>
-          <p:cNvPr id="37" name="Rectangle 36"/>
+              <a:t>backend-85689c8775-zddq8</a:t>
+            </a:r>
+          </a:p>
+        </p:txBody>
+      </p:sp>
+      <p:sp>
+        <p:nvSpPr>
+          <p:cNvPr id="21" name="Rounded Rectangle 20"/>
           <p:cNvSpPr/>
           <p:nvPr/>
         </p:nvSpPr>
         <p:spPr>
           <a:xfrm>
-            <a:off x="457200" y="4572000"/>
-            <a:ext cx="11247120" cy="365760"/>
-          </a:xfrm>
-          <a:prstGeom prst="rect">
-            <a:avLst/>
+            <a:off x="1371600" y="4069080"/>
+            <a:ext cx="9144000" cy="457200"/>
+          </a:xfrm>
+          <a:prstGeom prst="roundRect">
+            <a:avLst>
+              <a:gd name="adj" fmla="val 20000"/>
+            </a:avLst>
           </a:prstGeom>
           <a:solidFill>
             <a:srgbClr val="1E293B"/>
           </a:solidFill>
-          <a:ln>
-            <a:noFill/>
+          <a:ln w="19050">
+            <a:solidFill>
+              <a:srgbClr val="6EE7B7"/>
+            </a:solidFill>
           </a:ln>
         </p:spPr>
         <p:style>
@@ -5713,222 +5216,153 @@
           <a:lstStyle/>
           <a:p>
             <a:pPr algn="ctr"/>
-          </a:p>
-        </p:txBody>
-      </p:sp>
-      <p:sp>
-        <p:nvSpPr>
-          <p:cNvPr id="38" name="TextBox 37"/>
-          <p:cNvSpPr txBox="1"/>
-          <p:nvPr/>
-        </p:nvSpPr>
-        <p:spPr>
-          <a:xfrm>
-            <a:off x="548640" y="4617720"/>
-            <a:ext cx="4389120" cy="365760"/>
-          </a:xfrm>
-          <a:prstGeom prst="rect">
-            <a:avLst/>
-          </a:prstGeom>
-          <a:noFill/>
-        </p:spPr>
-        <p:txBody>
-          <a:bodyPr wrap="square" lIns="45720" rIns="45720" tIns="18288" bIns="18288">
+            <a:endParaRPr/>
+          </a:p>
+        </p:txBody>
+      </p:sp>
+      <p:sp>
+        <p:nvSpPr>
+          <p:cNvPr id="22" name="TextBox 21"/>
+          <p:cNvSpPr txBox="1"/>
+          <p:nvPr/>
+        </p:nvSpPr>
+        <p:spPr>
+          <a:xfrm>
+            <a:off x="1645920" y="4160520"/>
+            <a:ext cx="1828800" cy="274320"/>
+          </a:xfrm>
+          <a:prstGeom prst="rect">
+            <a:avLst/>
+          </a:prstGeom>
+          <a:noFill/>
+        </p:spPr>
+        <p:txBody>
+          <a:bodyPr wrap="square" lIns="45720" tIns="18288" rIns="45720" bIns="18288">
             <a:spAutoFit/>
           </a:bodyPr>
           <a:lstStyle/>
           <a:p>
             <a:pPr algn="l"/>
             <a:r>
+              <a:rPr sz="1300" b="1">
+                <a:solidFill>
+                  <a:srgbClr val="E2E8F0"/>
+                </a:solidFill>
+                <a:latin typeface="Segoe UI"/>
+              </a:rPr>
+              <a:t>Request 6</a:t>
+            </a:r>
+          </a:p>
+        </p:txBody>
+      </p:sp>
+      <p:sp>
+        <p:nvSpPr>
+          <p:cNvPr id="23" name="TextBox 22"/>
+          <p:cNvSpPr txBox="1"/>
+          <p:nvPr/>
+        </p:nvSpPr>
+        <p:spPr>
+          <a:xfrm>
+            <a:off x="3657600" y="4160520"/>
+            <a:ext cx="6400800" cy="274320"/>
+          </a:xfrm>
+          <a:prstGeom prst="rect">
+            <a:avLst/>
+          </a:prstGeom>
+          <a:noFill/>
+        </p:spPr>
+        <p:txBody>
+          <a:bodyPr wrap="square" lIns="45720" tIns="18288" rIns="45720" bIns="18288">
+            <a:spAutoFit/>
+          </a:bodyPr>
+          <a:lstStyle/>
+          <a:p>
+            <a:pPr algn="l"/>
+            <a:r>
+              <a:rPr sz="1300" b="0">
+                <a:solidFill>
+                  <a:srgbClr val="6EE7B7"/>
+                </a:solidFill>
+                <a:latin typeface="Consolas"/>
+              </a:rPr>
+              <a:t>backend-85689c8775-zddq8</a:t>
+            </a:r>
+          </a:p>
+        </p:txBody>
+      </p:sp>
+      <p:sp>
+        <p:nvSpPr>
+          <p:cNvPr id="24" name="TextBox 23"/>
+          <p:cNvSpPr txBox="1"/>
+          <p:nvPr/>
+        </p:nvSpPr>
+        <p:spPr>
+          <a:xfrm>
+            <a:off x="457200" y="5486400"/>
+            <a:ext cx="11247120" cy="457200"/>
+          </a:xfrm>
+          <a:prstGeom prst="rect">
+            <a:avLst/>
+          </a:prstGeom>
+          <a:noFill/>
+        </p:spPr>
+        <p:txBody>
+          <a:bodyPr wrap="square" lIns="45720" tIns="18288" rIns="45720" bIns="18288">
+            <a:spAutoFit/>
+          </a:bodyPr>
+          <a:lstStyle/>
+          <a:p>
+            <a:pPr algn="ctr"/>
+            <a:r>
+              <a:rPr sz="1600" b="1">
+                <a:solidFill>
+                  <a:srgbClr val="6EE7B7"/>
+                </a:solidFill>
+                <a:latin typeface="Segoe UI"/>
+              </a:rPr>
+              <a:t>PASS — requests distributed across 2 distinct backend pods (3 + 3)</a:t>
+            </a:r>
+          </a:p>
+        </p:txBody>
+      </p:sp>
+      <p:sp>
+        <p:nvSpPr>
+          <p:cNvPr id="25" name="TextBox 24"/>
+          <p:cNvSpPr txBox="1"/>
+          <p:nvPr/>
+        </p:nvSpPr>
+        <p:spPr>
+          <a:xfrm>
+            <a:off x="457200" y="5943600"/>
+            <a:ext cx="11247120" cy="457200"/>
+          </a:xfrm>
+          <a:prstGeom prst="rect">
+            <a:avLst/>
+          </a:prstGeom>
+          <a:noFill/>
+        </p:spPr>
+        <p:txBody>
+          <a:bodyPr wrap="square" lIns="45720" tIns="18288" rIns="45720" bIns="18288">
+            <a:spAutoFit/>
+          </a:bodyPr>
+          <a:lstStyle/>
+          <a:p>
+            <a:pPr algn="ctr"/>
+            <a:r>
               <a:rPr sz="1200" b="0">
                 <a:solidFill>
-                  <a:srgbClr val="E2E8F0"/>
-                </a:solidFill>
-                <a:latin typeface="Consolas"/>
-              </a:rPr>
-              <a:t>8 KB X-Attack header</a:t>
-            </a:r>
-          </a:p>
-        </p:txBody>
-      </p:sp>
-      <p:sp>
-        <p:nvSpPr>
-          <p:cNvPr id="39" name="TextBox 38"/>
-          <p:cNvSpPr txBox="1"/>
-          <p:nvPr/>
-        </p:nvSpPr>
-        <p:spPr>
-          <a:xfrm>
-            <a:off x="5029200" y="4617720"/>
-            <a:ext cx="2560320" cy="365760"/>
-          </a:xfrm>
-          <a:prstGeom prst="rect">
-            <a:avLst/>
-          </a:prstGeom>
-          <a:noFill/>
-        </p:spPr>
-        <p:txBody>
-          <a:bodyPr wrap="square" lIns="45720" rIns="45720" tIns="18288" bIns="18288">
-            <a:spAutoFit/>
-          </a:bodyPr>
-          <a:lstStyle/>
-          <a:p>
-            <a:pPr algn="l"/>
-            <a:r>
-              <a:rPr sz="1200" b="1">
-                <a:solidFill>
-                  <a:srgbClr val="38BDF8"/>
-                </a:solidFill>
-                <a:latin typeface="Consolas"/>
-              </a:rPr>
-              <a:t>HTTP 400</a:t>
-            </a:r>
-          </a:p>
-        </p:txBody>
-      </p:sp>
-      <p:sp>
-        <p:nvSpPr>
-          <p:cNvPr id="40" name="TextBox 39"/>
-          <p:cNvSpPr txBox="1"/>
-          <p:nvPr/>
-        </p:nvSpPr>
-        <p:spPr>
-          <a:xfrm>
-            <a:off x="7772400" y="4617720"/>
-            <a:ext cx="4114800" cy="365760"/>
-          </a:xfrm>
-          <a:prstGeom prst="rect">
-            <a:avLst/>
-          </a:prstGeom>
-          <a:noFill/>
-        </p:spPr>
-        <p:txBody>
-          <a:bodyPr wrap="square" lIns="45720" rIns="45720" tIns="18288" bIns="18288">
-            <a:spAutoFit/>
-          </a:bodyPr>
-          <a:lstStyle/>
-          <a:p>
-            <a:pPr algn="l"/>
-            <a:r>
-              <a:rPr sz="1200" b="1">
-                <a:solidFill>
-                  <a:srgbClr val="6EE7B7"/>
-                </a:solidFill>
-                <a:latin typeface="Segoe UI"/>
-              </a:rPr>
-              <a:t>REJECTED</a:t>
-            </a:r>
-          </a:p>
-        </p:txBody>
-      </p:sp>
-      <p:sp>
-        <p:nvSpPr>
-          <p:cNvPr id="41" name="TextBox 40"/>
-          <p:cNvSpPr txBox="1"/>
-          <p:nvPr/>
-        </p:nvSpPr>
-        <p:spPr>
-          <a:xfrm>
-            <a:off x="548640" y="4983480"/>
-            <a:ext cx="4389120" cy="365760"/>
-          </a:xfrm>
-          <a:prstGeom prst="rect">
-            <a:avLst/>
-          </a:prstGeom>
-          <a:noFill/>
-        </p:spPr>
-        <p:txBody>
-          <a:bodyPr wrap="square" lIns="45720" rIns="45720" tIns="18288" bIns="18288">
-            <a:spAutoFit/>
-          </a:bodyPr>
-          <a:lstStyle/>
-          <a:p>
-            <a:pPr algn="l"/>
-            <a:r>
-              <a:rPr sz="1200" b="0">
-                <a:solidFill>
-                  <a:srgbClr val="E2E8F0"/>
-                </a:solidFill>
-                <a:latin typeface="Consolas"/>
-              </a:rPr>
-              <a:t>Server header check</a:t>
-            </a:r>
-          </a:p>
-        </p:txBody>
-      </p:sp>
-      <p:sp>
-        <p:nvSpPr>
-          <p:cNvPr id="42" name="TextBox 41"/>
-          <p:cNvSpPr txBox="1"/>
-          <p:nvPr/>
-        </p:nvSpPr>
-        <p:spPr>
-          <a:xfrm>
-            <a:off x="5029200" y="4983480"/>
-            <a:ext cx="2560320" cy="365760"/>
-          </a:xfrm>
-          <a:prstGeom prst="rect">
-            <a:avLst/>
-          </a:prstGeom>
-          <a:noFill/>
-        </p:spPr>
-        <p:txBody>
-          <a:bodyPr wrap="square" lIns="45720" rIns="45720" tIns="18288" bIns="18288">
-            <a:spAutoFit/>
-          </a:bodyPr>
-          <a:lstStyle/>
-          <a:p>
-            <a:pPr algn="l"/>
-            <a:r>
-              <a:rPr sz="1200" b="1">
-                <a:solidFill>
-                  <a:srgbClr val="38BDF8"/>
-                </a:solidFill>
-                <a:latin typeface="Consolas"/>
-              </a:rPr>
-              <a:t>nginx</a:t>
-            </a:r>
-          </a:p>
-        </p:txBody>
-      </p:sp>
-      <p:sp>
-        <p:nvSpPr>
-          <p:cNvPr id="43" name="TextBox 42"/>
-          <p:cNvSpPr txBox="1"/>
-          <p:nvPr/>
-        </p:nvSpPr>
-        <p:spPr>
-          <a:xfrm>
-            <a:off x="7772400" y="4983480"/>
-            <a:ext cx="4114800" cy="365760"/>
-          </a:xfrm>
-          <a:prstGeom prst="rect">
-            <a:avLst/>
-          </a:prstGeom>
-          <a:noFill/>
-        </p:spPr>
-        <p:txBody>
-          <a:bodyPr wrap="square" lIns="45720" rIns="45720" tIns="18288" bIns="18288">
-            <a:spAutoFit/>
-          </a:bodyPr>
-          <a:lstStyle/>
-          <a:p>
-            <a:pPr algn="l"/>
-            <a:r>
-              <a:rPr sz="1200" b="1">
-                <a:solidFill>
-                  <a:srgbClr val="6EE7B7"/>
-                </a:solidFill>
-                <a:latin typeface="Segoe UI"/>
-              </a:rPr>
-              <a:t>no version (hidden)</a:t>
-            </a:r>
-          </a:p>
-        </p:txBody>
-      </p:sp>
-      <p:sp>
-        <p:nvSpPr>
-          <p:cNvPr id="44" name="TextBox 43"/>
+                  <a:srgbClr val="94A3B8"/>
+                </a:solidFill>
+                <a:latin typeface="Segoe UI"/>
+              </a:rPr>
+              <a:t>kube-proxy + Service abstraction handles routing transparently</a:t>
+            </a:r>
+          </a:p>
+        </p:txBody>
+      </p:sp>
+      <p:sp>
+        <p:nvSpPr>
+          <p:cNvPr id="26" name="TextBox 25"/>
           <p:cNvSpPr txBox="1"/>
           <p:nvPr/>
         </p:nvSpPr>
@@ -5943,7 +5377,7 @@
           <a:noFill/>
         </p:spPr>
         <p:txBody>
-          <a:bodyPr wrap="square" lIns="45720" rIns="45720" tIns="18288" bIns="18288">
+          <a:bodyPr wrap="square" lIns="45720" tIns="18288" rIns="45720" bIns="18288">
             <a:spAutoFit/>
           </a:bodyPr>
           <a:lstStyle/>
@@ -5963,7 +5397,7 @@
       </p:sp>
       <p:sp>
         <p:nvSpPr>
-          <p:cNvPr id="45" name="TextBox 44"/>
+          <p:cNvPr id="27" name="TextBox 26"/>
           <p:cNvSpPr txBox="1"/>
           <p:nvPr/>
         </p:nvSpPr>
@@ -5978,7 +5412,7 @@
           <a:noFill/>
         </p:spPr>
         <p:txBody>
-          <a:bodyPr wrap="square" lIns="45720" rIns="45720" tIns="18288" bIns="18288">
+          <a:bodyPr wrap="square" lIns="45720" tIns="18288" rIns="45720" bIns="18288">
             <a:spAutoFit/>
           </a:bodyPr>
           <a:lstStyle/>
@@ -5991,7 +5425,7 @@
                 </a:solidFill>
                 <a:latin typeface="Segoe UI"/>
               </a:rPr>
-              <a:t>12 / 15</a:t>
+              <a:t>13 / 15</a:t>
             </a:r>
           </a:p>
         </p:txBody>
@@ -6005,7 +5439,7 @@
 </file>
 
 <file path=ppt/slides/slide13.xml><?xml version="1.0" encoding="utf-8"?>
-<p:sld xmlns:a="http://schemas.openxmlformats.org/drawingml/2006/main" xmlns:p="http://schemas.openxmlformats.org/presentationml/2006/main" xmlns:r="http://schemas.openxmlformats.org/officeDocument/2006/relationships">
+<p:sld xmlns:a="http://schemas.openxmlformats.org/drawingml/2006/main" xmlns:r="http://schemas.openxmlformats.org/officeDocument/2006/relationships" xmlns:p="http://schemas.openxmlformats.org/presentationml/2006/main">
   <p:cSld>
     <p:spTree>
       <p:nvGrpSpPr>
@@ -6013,7 +5447,14 @@
         <p:cNvGrpSpPr/>
         <p:nvPr/>
       </p:nvGrpSpPr>
-      <p:grpSpPr/>
+      <p:grpSpPr>
+        <a:xfrm>
+          <a:off x="0" y="0"/>
+          <a:ext cx="0" cy="0"/>
+          <a:chOff x="0" y="0"/>
+          <a:chExt cx="0" cy="0"/>
+        </a:xfrm>
+      </p:grpSpPr>
       <p:sp>
         <p:nvSpPr>
           <p:cNvPr id="2" name="Rectangle 1"/>
@@ -6054,6 +5495,7 @@
           <a:lstStyle/>
           <a:p>
             <a:pPr algn="ctr"/>
+            <a:endParaRPr/>
           </a:p>
         </p:txBody>
       </p:sp>
@@ -6097,6 +5539,7 @@
           <a:lstStyle/>
           <a:p>
             <a:pPr algn="ctr"/>
+            <a:endParaRPr/>
           </a:p>
         </p:txBody>
       </p:sp>
@@ -6117,7 +5560,7 @@
           <a:noFill/>
         </p:spPr>
         <p:txBody>
-          <a:bodyPr wrap="square" lIns="45720" rIns="45720" tIns="18288" bIns="18288">
+          <a:bodyPr wrap="square" lIns="45720" tIns="18288" rIns="45720" bIns="18288">
             <a:spAutoFit/>
           </a:bodyPr>
           <a:lstStyle/>
@@ -6130,7 +5573,7 @@
                 </a:solidFill>
                 <a:latin typeface="Segoe UI"/>
               </a:rPr>
-              <a:t>Results — Kubernetes Load Balancing</a:t>
+              <a:t>Conclusion</a:t>
             </a:r>
           </a:p>
         </p:txBody>
@@ -6143,29 +5586,29 @@
         </p:nvSpPr>
         <p:spPr>
           <a:xfrm>
-            <a:off x="457200" y="914400"/>
-            <a:ext cx="10972800" cy="457200"/>
-          </a:xfrm>
-          <a:prstGeom prst="rect">
-            <a:avLst/>
-          </a:prstGeom>
-          <a:noFill/>
-        </p:spPr>
-        <p:txBody>
-          <a:bodyPr wrap="square" lIns="45720" rIns="45720" tIns="18288" bIns="18288">
-            <a:spAutoFit/>
-          </a:bodyPr>
-          <a:lstStyle/>
-          <a:p>
-            <a:pPr algn="l"/>
-            <a:r>
-              <a:rPr sz="1400" b="0">
-                <a:solidFill>
-                  <a:srgbClr val="94A3B8"/>
-                </a:solidFill>
-                <a:latin typeface="Segoe UI"/>
-              </a:rPr>
-              <a:t>6 sequential requests to /api/info — pods responding (round-robin):</a:t>
+            <a:off x="457200" y="1097280"/>
+            <a:ext cx="10972800" cy="548640"/>
+          </a:xfrm>
+          <a:prstGeom prst="rect">
+            <a:avLst/>
+          </a:prstGeom>
+          <a:noFill/>
+        </p:spPr>
+        <p:txBody>
+          <a:bodyPr wrap="square" lIns="45720" tIns="18288" rIns="45720" bIns="18288">
+            <a:spAutoFit/>
+          </a:bodyPr>
+          <a:lstStyle/>
+          <a:p>
+            <a:pPr algn="ctr"/>
+            <a:r>
+              <a:rPr sz="1800" b="0">
+                <a:solidFill>
+                  <a:srgbClr val="E2E8F0"/>
+                </a:solidFill>
+                <a:latin typeface="Segoe UI"/>
+              </a:rPr>
+              <a:t>A single, unified project demonstrating both topics in one architecture.</a:t>
             </a:r>
           </a:p>
         </p:txBody>
@@ -6178,18 +5621,18 @@
         </p:nvSpPr>
         <p:spPr>
           <a:xfrm>
-            <a:off x="1371600" y="1554480"/>
-            <a:ext cx="9144000" cy="457200"/>
+            <a:off x="457200" y="2011680"/>
+            <a:ext cx="2743200" cy="1645920"/>
           </a:xfrm>
           <a:prstGeom prst="roundRect">
             <a:avLst>
-              <a:gd name="adj" fmla="val 20000"/>
+              <a:gd name="adj" fmla="val 5000"/>
             </a:avLst>
           </a:prstGeom>
           <a:solidFill>
             <a:srgbClr val="1E293B"/>
           </a:solidFill>
-          <a:ln w="19050">
+          <a:ln w="6350">
             <a:solidFill>
               <a:srgbClr val="38BDF8"/>
             </a:solidFill>
@@ -6213,41 +5656,41 @@
           <a:bodyPr rtlCol="0" anchor="ctr"/>
           <a:lstStyle/>
           <a:p>
+            <a:endParaRPr/>
+          </a:p>
+        </p:txBody>
+      </p:sp>
+      <p:sp>
+        <p:nvSpPr>
+          <p:cNvPr id="7" name="TextBox 6"/>
+          <p:cNvSpPr txBox="1"/>
+          <p:nvPr/>
+        </p:nvSpPr>
+        <p:spPr>
+          <a:xfrm>
+            <a:off x="457200" y="2194560"/>
+            <a:ext cx="2743200" cy="731520"/>
+          </a:xfrm>
+          <a:prstGeom prst="rect">
+            <a:avLst/>
+          </a:prstGeom>
+          <a:noFill/>
+        </p:spPr>
+        <p:txBody>
+          <a:bodyPr wrap="square" lIns="45720" tIns="18288" rIns="45720" bIns="18288">
+            <a:spAutoFit/>
+          </a:bodyPr>
+          <a:lstStyle/>
+          <a:p>
             <a:pPr algn="ctr"/>
-          </a:p>
-        </p:txBody>
-      </p:sp>
-      <p:sp>
-        <p:nvSpPr>
-          <p:cNvPr id="7" name="TextBox 6"/>
-          <p:cNvSpPr txBox="1"/>
-          <p:nvPr/>
-        </p:nvSpPr>
-        <p:spPr>
-          <a:xfrm>
-            <a:off x="1645920" y="1645920"/>
-            <a:ext cx="1828800" cy="274320"/>
-          </a:xfrm>
-          <a:prstGeom prst="rect">
-            <a:avLst/>
-          </a:prstGeom>
-          <a:noFill/>
-        </p:spPr>
-        <p:txBody>
-          <a:bodyPr wrap="square" lIns="45720" rIns="45720" tIns="18288" bIns="18288">
-            <a:spAutoFit/>
-          </a:bodyPr>
-          <a:lstStyle/>
-          <a:p>
-            <a:pPr algn="l"/>
-            <a:r>
-              <a:rPr sz="1300" b="1">
-                <a:solidFill>
-                  <a:srgbClr val="E2E8F0"/>
-                </a:solidFill>
-                <a:latin typeface="Segoe UI"/>
-              </a:rPr>
-              <a:t>Request 1</a:t>
+            <a:r>
+              <a:rPr sz="4400" b="1">
+                <a:solidFill>
+                  <a:srgbClr val="6EE7B7"/>
+                </a:solidFill>
+                <a:latin typeface="Segoe UI"/>
+              </a:rPr>
+              <a:t>8/8</a:t>
             </a:r>
           </a:p>
         </p:txBody>
@@ -6260,29 +5703,29 @@
         </p:nvSpPr>
         <p:spPr>
           <a:xfrm>
-            <a:off x="3657600" y="1645920"/>
-            <a:ext cx="6400800" cy="274320"/>
-          </a:xfrm>
-          <a:prstGeom prst="rect">
-            <a:avLst/>
-          </a:prstGeom>
-          <a:noFill/>
-        </p:spPr>
-        <p:txBody>
-          <a:bodyPr wrap="square" lIns="45720" rIns="45720" tIns="18288" bIns="18288">
-            <a:spAutoFit/>
-          </a:bodyPr>
-          <a:lstStyle/>
-          <a:p>
-            <a:pPr algn="l"/>
-            <a:r>
-              <a:rPr sz="1300" b="0">
-                <a:solidFill>
-                  <a:srgbClr val="38BDF8"/>
-                </a:solidFill>
-                <a:latin typeface="Consolas"/>
-              </a:rPr>
-              <a:t>backend-85689c8775-22ml6</a:t>
+            <a:off x="457200" y="3108960"/>
+            <a:ext cx="2743200" cy="457200"/>
+          </a:xfrm>
+          <a:prstGeom prst="rect">
+            <a:avLst/>
+          </a:prstGeom>
+          <a:noFill/>
+        </p:spPr>
+        <p:txBody>
+          <a:bodyPr wrap="square" lIns="45720" tIns="18288" rIns="45720" bIns="18288">
+            <a:spAutoFit/>
+          </a:bodyPr>
+          <a:lstStyle/>
+          <a:p>
+            <a:pPr algn="ctr"/>
+            <a:r>
+              <a:rPr sz="1200" b="0">
+                <a:solidFill>
+                  <a:srgbClr val="94A3B8"/>
+                </a:solidFill>
+                <a:latin typeface="Segoe UI"/>
+              </a:rPr>
+              <a:t>Tests passing</a:t>
             </a:r>
           </a:p>
         </p:txBody>
@@ -6295,20 +5738,20 @@
         </p:nvSpPr>
         <p:spPr>
           <a:xfrm>
-            <a:off x="1371600" y="2057400"/>
-            <a:ext cx="9144000" cy="457200"/>
+            <a:off x="3337560" y="2011680"/>
+            <a:ext cx="2743200" cy="1645920"/>
           </a:xfrm>
           <a:prstGeom prst="roundRect">
             <a:avLst>
-              <a:gd name="adj" fmla="val 20000"/>
+              <a:gd name="adj" fmla="val 5000"/>
             </a:avLst>
           </a:prstGeom>
           <a:solidFill>
             <a:srgbClr val="1E293B"/>
           </a:solidFill>
-          <a:ln w="19050">
+          <a:ln w="6350">
             <a:solidFill>
-              <a:srgbClr val="6EE7B7"/>
+              <a:srgbClr val="38BDF8"/>
             </a:solidFill>
           </a:ln>
         </p:spPr>
@@ -6330,41 +5773,41 @@
           <a:bodyPr rtlCol="0" anchor="ctr"/>
           <a:lstStyle/>
           <a:p>
+            <a:endParaRPr/>
+          </a:p>
+        </p:txBody>
+      </p:sp>
+      <p:sp>
+        <p:nvSpPr>
+          <p:cNvPr id="10" name="TextBox 9"/>
+          <p:cNvSpPr txBox="1"/>
+          <p:nvPr/>
+        </p:nvSpPr>
+        <p:spPr>
+          <a:xfrm>
+            <a:off x="3337560" y="2194560"/>
+            <a:ext cx="2743200" cy="731520"/>
+          </a:xfrm>
+          <a:prstGeom prst="rect">
+            <a:avLst/>
+          </a:prstGeom>
+          <a:noFill/>
+        </p:spPr>
+        <p:txBody>
+          <a:bodyPr wrap="square" lIns="45720" tIns="18288" rIns="45720" bIns="18288">
+            <a:spAutoFit/>
+          </a:bodyPr>
+          <a:lstStyle/>
+          <a:p>
             <a:pPr algn="ctr"/>
-          </a:p>
-        </p:txBody>
-      </p:sp>
-      <p:sp>
-        <p:nvSpPr>
-          <p:cNvPr id="10" name="TextBox 9"/>
-          <p:cNvSpPr txBox="1"/>
-          <p:nvPr/>
-        </p:nvSpPr>
-        <p:spPr>
-          <a:xfrm>
-            <a:off x="1645920" y="2148840"/>
-            <a:ext cx="1828800" cy="274320"/>
-          </a:xfrm>
-          <a:prstGeom prst="rect">
-            <a:avLst/>
-          </a:prstGeom>
-          <a:noFill/>
-        </p:spPr>
-        <p:txBody>
-          <a:bodyPr wrap="square" lIns="45720" rIns="45720" tIns="18288" bIns="18288">
-            <a:spAutoFit/>
-          </a:bodyPr>
-          <a:lstStyle/>
-          <a:p>
-            <a:pPr algn="l"/>
-            <a:r>
-              <a:rPr sz="1300" b="1">
-                <a:solidFill>
-                  <a:srgbClr val="E2E8F0"/>
-                </a:solidFill>
-                <a:latin typeface="Segoe UI"/>
-              </a:rPr>
-              <a:t>Request 2</a:t>
+            <a:r>
+              <a:rPr sz="4400" b="1">
+                <a:solidFill>
+                  <a:srgbClr val="38BDF8"/>
+                </a:solidFill>
+                <a:latin typeface="Segoe UI"/>
+              </a:rPr>
+              <a:t>6</a:t>
             </a:r>
           </a:p>
         </p:txBody>
@@ -6377,29 +5820,29 @@
         </p:nvSpPr>
         <p:spPr>
           <a:xfrm>
-            <a:off x="3657600" y="2148840"/>
-            <a:ext cx="6400800" cy="274320"/>
-          </a:xfrm>
-          <a:prstGeom prst="rect">
-            <a:avLst/>
-          </a:prstGeom>
-          <a:noFill/>
-        </p:spPr>
-        <p:txBody>
-          <a:bodyPr wrap="square" lIns="45720" rIns="45720" tIns="18288" bIns="18288">
-            <a:spAutoFit/>
-          </a:bodyPr>
-          <a:lstStyle/>
-          <a:p>
-            <a:pPr algn="l"/>
-            <a:r>
-              <a:rPr sz="1300" b="0">
-                <a:solidFill>
-                  <a:srgbClr val="6EE7B7"/>
-                </a:solidFill>
-                <a:latin typeface="Consolas"/>
-              </a:rPr>
-              <a:t>backend-85689c8775-zddq8</a:t>
+            <a:off x="3337560" y="3108960"/>
+            <a:ext cx="2743200" cy="457200"/>
+          </a:xfrm>
+          <a:prstGeom prst="rect">
+            <a:avLst/>
+          </a:prstGeom>
+          <a:noFill/>
+        </p:spPr>
+        <p:txBody>
+          <a:bodyPr wrap="square" lIns="45720" tIns="18288" rIns="45720" bIns="18288">
+            <a:spAutoFit/>
+          </a:bodyPr>
+          <a:lstStyle/>
+          <a:p>
+            <a:pPr algn="ctr"/>
+            <a:r>
+              <a:rPr sz="1200" b="0">
+                <a:solidFill>
+                  <a:srgbClr val="94A3B8"/>
+                </a:solidFill>
+                <a:latin typeface="Segoe UI"/>
+              </a:rPr>
+              <a:t>Pods (3 deployments × 2)</a:t>
             </a:r>
           </a:p>
         </p:txBody>
@@ -6412,18 +5855,18 @@
         </p:nvSpPr>
         <p:spPr>
           <a:xfrm>
-            <a:off x="1371600" y="2560320"/>
-            <a:ext cx="9144000" cy="457200"/>
+            <a:off x="6217920" y="2011680"/>
+            <a:ext cx="2743200" cy="1645920"/>
           </a:xfrm>
           <a:prstGeom prst="roundRect">
             <a:avLst>
-              <a:gd name="adj" fmla="val 20000"/>
+              <a:gd name="adj" fmla="val 5000"/>
             </a:avLst>
           </a:prstGeom>
           <a:solidFill>
             <a:srgbClr val="1E293B"/>
           </a:solidFill>
-          <a:ln w="19050">
+          <a:ln w="6350">
             <a:solidFill>
               <a:srgbClr val="38BDF8"/>
             </a:solidFill>
@@ -6447,41 +5890,41 @@
           <a:bodyPr rtlCol="0" anchor="ctr"/>
           <a:lstStyle/>
           <a:p>
+            <a:endParaRPr/>
+          </a:p>
+        </p:txBody>
+      </p:sp>
+      <p:sp>
+        <p:nvSpPr>
+          <p:cNvPr id="13" name="TextBox 12"/>
+          <p:cNvSpPr txBox="1"/>
+          <p:nvPr/>
+        </p:nvSpPr>
+        <p:spPr>
+          <a:xfrm>
+            <a:off x="6217920" y="2194560"/>
+            <a:ext cx="2743200" cy="731520"/>
+          </a:xfrm>
+          <a:prstGeom prst="rect">
+            <a:avLst/>
+          </a:prstGeom>
+          <a:noFill/>
+        </p:spPr>
+        <p:txBody>
+          <a:bodyPr wrap="square" lIns="45720" tIns="18288" rIns="45720" bIns="18288">
+            <a:spAutoFit/>
+          </a:bodyPr>
+          <a:lstStyle/>
+          <a:p>
             <a:pPr algn="ctr"/>
-          </a:p>
-        </p:txBody>
-      </p:sp>
-      <p:sp>
-        <p:nvSpPr>
-          <p:cNvPr id="13" name="TextBox 12"/>
-          <p:cNvSpPr txBox="1"/>
-          <p:nvPr/>
-        </p:nvSpPr>
-        <p:spPr>
-          <a:xfrm>
-            <a:off x="1645920" y="2651760"/>
-            <a:ext cx="1828800" cy="274320"/>
-          </a:xfrm>
-          <a:prstGeom prst="rect">
-            <a:avLst/>
-          </a:prstGeom>
-          <a:noFill/>
-        </p:spPr>
-        <p:txBody>
-          <a:bodyPr wrap="square" lIns="45720" rIns="45720" tIns="18288" bIns="18288">
-            <a:spAutoFit/>
-          </a:bodyPr>
-          <a:lstStyle/>
-          <a:p>
-            <a:pPr algn="l"/>
-            <a:r>
-              <a:rPr sz="1300" b="1">
-                <a:solidFill>
-                  <a:srgbClr val="E2E8F0"/>
-                </a:solidFill>
-                <a:latin typeface="Segoe UI"/>
-              </a:rPr>
-              <a:t>Request 3</a:t>
+            <a:r>
+              <a:rPr sz="4400" b="1">
+                <a:solidFill>
+                  <a:srgbClr val="38BDF8"/>
+                </a:solidFill>
+                <a:latin typeface="Segoe UI"/>
+              </a:rPr>
+              <a:t>7</a:t>
             </a:r>
           </a:p>
         </p:txBody>
@@ -6494,29 +5937,29 @@
         </p:nvSpPr>
         <p:spPr>
           <a:xfrm>
-            <a:off x="3657600" y="2651760"/>
-            <a:ext cx="6400800" cy="274320"/>
-          </a:xfrm>
-          <a:prstGeom prst="rect">
-            <a:avLst/>
-          </a:prstGeom>
-          <a:noFill/>
-        </p:spPr>
-        <p:txBody>
-          <a:bodyPr wrap="square" lIns="45720" rIns="45720" tIns="18288" bIns="18288">
-            <a:spAutoFit/>
-          </a:bodyPr>
-          <a:lstStyle/>
-          <a:p>
-            <a:pPr algn="l"/>
-            <a:r>
-              <a:rPr sz="1300" b="0">
-                <a:solidFill>
-                  <a:srgbClr val="38BDF8"/>
-                </a:solidFill>
-                <a:latin typeface="Consolas"/>
-              </a:rPr>
-              <a:t>backend-85689c8775-22ml6</a:t>
+            <a:off x="6217920" y="3108960"/>
+            <a:ext cx="2743200" cy="457200"/>
+          </a:xfrm>
+          <a:prstGeom prst="rect">
+            <a:avLst/>
+          </a:prstGeom>
+          <a:noFill/>
+        </p:spPr>
+        <p:txBody>
+          <a:bodyPr wrap="square" lIns="45720" tIns="18288" rIns="45720" bIns="18288">
+            <a:spAutoFit/>
+          </a:bodyPr>
+          <a:lstStyle/>
+          <a:p>
+            <a:pPr algn="ctr"/>
+            <a:r>
+              <a:rPr sz="1200" b="0">
+                <a:solidFill>
+                  <a:srgbClr val="94A3B8"/>
+                </a:solidFill>
+                <a:latin typeface="Segoe UI"/>
+              </a:rPr>
+              <a:t>Kubernetes manifests</a:t>
             </a:r>
           </a:p>
         </p:txBody>
@@ -6529,18 +5972,18 @@
         </p:nvSpPr>
         <p:spPr>
           <a:xfrm>
-            <a:off x="1371600" y="3063240"/>
-            <a:ext cx="9144000" cy="457200"/>
+            <a:off x="9098280" y="2011680"/>
+            <a:ext cx="2743200" cy="1645920"/>
           </a:xfrm>
           <a:prstGeom prst="roundRect">
             <a:avLst>
-              <a:gd name="adj" fmla="val 20000"/>
+              <a:gd name="adj" fmla="val 5000"/>
             </a:avLst>
           </a:prstGeom>
           <a:solidFill>
             <a:srgbClr val="1E293B"/>
           </a:solidFill>
-          <a:ln w="19050">
+          <a:ln w="6350">
             <a:solidFill>
               <a:srgbClr val="38BDF8"/>
             </a:solidFill>
@@ -6564,158 +6007,168 @@
           <a:bodyPr rtlCol="0" anchor="ctr"/>
           <a:lstStyle/>
           <a:p>
+            <a:endParaRPr/>
+          </a:p>
+        </p:txBody>
+      </p:sp>
+      <p:sp>
+        <p:nvSpPr>
+          <p:cNvPr id="16" name="TextBox 15"/>
+          <p:cNvSpPr txBox="1"/>
+          <p:nvPr/>
+        </p:nvSpPr>
+        <p:spPr>
+          <a:xfrm>
+            <a:off x="9098280" y="2194560"/>
+            <a:ext cx="2743200" cy="731520"/>
+          </a:xfrm>
+          <a:prstGeom prst="rect">
+            <a:avLst/>
+          </a:prstGeom>
+          <a:noFill/>
+        </p:spPr>
+        <p:txBody>
+          <a:bodyPr wrap="square" lIns="45720" tIns="18288" rIns="45720" bIns="18288">
+            <a:spAutoFit/>
+          </a:bodyPr>
+          <a:lstStyle/>
+          <a:p>
             <a:pPr algn="ctr"/>
-          </a:p>
-        </p:txBody>
-      </p:sp>
-      <p:sp>
-        <p:nvSpPr>
-          <p:cNvPr id="16" name="TextBox 15"/>
-          <p:cNvSpPr txBox="1"/>
-          <p:nvPr/>
-        </p:nvSpPr>
-        <p:spPr>
-          <a:xfrm>
-            <a:off x="1645920" y="3154680"/>
-            <a:ext cx="1828800" cy="274320"/>
-          </a:xfrm>
-          <a:prstGeom prst="rect">
-            <a:avLst/>
-          </a:prstGeom>
-          <a:noFill/>
-        </p:spPr>
-        <p:txBody>
-          <a:bodyPr wrap="square" lIns="45720" rIns="45720" tIns="18288" bIns="18288">
-            <a:spAutoFit/>
-          </a:bodyPr>
-          <a:lstStyle/>
-          <a:p>
-            <a:pPr algn="l"/>
-            <a:r>
-              <a:rPr sz="1300" b="1">
+            <a:r>
+              <a:rPr sz="4400" b="1">
+                <a:solidFill>
+                  <a:srgbClr val="6EE7B7"/>
+                </a:solidFill>
+                <a:latin typeface="Segoe UI"/>
+              </a:rPr>
+              <a:t>8+</a:t>
+            </a:r>
+          </a:p>
+        </p:txBody>
+      </p:sp>
+      <p:sp>
+        <p:nvSpPr>
+          <p:cNvPr id="17" name="TextBox 16"/>
+          <p:cNvSpPr txBox="1"/>
+          <p:nvPr/>
+        </p:nvSpPr>
+        <p:spPr>
+          <a:xfrm>
+            <a:off x="9098280" y="3108960"/>
+            <a:ext cx="2743200" cy="457200"/>
+          </a:xfrm>
+          <a:prstGeom prst="rect">
+            <a:avLst/>
+          </a:prstGeom>
+          <a:noFill/>
+        </p:spPr>
+        <p:txBody>
+          <a:bodyPr wrap="square" lIns="45720" tIns="18288" rIns="45720" bIns="18288">
+            <a:spAutoFit/>
+          </a:bodyPr>
+          <a:lstStyle/>
+          <a:p>
+            <a:pPr algn="ctr"/>
+            <a:r>
+              <a:rPr sz="1200" b="0">
+                <a:solidFill>
+                  <a:srgbClr val="94A3B8"/>
+                </a:solidFill>
+                <a:latin typeface="Segoe UI"/>
+              </a:rPr>
+              <a:t>DDoS protections</a:t>
+            </a:r>
+          </a:p>
+        </p:txBody>
+      </p:sp>
+      <p:sp>
+        <p:nvSpPr>
+          <p:cNvPr id="18" name="TextBox 17"/>
+          <p:cNvSpPr txBox="1"/>
+          <p:nvPr/>
+        </p:nvSpPr>
+        <p:spPr>
+          <a:xfrm>
+            <a:off x="457200" y="4114800"/>
+            <a:ext cx="10972800" cy="457200"/>
+          </a:xfrm>
+          <a:prstGeom prst="rect">
+            <a:avLst/>
+          </a:prstGeom>
+          <a:noFill/>
+        </p:spPr>
+        <p:txBody>
+          <a:bodyPr wrap="square" lIns="45720" tIns="18288" rIns="45720" bIns="18288">
+            <a:spAutoFit/>
+          </a:bodyPr>
+          <a:lstStyle/>
+          <a:p>
+            <a:pPr algn="ctr"/>
+            <a:r>
+              <a:rPr sz="1800" b="1">
+                <a:solidFill>
+                  <a:srgbClr val="38BDF8"/>
+                </a:solidFill>
+                <a:latin typeface="Segoe UI"/>
+              </a:rPr>
+              <a:t>What this proves</a:t>
+            </a:r>
+          </a:p>
+        </p:txBody>
+      </p:sp>
+      <p:sp>
+        <p:nvSpPr>
+          <p:cNvPr id="19" name="TextBox 18"/>
+          <p:cNvSpPr txBox="1"/>
+          <p:nvPr/>
+        </p:nvSpPr>
+        <p:spPr>
+          <a:xfrm>
+            <a:off x="1371600" y="4663440"/>
+            <a:ext cx="9601200" cy="307777"/>
+          </a:xfrm>
+          <a:prstGeom prst="rect">
+            <a:avLst/>
+          </a:prstGeom>
+          <a:noFill/>
+        </p:spPr>
+        <p:txBody>
+          <a:bodyPr wrap="square">
+            <a:spAutoFit/>
+          </a:bodyPr>
+          <a:lstStyle/>
+          <a:p>
+            <a:pPr>
+              <a:spcAft>
+                <a:spcPts val="600"/>
+              </a:spcAft>
+            </a:pPr>
+            <a:r>
+              <a:rPr sz="1400" dirty="0">
                 <a:solidFill>
                   <a:srgbClr val="E2E8F0"/>
                 </a:solidFill>
                 <a:latin typeface="Segoe UI"/>
               </a:rPr>
-              <a:t>Request 4</a:t>
-            </a:r>
-          </a:p>
-        </p:txBody>
-      </p:sp>
-      <p:sp>
-        <p:nvSpPr>
-          <p:cNvPr id="17" name="TextBox 16"/>
-          <p:cNvSpPr txBox="1"/>
-          <p:nvPr/>
-        </p:nvSpPr>
-        <p:spPr>
-          <a:xfrm>
-            <a:off x="3657600" y="3154680"/>
-            <a:ext cx="6400800" cy="274320"/>
-          </a:xfrm>
-          <a:prstGeom prst="rect">
-            <a:avLst/>
-          </a:prstGeom>
-          <a:noFill/>
-        </p:spPr>
-        <p:txBody>
-          <a:bodyPr wrap="square" lIns="45720" rIns="45720" tIns="18288" bIns="18288">
-            <a:spAutoFit/>
-          </a:bodyPr>
-          <a:lstStyle/>
-          <a:p>
-            <a:pPr algn="l"/>
-            <a:r>
-              <a:rPr sz="1300" b="0">
-                <a:solidFill>
-                  <a:srgbClr val="38BDF8"/>
-                </a:solidFill>
-                <a:latin typeface="Consolas"/>
-              </a:rPr>
-              <a:t>backend-85689c8775-22ml6</a:t>
-            </a:r>
-          </a:p>
-        </p:txBody>
-      </p:sp>
-      <p:sp>
-        <p:nvSpPr>
-          <p:cNvPr id="18" name="Rounded Rectangle 17"/>
-          <p:cNvSpPr/>
-          <p:nvPr/>
-        </p:nvSpPr>
-        <p:spPr>
-          <a:xfrm>
-            <a:off x="1371600" y="3566160"/>
-            <a:ext cx="9144000" cy="457200"/>
-          </a:xfrm>
-          <a:prstGeom prst="roundRect">
-            <a:avLst>
-              <a:gd name="adj" fmla="val 20000"/>
-            </a:avLst>
-          </a:prstGeom>
-          <a:solidFill>
-            <a:srgbClr val="1E293B"/>
-          </a:solidFill>
-          <a:ln w="19050">
-            <a:solidFill>
-              <a:srgbClr val="6EE7B7"/>
-            </a:solidFill>
-          </a:ln>
-        </p:spPr>
-        <p:style>
-          <a:lnRef idx="1">
-            <a:schemeClr val="accent1"/>
-          </a:lnRef>
-          <a:fillRef idx="3">
-            <a:schemeClr val="accent1"/>
-          </a:fillRef>
-          <a:effectRef idx="2">
-            <a:schemeClr val="accent1"/>
-          </a:effectRef>
-          <a:fontRef idx="minor">
-            <a:schemeClr val="lt1"/>
-          </a:fontRef>
-        </p:style>
-        <p:txBody>
-          <a:bodyPr rtlCol="0" anchor="ctr"/>
-          <a:lstStyle/>
-          <a:p>
-            <a:pPr algn="ctr"/>
-          </a:p>
-        </p:txBody>
-      </p:sp>
-      <p:sp>
-        <p:nvSpPr>
-          <p:cNvPr id="19" name="TextBox 18"/>
-          <p:cNvSpPr txBox="1"/>
-          <p:nvPr/>
-        </p:nvSpPr>
-        <p:spPr>
-          <a:xfrm>
-            <a:off x="1645920" y="3657600"/>
-            <a:ext cx="1828800" cy="274320"/>
-          </a:xfrm>
-          <a:prstGeom prst="rect">
-            <a:avLst/>
-          </a:prstGeom>
-          <a:noFill/>
-        </p:spPr>
-        <p:txBody>
-          <a:bodyPr wrap="square" lIns="45720" rIns="45720" tIns="18288" bIns="18288">
-            <a:spAutoFit/>
-          </a:bodyPr>
-          <a:lstStyle/>
-          <a:p>
-            <a:pPr algn="l"/>
-            <a:r>
-              <a:rPr sz="1300" b="1">
+              <a:t>•  Both topics aren't separate concerns </a:t>
+            </a:r>
+            <a:r>
+              <a:rPr lang="en-US" sz="1400" dirty="0">
                 <a:solidFill>
                   <a:srgbClr val="E2E8F0"/>
                 </a:solidFill>
                 <a:latin typeface="Segoe UI"/>
               </a:rPr>
-              <a:t>Request 5</a:t>
+              <a:t>that</a:t>
+            </a:r>
+            <a:r>
+              <a:rPr sz="1400" dirty="0">
+                <a:solidFill>
+                  <a:srgbClr val="E2E8F0"/>
+                </a:solidFill>
+                <a:latin typeface="Segoe UI"/>
+              </a:rPr>
+              <a:t> they're complementary layers of a defense-in-depth design</a:t>
             </a:r>
           </a:p>
         </p:txBody>
@@ -6723,228 +6176,6 @@
       <p:sp>
         <p:nvSpPr>
           <p:cNvPr id="20" name="TextBox 19"/>
-          <p:cNvSpPr txBox="1"/>
-          <p:nvPr/>
-        </p:nvSpPr>
-        <p:spPr>
-          <a:xfrm>
-            <a:off x="3657600" y="3657600"/>
-            <a:ext cx="6400800" cy="274320"/>
-          </a:xfrm>
-          <a:prstGeom prst="rect">
-            <a:avLst/>
-          </a:prstGeom>
-          <a:noFill/>
-        </p:spPr>
-        <p:txBody>
-          <a:bodyPr wrap="square" lIns="45720" rIns="45720" tIns="18288" bIns="18288">
-            <a:spAutoFit/>
-          </a:bodyPr>
-          <a:lstStyle/>
-          <a:p>
-            <a:pPr algn="l"/>
-            <a:r>
-              <a:rPr sz="1300" b="0">
-                <a:solidFill>
-                  <a:srgbClr val="6EE7B7"/>
-                </a:solidFill>
-                <a:latin typeface="Consolas"/>
-              </a:rPr>
-              <a:t>backend-85689c8775-zddq8</a:t>
-            </a:r>
-          </a:p>
-        </p:txBody>
-      </p:sp>
-      <p:sp>
-        <p:nvSpPr>
-          <p:cNvPr id="21" name="Rounded Rectangle 20"/>
-          <p:cNvSpPr/>
-          <p:nvPr/>
-        </p:nvSpPr>
-        <p:spPr>
-          <a:xfrm>
-            <a:off x="1371600" y="4069080"/>
-            <a:ext cx="9144000" cy="457200"/>
-          </a:xfrm>
-          <a:prstGeom prst="roundRect">
-            <a:avLst>
-              <a:gd name="adj" fmla="val 20000"/>
-            </a:avLst>
-          </a:prstGeom>
-          <a:solidFill>
-            <a:srgbClr val="1E293B"/>
-          </a:solidFill>
-          <a:ln w="19050">
-            <a:solidFill>
-              <a:srgbClr val="6EE7B7"/>
-            </a:solidFill>
-          </a:ln>
-        </p:spPr>
-        <p:style>
-          <a:lnRef idx="1">
-            <a:schemeClr val="accent1"/>
-          </a:lnRef>
-          <a:fillRef idx="3">
-            <a:schemeClr val="accent1"/>
-          </a:fillRef>
-          <a:effectRef idx="2">
-            <a:schemeClr val="accent1"/>
-          </a:effectRef>
-          <a:fontRef idx="minor">
-            <a:schemeClr val="lt1"/>
-          </a:fontRef>
-        </p:style>
-        <p:txBody>
-          <a:bodyPr rtlCol="0" anchor="ctr"/>
-          <a:lstStyle/>
-          <a:p>
-            <a:pPr algn="ctr"/>
-          </a:p>
-        </p:txBody>
-      </p:sp>
-      <p:sp>
-        <p:nvSpPr>
-          <p:cNvPr id="22" name="TextBox 21"/>
-          <p:cNvSpPr txBox="1"/>
-          <p:nvPr/>
-        </p:nvSpPr>
-        <p:spPr>
-          <a:xfrm>
-            <a:off x="1645920" y="4160520"/>
-            <a:ext cx="1828800" cy="274320"/>
-          </a:xfrm>
-          <a:prstGeom prst="rect">
-            <a:avLst/>
-          </a:prstGeom>
-          <a:noFill/>
-        </p:spPr>
-        <p:txBody>
-          <a:bodyPr wrap="square" lIns="45720" rIns="45720" tIns="18288" bIns="18288">
-            <a:spAutoFit/>
-          </a:bodyPr>
-          <a:lstStyle/>
-          <a:p>
-            <a:pPr algn="l"/>
-            <a:r>
-              <a:rPr sz="1300" b="1">
-                <a:solidFill>
-                  <a:srgbClr val="E2E8F0"/>
-                </a:solidFill>
-                <a:latin typeface="Segoe UI"/>
-              </a:rPr>
-              <a:t>Request 6</a:t>
-            </a:r>
-          </a:p>
-        </p:txBody>
-      </p:sp>
-      <p:sp>
-        <p:nvSpPr>
-          <p:cNvPr id="23" name="TextBox 22"/>
-          <p:cNvSpPr txBox="1"/>
-          <p:nvPr/>
-        </p:nvSpPr>
-        <p:spPr>
-          <a:xfrm>
-            <a:off x="3657600" y="4160520"/>
-            <a:ext cx="6400800" cy="274320"/>
-          </a:xfrm>
-          <a:prstGeom prst="rect">
-            <a:avLst/>
-          </a:prstGeom>
-          <a:noFill/>
-        </p:spPr>
-        <p:txBody>
-          <a:bodyPr wrap="square" lIns="45720" rIns="45720" tIns="18288" bIns="18288">
-            <a:spAutoFit/>
-          </a:bodyPr>
-          <a:lstStyle/>
-          <a:p>
-            <a:pPr algn="l"/>
-            <a:r>
-              <a:rPr sz="1300" b="0">
-                <a:solidFill>
-                  <a:srgbClr val="6EE7B7"/>
-                </a:solidFill>
-                <a:latin typeface="Consolas"/>
-              </a:rPr>
-              <a:t>backend-85689c8775-zddq8</a:t>
-            </a:r>
-          </a:p>
-        </p:txBody>
-      </p:sp>
-      <p:sp>
-        <p:nvSpPr>
-          <p:cNvPr id="24" name="TextBox 23"/>
-          <p:cNvSpPr txBox="1"/>
-          <p:nvPr/>
-        </p:nvSpPr>
-        <p:spPr>
-          <a:xfrm>
-            <a:off x="457200" y="5486400"/>
-            <a:ext cx="11247120" cy="457200"/>
-          </a:xfrm>
-          <a:prstGeom prst="rect">
-            <a:avLst/>
-          </a:prstGeom>
-          <a:noFill/>
-        </p:spPr>
-        <p:txBody>
-          <a:bodyPr wrap="square" lIns="45720" rIns="45720" tIns="18288" bIns="18288">
-            <a:spAutoFit/>
-          </a:bodyPr>
-          <a:lstStyle/>
-          <a:p>
-            <a:pPr algn="ctr"/>
-            <a:r>
-              <a:rPr sz="1600" b="1">
-                <a:solidFill>
-                  <a:srgbClr val="6EE7B7"/>
-                </a:solidFill>
-                <a:latin typeface="Segoe UI"/>
-              </a:rPr>
-              <a:t>PASS — requests distributed across 2 distinct backend pods (3 + 3)</a:t>
-            </a:r>
-          </a:p>
-        </p:txBody>
-      </p:sp>
-      <p:sp>
-        <p:nvSpPr>
-          <p:cNvPr id="25" name="TextBox 24"/>
-          <p:cNvSpPr txBox="1"/>
-          <p:nvPr/>
-        </p:nvSpPr>
-        <p:spPr>
-          <a:xfrm>
-            <a:off x="457200" y="5943600"/>
-            <a:ext cx="11247120" cy="457200"/>
-          </a:xfrm>
-          <a:prstGeom prst="rect">
-            <a:avLst/>
-          </a:prstGeom>
-          <a:noFill/>
-        </p:spPr>
-        <p:txBody>
-          <a:bodyPr wrap="square" lIns="45720" rIns="45720" tIns="18288" bIns="18288">
-            <a:spAutoFit/>
-          </a:bodyPr>
-          <a:lstStyle/>
-          <a:p>
-            <a:pPr algn="ctr"/>
-            <a:r>
-              <a:rPr sz="1200" b="0">
-                <a:solidFill>
-                  <a:srgbClr val="94A3B8"/>
-                </a:solidFill>
-                <a:latin typeface="Segoe UI"/>
-              </a:rPr>
-              <a:t>kube-proxy + Service abstraction handles routing transparently</a:t>
-            </a:r>
-          </a:p>
-        </p:txBody>
-      </p:sp>
-      <p:sp>
-        <p:nvSpPr>
-          <p:cNvPr id="26" name="TextBox 25"/>
           <p:cNvSpPr txBox="1"/>
           <p:nvPr/>
         </p:nvSpPr>
@@ -6959,7 +6190,7 @@
           <a:noFill/>
         </p:spPr>
         <p:txBody>
-          <a:bodyPr wrap="square" lIns="45720" rIns="45720" tIns="18288" bIns="18288">
+          <a:bodyPr wrap="square" lIns="45720" tIns="18288" rIns="45720" bIns="18288">
             <a:spAutoFit/>
           </a:bodyPr>
           <a:lstStyle/>
@@ -6979,7 +6210,7 @@
       </p:sp>
       <p:sp>
         <p:nvSpPr>
-          <p:cNvPr id="27" name="TextBox 26"/>
+          <p:cNvPr id="21" name="TextBox 20"/>
           <p:cNvSpPr txBox="1"/>
           <p:nvPr/>
         </p:nvSpPr>
@@ -6994,7 +6225,7 @@
           <a:noFill/>
         </p:spPr>
         <p:txBody>
-          <a:bodyPr wrap="square" lIns="45720" rIns="45720" tIns="18288" bIns="18288">
+          <a:bodyPr wrap="square" lIns="45720" tIns="18288" rIns="45720" bIns="18288">
             <a:spAutoFit/>
           </a:bodyPr>
           <a:lstStyle/>
@@ -7007,7 +6238,7 @@
                 </a:solidFill>
                 <a:latin typeface="Segoe UI"/>
               </a:rPr>
-              <a:t>13 / 15</a:t>
+              <a:t>14 / 15</a:t>
             </a:r>
           </a:p>
         </p:txBody>
@@ -7021,7 +6252,7 @@
 </file>
 
 <file path=ppt/slides/slide14.xml><?xml version="1.0" encoding="utf-8"?>
-<p:sld xmlns:a="http://schemas.openxmlformats.org/drawingml/2006/main" xmlns:p="http://schemas.openxmlformats.org/presentationml/2006/main" xmlns:r="http://schemas.openxmlformats.org/officeDocument/2006/relationships">
+<p:sld xmlns:a="http://schemas.openxmlformats.org/drawingml/2006/main" xmlns:r="http://schemas.openxmlformats.org/officeDocument/2006/relationships" xmlns:p="http://schemas.openxmlformats.org/presentationml/2006/main">
   <p:cSld>
     <p:spTree>
       <p:nvGrpSpPr>
@@ -7029,7 +6260,14 @@
         <p:cNvGrpSpPr/>
         <p:nvPr/>
       </p:nvGrpSpPr>
-      <p:grpSpPr/>
+      <p:grpSpPr>
+        <a:xfrm>
+          <a:off x="0" y="0"/>
+          <a:ext cx="0" cy="0"/>
+          <a:chOff x="0" y="0"/>
+          <a:chExt cx="0" cy="0"/>
+        </a:xfrm>
+      </p:grpSpPr>
       <p:sp>
         <p:nvSpPr>
           <p:cNvPr id="2" name="Rectangle 1"/>
@@ -7070,6 +6308,7 @@
           <a:lstStyle/>
           <a:p>
             <a:pPr algn="ctr"/>
+            <a:endParaRPr/>
           </a:p>
         </p:txBody>
       </p:sp>
@@ -7113,6 +6352,7 @@
           <a:lstStyle/>
           <a:p>
             <a:pPr algn="ctr"/>
+            <a:endParaRPr/>
           </a:p>
         </p:txBody>
       </p:sp>
@@ -7124,909 +6364,29 @@
         </p:nvSpPr>
         <p:spPr>
           <a:xfrm>
-            <a:off x="457200" y="274320"/>
-            <a:ext cx="10972800" cy="640080"/>
-          </a:xfrm>
-          <a:prstGeom prst="rect">
-            <a:avLst/>
-          </a:prstGeom>
-          <a:noFill/>
-        </p:spPr>
-        <p:txBody>
-          <a:bodyPr wrap="square" lIns="45720" rIns="45720" tIns="18288" bIns="18288">
-            <a:spAutoFit/>
-          </a:bodyPr>
-          <a:lstStyle/>
-          <a:p>
-            <a:pPr algn="l"/>
-            <a:r>
-              <a:rPr sz="3200" b="1">
+            <a:off x="470852" y="2814550"/>
+            <a:ext cx="11247120" cy="1097280"/>
+          </a:xfrm>
+          <a:prstGeom prst="rect">
+            <a:avLst/>
+          </a:prstGeom>
+          <a:noFill/>
+        </p:spPr>
+        <p:txBody>
+          <a:bodyPr wrap="square" lIns="45720" tIns="18288" rIns="45720" bIns="18288">
+            <a:spAutoFit/>
+          </a:bodyPr>
+          <a:lstStyle/>
+          <a:p>
+            <a:pPr algn="ctr"/>
+            <a:r>
+              <a:rPr sz="7200" b="1" dirty="0">
                 <a:solidFill>
                   <a:srgbClr val="38BDF8"/>
                 </a:solidFill>
                 <a:latin typeface="Segoe UI"/>
               </a:rPr>
-              <a:t>Conclusion</a:t>
-            </a:r>
-          </a:p>
-        </p:txBody>
-      </p:sp>
-      <p:sp>
-        <p:nvSpPr>
-          <p:cNvPr id="5" name="TextBox 4"/>
-          <p:cNvSpPr txBox="1"/>
-          <p:nvPr/>
-        </p:nvSpPr>
-        <p:spPr>
-          <a:xfrm>
-            <a:off x="457200" y="1097280"/>
-            <a:ext cx="10972800" cy="548640"/>
-          </a:xfrm>
-          <a:prstGeom prst="rect">
-            <a:avLst/>
-          </a:prstGeom>
-          <a:noFill/>
-        </p:spPr>
-        <p:txBody>
-          <a:bodyPr wrap="square" lIns="45720" rIns="45720" tIns="18288" bIns="18288">
-            <a:spAutoFit/>
-          </a:bodyPr>
-          <a:lstStyle/>
-          <a:p>
-            <a:pPr algn="ctr"/>
-            <a:r>
-              <a:rPr sz="1800" b="0">
-                <a:solidFill>
-                  <a:srgbClr val="E2E8F0"/>
-                </a:solidFill>
-                <a:latin typeface="Segoe UI"/>
-              </a:rPr>
-              <a:t>A single, unified project demonstrating both topics in one architecture.</a:t>
-            </a:r>
-          </a:p>
-        </p:txBody>
-      </p:sp>
-      <p:sp>
-        <p:nvSpPr>
-          <p:cNvPr id="6" name="Rounded Rectangle 5"/>
-          <p:cNvSpPr/>
-          <p:nvPr/>
-        </p:nvSpPr>
-        <p:spPr>
-          <a:xfrm>
-            <a:off x="457200" y="2011680"/>
-            <a:ext cx="2743200" cy="1645920"/>
-          </a:xfrm>
-          <a:prstGeom prst="roundRect">
-            <a:avLst>
-              <a:gd name="adj" fmla="val 5000"/>
-            </a:avLst>
-          </a:prstGeom>
-          <a:solidFill>
-            <a:srgbClr val="1E293B"/>
-          </a:solidFill>
-          <a:ln w="6350">
-            <a:solidFill>
-              <a:srgbClr val="38BDF8"/>
-            </a:solidFill>
-          </a:ln>
-        </p:spPr>
-        <p:style>
-          <a:lnRef idx="1">
-            <a:schemeClr val="accent1"/>
-          </a:lnRef>
-          <a:fillRef idx="3">
-            <a:schemeClr val="accent1"/>
-          </a:fillRef>
-          <a:effectRef idx="2">
-            <a:schemeClr val="accent1"/>
-          </a:effectRef>
-          <a:fontRef idx="minor">
-            <a:schemeClr val="lt1"/>
-          </a:fontRef>
-        </p:style>
-        <p:txBody>
-          <a:bodyPr rtlCol="0" anchor="ctr"/>
-          <a:lstStyle/>
-          <a:p/>
-        </p:txBody>
-      </p:sp>
-      <p:sp>
-        <p:nvSpPr>
-          <p:cNvPr id="7" name="TextBox 6"/>
-          <p:cNvSpPr txBox="1"/>
-          <p:nvPr/>
-        </p:nvSpPr>
-        <p:spPr>
-          <a:xfrm>
-            <a:off x="457200" y="2194560"/>
-            <a:ext cx="2743200" cy="731520"/>
-          </a:xfrm>
-          <a:prstGeom prst="rect">
-            <a:avLst/>
-          </a:prstGeom>
-          <a:noFill/>
-        </p:spPr>
-        <p:txBody>
-          <a:bodyPr wrap="square" lIns="45720" rIns="45720" tIns="18288" bIns="18288">
-            <a:spAutoFit/>
-          </a:bodyPr>
-          <a:lstStyle/>
-          <a:p>
-            <a:pPr algn="ctr"/>
-            <a:r>
-              <a:rPr sz="4400" b="1">
-                <a:solidFill>
-                  <a:srgbClr val="6EE7B7"/>
-                </a:solidFill>
-                <a:latin typeface="Segoe UI"/>
-              </a:rPr>
-              <a:t>8/8</a:t>
-            </a:r>
-          </a:p>
-        </p:txBody>
-      </p:sp>
-      <p:sp>
-        <p:nvSpPr>
-          <p:cNvPr id="8" name="TextBox 7"/>
-          <p:cNvSpPr txBox="1"/>
-          <p:nvPr/>
-        </p:nvSpPr>
-        <p:spPr>
-          <a:xfrm>
-            <a:off x="457200" y="3108960"/>
-            <a:ext cx="2743200" cy="457200"/>
-          </a:xfrm>
-          <a:prstGeom prst="rect">
-            <a:avLst/>
-          </a:prstGeom>
-          <a:noFill/>
-        </p:spPr>
-        <p:txBody>
-          <a:bodyPr wrap="square" lIns="45720" rIns="45720" tIns="18288" bIns="18288">
-            <a:spAutoFit/>
-          </a:bodyPr>
-          <a:lstStyle/>
-          <a:p>
-            <a:pPr algn="ctr"/>
-            <a:r>
-              <a:rPr sz="1200" b="0">
-                <a:solidFill>
-                  <a:srgbClr val="94A3B8"/>
-                </a:solidFill>
-                <a:latin typeface="Segoe UI"/>
-              </a:rPr>
-              <a:t>Tests passing</a:t>
-            </a:r>
-          </a:p>
-        </p:txBody>
-      </p:sp>
-      <p:sp>
-        <p:nvSpPr>
-          <p:cNvPr id="9" name="Rounded Rectangle 8"/>
-          <p:cNvSpPr/>
-          <p:nvPr/>
-        </p:nvSpPr>
-        <p:spPr>
-          <a:xfrm>
-            <a:off x="3337560" y="2011680"/>
-            <a:ext cx="2743200" cy="1645920"/>
-          </a:xfrm>
-          <a:prstGeom prst="roundRect">
-            <a:avLst>
-              <a:gd name="adj" fmla="val 5000"/>
-            </a:avLst>
-          </a:prstGeom>
-          <a:solidFill>
-            <a:srgbClr val="1E293B"/>
-          </a:solidFill>
-          <a:ln w="6350">
-            <a:solidFill>
-              <a:srgbClr val="38BDF8"/>
-            </a:solidFill>
-          </a:ln>
-        </p:spPr>
-        <p:style>
-          <a:lnRef idx="1">
-            <a:schemeClr val="accent1"/>
-          </a:lnRef>
-          <a:fillRef idx="3">
-            <a:schemeClr val="accent1"/>
-          </a:fillRef>
-          <a:effectRef idx="2">
-            <a:schemeClr val="accent1"/>
-          </a:effectRef>
-          <a:fontRef idx="minor">
-            <a:schemeClr val="lt1"/>
-          </a:fontRef>
-        </p:style>
-        <p:txBody>
-          <a:bodyPr rtlCol="0" anchor="ctr"/>
-          <a:lstStyle/>
-          <a:p/>
-        </p:txBody>
-      </p:sp>
-      <p:sp>
-        <p:nvSpPr>
-          <p:cNvPr id="10" name="TextBox 9"/>
-          <p:cNvSpPr txBox="1"/>
-          <p:nvPr/>
-        </p:nvSpPr>
-        <p:spPr>
-          <a:xfrm>
-            <a:off x="3337560" y="2194560"/>
-            <a:ext cx="2743200" cy="731520"/>
-          </a:xfrm>
-          <a:prstGeom prst="rect">
-            <a:avLst/>
-          </a:prstGeom>
-          <a:noFill/>
-        </p:spPr>
-        <p:txBody>
-          <a:bodyPr wrap="square" lIns="45720" rIns="45720" tIns="18288" bIns="18288">
-            <a:spAutoFit/>
-          </a:bodyPr>
-          <a:lstStyle/>
-          <a:p>
-            <a:pPr algn="ctr"/>
-            <a:r>
-              <a:rPr sz="4400" b="1">
-                <a:solidFill>
-                  <a:srgbClr val="38BDF8"/>
-                </a:solidFill>
-                <a:latin typeface="Segoe UI"/>
-              </a:rPr>
-              <a:t>6</a:t>
-            </a:r>
-          </a:p>
-        </p:txBody>
-      </p:sp>
-      <p:sp>
-        <p:nvSpPr>
-          <p:cNvPr id="11" name="TextBox 10"/>
-          <p:cNvSpPr txBox="1"/>
-          <p:nvPr/>
-        </p:nvSpPr>
-        <p:spPr>
-          <a:xfrm>
-            <a:off x="3337560" y="3108960"/>
-            <a:ext cx="2743200" cy="457200"/>
-          </a:xfrm>
-          <a:prstGeom prst="rect">
-            <a:avLst/>
-          </a:prstGeom>
-          <a:noFill/>
-        </p:spPr>
-        <p:txBody>
-          <a:bodyPr wrap="square" lIns="45720" rIns="45720" tIns="18288" bIns="18288">
-            <a:spAutoFit/>
-          </a:bodyPr>
-          <a:lstStyle/>
-          <a:p>
-            <a:pPr algn="ctr"/>
-            <a:r>
-              <a:rPr sz="1200" b="0">
-                <a:solidFill>
-                  <a:srgbClr val="94A3B8"/>
-                </a:solidFill>
-                <a:latin typeface="Segoe UI"/>
-              </a:rPr>
-              <a:t>Pods (3 deployments × 2)</a:t>
-            </a:r>
-          </a:p>
-        </p:txBody>
-      </p:sp>
-      <p:sp>
-        <p:nvSpPr>
-          <p:cNvPr id="12" name="Rounded Rectangle 11"/>
-          <p:cNvSpPr/>
-          <p:nvPr/>
-        </p:nvSpPr>
-        <p:spPr>
-          <a:xfrm>
-            <a:off x="6217920" y="2011680"/>
-            <a:ext cx="2743200" cy="1645920"/>
-          </a:xfrm>
-          <a:prstGeom prst="roundRect">
-            <a:avLst>
-              <a:gd name="adj" fmla="val 5000"/>
-            </a:avLst>
-          </a:prstGeom>
-          <a:solidFill>
-            <a:srgbClr val="1E293B"/>
-          </a:solidFill>
-          <a:ln w="6350">
-            <a:solidFill>
-              <a:srgbClr val="38BDF8"/>
-            </a:solidFill>
-          </a:ln>
-        </p:spPr>
-        <p:style>
-          <a:lnRef idx="1">
-            <a:schemeClr val="accent1"/>
-          </a:lnRef>
-          <a:fillRef idx="3">
-            <a:schemeClr val="accent1"/>
-          </a:fillRef>
-          <a:effectRef idx="2">
-            <a:schemeClr val="accent1"/>
-          </a:effectRef>
-          <a:fontRef idx="minor">
-            <a:schemeClr val="lt1"/>
-          </a:fontRef>
-        </p:style>
-        <p:txBody>
-          <a:bodyPr rtlCol="0" anchor="ctr"/>
-          <a:lstStyle/>
-          <a:p/>
-        </p:txBody>
-      </p:sp>
-      <p:sp>
-        <p:nvSpPr>
-          <p:cNvPr id="13" name="TextBox 12"/>
-          <p:cNvSpPr txBox="1"/>
-          <p:nvPr/>
-        </p:nvSpPr>
-        <p:spPr>
-          <a:xfrm>
-            <a:off x="6217920" y="2194560"/>
-            <a:ext cx="2743200" cy="731520"/>
-          </a:xfrm>
-          <a:prstGeom prst="rect">
-            <a:avLst/>
-          </a:prstGeom>
-          <a:noFill/>
-        </p:spPr>
-        <p:txBody>
-          <a:bodyPr wrap="square" lIns="45720" rIns="45720" tIns="18288" bIns="18288">
-            <a:spAutoFit/>
-          </a:bodyPr>
-          <a:lstStyle/>
-          <a:p>
-            <a:pPr algn="ctr"/>
-            <a:r>
-              <a:rPr sz="4400" b="1">
-                <a:solidFill>
-                  <a:srgbClr val="38BDF8"/>
-                </a:solidFill>
-                <a:latin typeface="Segoe UI"/>
-              </a:rPr>
-              <a:t>7</a:t>
-            </a:r>
-          </a:p>
-        </p:txBody>
-      </p:sp>
-      <p:sp>
-        <p:nvSpPr>
-          <p:cNvPr id="14" name="TextBox 13"/>
-          <p:cNvSpPr txBox="1"/>
-          <p:nvPr/>
-        </p:nvSpPr>
-        <p:spPr>
-          <a:xfrm>
-            <a:off x="6217920" y="3108960"/>
-            <a:ext cx="2743200" cy="457200"/>
-          </a:xfrm>
-          <a:prstGeom prst="rect">
-            <a:avLst/>
-          </a:prstGeom>
-          <a:noFill/>
-        </p:spPr>
-        <p:txBody>
-          <a:bodyPr wrap="square" lIns="45720" rIns="45720" tIns="18288" bIns="18288">
-            <a:spAutoFit/>
-          </a:bodyPr>
-          <a:lstStyle/>
-          <a:p>
-            <a:pPr algn="ctr"/>
-            <a:r>
-              <a:rPr sz="1200" b="0">
-                <a:solidFill>
-                  <a:srgbClr val="94A3B8"/>
-                </a:solidFill>
-                <a:latin typeface="Segoe UI"/>
-              </a:rPr>
-              <a:t>Kubernetes manifests</a:t>
-            </a:r>
-          </a:p>
-        </p:txBody>
-      </p:sp>
-      <p:sp>
-        <p:nvSpPr>
-          <p:cNvPr id="15" name="Rounded Rectangle 14"/>
-          <p:cNvSpPr/>
-          <p:nvPr/>
-        </p:nvSpPr>
-        <p:spPr>
-          <a:xfrm>
-            <a:off x="9098280" y="2011680"/>
-            <a:ext cx="2743200" cy="1645920"/>
-          </a:xfrm>
-          <a:prstGeom prst="roundRect">
-            <a:avLst>
-              <a:gd name="adj" fmla="val 5000"/>
-            </a:avLst>
-          </a:prstGeom>
-          <a:solidFill>
-            <a:srgbClr val="1E293B"/>
-          </a:solidFill>
-          <a:ln w="6350">
-            <a:solidFill>
-              <a:srgbClr val="38BDF8"/>
-            </a:solidFill>
-          </a:ln>
-        </p:spPr>
-        <p:style>
-          <a:lnRef idx="1">
-            <a:schemeClr val="accent1"/>
-          </a:lnRef>
-          <a:fillRef idx="3">
-            <a:schemeClr val="accent1"/>
-          </a:fillRef>
-          <a:effectRef idx="2">
-            <a:schemeClr val="accent1"/>
-          </a:effectRef>
-          <a:fontRef idx="minor">
-            <a:schemeClr val="lt1"/>
-          </a:fontRef>
-        </p:style>
-        <p:txBody>
-          <a:bodyPr rtlCol="0" anchor="ctr"/>
-          <a:lstStyle/>
-          <a:p/>
-        </p:txBody>
-      </p:sp>
-      <p:sp>
-        <p:nvSpPr>
-          <p:cNvPr id="16" name="TextBox 15"/>
-          <p:cNvSpPr txBox="1"/>
-          <p:nvPr/>
-        </p:nvSpPr>
-        <p:spPr>
-          <a:xfrm>
-            <a:off x="9098280" y="2194560"/>
-            <a:ext cx="2743200" cy="731520"/>
-          </a:xfrm>
-          <a:prstGeom prst="rect">
-            <a:avLst/>
-          </a:prstGeom>
-          <a:noFill/>
-        </p:spPr>
-        <p:txBody>
-          <a:bodyPr wrap="square" lIns="45720" rIns="45720" tIns="18288" bIns="18288">
-            <a:spAutoFit/>
-          </a:bodyPr>
-          <a:lstStyle/>
-          <a:p>
-            <a:pPr algn="ctr"/>
-            <a:r>
-              <a:rPr sz="4400" b="1">
-                <a:solidFill>
-                  <a:srgbClr val="6EE7B7"/>
-                </a:solidFill>
-                <a:latin typeface="Segoe UI"/>
-              </a:rPr>
-              <a:t>8+</a:t>
-            </a:r>
-          </a:p>
-        </p:txBody>
-      </p:sp>
-      <p:sp>
-        <p:nvSpPr>
-          <p:cNvPr id="17" name="TextBox 16"/>
-          <p:cNvSpPr txBox="1"/>
-          <p:nvPr/>
-        </p:nvSpPr>
-        <p:spPr>
-          <a:xfrm>
-            <a:off x="9098280" y="3108960"/>
-            <a:ext cx="2743200" cy="457200"/>
-          </a:xfrm>
-          <a:prstGeom prst="rect">
-            <a:avLst/>
-          </a:prstGeom>
-          <a:noFill/>
-        </p:spPr>
-        <p:txBody>
-          <a:bodyPr wrap="square" lIns="45720" rIns="45720" tIns="18288" bIns="18288">
-            <a:spAutoFit/>
-          </a:bodyPr>
-          <a:lstStyle/>
-          <a:p>
-            <a:pPr algn="ctr"/>
-            <a:r>
-              <a:rPr sz="1200" b="0">
-                <a:solidFill>
-                  <a:srgbClr val="94A3B8"/>
-                </a:solidFill>
-                <a:latin typeface="Segoe UI"/>
-              </a:rPr>
-              <a:t>DDoS protections</a:t>
-            </a:r>
-          </a:p>
-        </p:txBody>
-      </p:sp>
-      <p:sp>
-        <p:nvSpPr>
-          <p:cNvPr id="18" name="TextBox 17"/>
-          <p:cNvSpPr txBox="1"/>
-          <p:nvPr/>
-        </p:nvSpPr>
-        <p:spPr>
-          <a:xfrm>
-            <a:off x="457200" y="4114800"/>
-            <a:ext cx="10972800" cy="457200"/>
-          </a:xfrm>
-          <a:prstGeom prst="rect">
-            <a:avLst/>
-          </a:prstGeom>
-          <a:noFill/>
-        </p:spPr>
-        <p:txBody>
-          <a:bodyPr wrap="square" lIns="45720" rIns="45720" tIns="18288" bIns="18288">
-            <a:spAutoFit/>
-          </a:bodyPr>
-          <a:lstStyle/>
-          <a:p>
-            <a:pPr algn="ctr"/>
-            <a:r>
-              <a:rPr sz="1800" b="1">
-                <a:solidFill>
-                  <a:srgbClr val="38BDF8"/>
-                </a:solidFill>
-                <a:latin typeface="Segoe UI"/>
-              </a:rPr>
-              <a:t>What this proves</a:t>
-            </a:r>
-          </a:p>
-        </p:txBody>
-      </p:sp>
-      <p:sp>
-        <p:nvSpPr>
-          <p:cNvPr id="19" name="TextBox 18"/>
-          <p:cNvSpPr txBox="1"/>
-          <p:nvPr/>
-        </p:nvSpPr>
-        <p:spPr>
-          <a:xfrm>
-            <a:off x="1371600" y="4663440"/>
-            <a:ext cx="9601200" cy="1828800"/>
-          </a:xfrm>
-          <a:prstGeom prst="rect">
-            <a:avLst/>
-          </a:prstGeom>
-          <a:noFill/>
-        </p:spPr>
-        <p:txBody>
-          <a:bodyPr wrap="square">
-            <a:spAutoFit/>
-          </a:bodyPr>
-          <a:lstStyle/>
-          <a:p>
-            <a:pPr>
-              <a:spcAft>
-                <a:spcPts val="600"/>
-              </a:spcAft>
-            </a:pPr>
-            <a:r>
-              <a:rPr sz="1400">
-                <a:solidFill>
-                  <a:srgbClr val="E2E8F0"/>
-                </a:solidFill>
-                <a:latin typeface="Segoe UI"/>
-              </a:rPr>
-              <a:t>•  DDoS mitigation is most effective when applied at the network edge — before requests reach app pods</a:t>
-            </a:r>
-          </a:p>
-          <a:p>
-            <a:pPr>
-              <a:spcAft>
-                <a:spcPts val="600"/>
-              </a:spcAft>
-            </a:pPr>
-            <a:r>
-              <a:rPr sz="1400">
-                <a:solidFill>
-                  <a:srgbClr val="E2E8F0"/>
-                </a:solidFill>
-                <a:latin typeface="Segoe UI"/>
-              </a:rPr>
-              <a:t>•  Kubernetes Service abstraction lets us hide internal services behind a single hardened gateway</a:t>
-            </a:r>
-          </a:p>
-          <a:p>
-            <a:pPr>
-              <a:spcAft>
-                <a:spcPts val="600"/>
-              </a:spcAft>
-            </a:pPr>
-            <a:r>
-              <a:rPr sz="1400">
-                <a:solidFill>
-                  <a:srgbClr val="E2E8F0"/>
-                </a:solidFill>
-                <a:latin typeface="Segoe UI"/>
-              </a:rPr>
-              <a:t>•  Both topics aren't separate concerns — they're complementary layers of a defense-in-depth design</a:t>
-            </a:r>
-          </a:p>
-        </p:txBody>
-      </p:sp>
-      <p:sp>
-        <p:nvSpPr>
-          <p:cNvPr id="20" name="TextBox 19"/>
-          <p:cNvSpPr txBox="1"/>
-          <p:nvPr/>
-        </p:nvSpPr>
-        <p:spPr>
-          <a:xfrm>
-            <a:off x="365760" y="6446520"/>
-            <a:ext cx="7315200" cy="274320"/>
-          </a:xfrm>
-          <a:prstGeom prst="rect">
-            <a:avLst/>
-          </a:prstGeom>
-          <a:noFill/>
-        </p:spPr>
-        <p:txBody>
-          <a:bodyPr wrap="square" lIns="45720" rIns="45720" tIns="18288" bIns="18288">
-            <a:spAutoFit/>
-          </a:bodyPr>
-          <a:lstStyle/>
-          <a:p>
-            <a:pPr algn="l"/>
-            <a:r>
-              <a:rPr sz="1000" b="0">
-                <a:solidFill>
-                  <a:srgbClr val="94A3B8"/>
-                </a:solidFill>
-                <a:latin typeface="Segoe UI"/>
-              </a:rPr>
-              <a:t>DDoS-Protected Multi-Pod Application on Kubernetes</a:t>
-            </a:r>
-          </a:p>
-        </p:txBody>
-      </p:sp>
-      <p:sp>
-        <p:nvSpPr>
-          <p:cNvPr id="21" name="TextBox 20"/>
-          <p:cNvSpPr txBox="1"/>
-          <p:nvPr/>
-        </p:nvSpPr>
-        <p:spPr>
-          <a:xfrm>
-            <a:off x="10515600" y="6446520"/>
-            <a:ext cx="1371600" cy="274320"/>
-          </a:xfrm>
-          <a:prstGeom prst="rect">
-            <a:avLst/>
-          </a:prstGeom>
-          <a:noFill/>
-        </p:spPr>
-        <p:txBody>
-          <a:bodyPr wrap="square" lIns="45720" rIns="45720" tIns="18288" bIns="18288">
-            <a:spAutoFit/>
-          </a:bodyPr>
-          <a:lstStyle/>
-          <a:p>
-            <a:pPr algn="r"/>
-            <a:r>
-              <a:rPr sz="1000" b="0">
-                <a:solidFill>
-                  <a:srgbClr val="94A3B8"/>
-                </a:solidFill>
-                <a:latin typeface="Segoe UI"/>
-              </a:rPr>
-              <a:t>14 / 15</a:t>
-            </a:r>
-          </a:p>
-        </p:txBody>
-      </p:sp>
-    </p:spTree>
-  </p:cSld>
-  <p:clrMapOvr>
-    <a:masterClrMapping/>
-  </p:clrMapOvr>
-</p:sld>
-</file>
-
-<file path=ppt/slides/slide15.xml><?xml version="1.0" encoding="utf-8"?>
-<p:sld xmlns:a="http://schemas.openxmlformats.org/drawingml/2006/main" xmlns:p="http://schemas.openxmlformats.org/presentationml/2006/main" xmlns:r="http://schemas.openxmlformats.org/officeDocument/2006/relationships">
-  <p:cSld>
-    <p:spTree>
-      <p:nvGrpSpPr>
-        <p:cNvPr id="1" name=""/>
-        <p:cNvGrpSpPr/>
-        <p:nvPr/>
-      </p:nvGrpSpPr>
-      <p:grpSpPr/>
-      <p:sp>
-        <p:nvSpPr>
-          <p:cNvPr id="2" name="Rectangle 1"/>
-          <p:cNvSpPr/>
-          <p:nvPr/>
-        </p:nvSpPr>
-        <p:spPr>
-          <a:xfrm>
-            <a:off x="0" y="0"/>
-            <a:ext cx="12188952" cy="6858000"/>
-          </a:xfrm>
-          <a:prstGeom prst="rect">
-            <a:avLst/>
-          </a:prstGeom>
-          <a:solidFill>
-            <a:srgbClr val="0F172A"/>
-          </a:solidFill>
-          <a:ln>
-            <a:noFill/>
-          </a:ln>
-        </p:spPr>
-        <p:style>
-          <a:lnRef idx="1">
-            <a:schemeClr val="accent1"/>
-          </a:lnRef>
-          <a:fillRef idx="3">
-            <a:schemeClr val="accent1"/>
-          </a:fillRef>
-          <a:effectRef idx="2">
-            <a:schemeClr val="accent1"/>
-          </a:effectRef>
-          <a:fontRef idx="minor">
-            <a:schemeClr val="lt1"/>
-          </a:fontRef>
-        </p:style>
-        <p:txBody>
-          <a:bodyPr rtlCol="0" anchor="ctr"/>
-          <a:lstStyle/>
-          <a:p>
-            <a:pPr algn="ctr"/>
-          </a:p>
-        </p:txBody>
-      </p:sp>
-      <p:sp>
-        <p:nvSpPr>
-          <p:cNvPr id="3" name="Rectangle 2"/>
-          <p:cNvSpPr/>
-          <p:nvPr/>
-        </p:nvSpPr>
-        <p:spPr>
-          <a:xfrm>
-            <a:off x="0" y="0"/>
-            <a:ext cx="12188952" cy="137160"/>
-          </a:xfrm>
-          <a:prstGeom prst="rect">
-            <a:avLst/>
-          </a:prstGeom>
-          <a:solidFill>
-            <a:srgbClr val="38BDF8"/>
-          </a:solidFill>
-          <a:ln>
-            <a:noFill/>
-          </a:ln>
-        </p:spPr>
-        <p:style>
-          <a:lnRef idx="1">
-            <a:schemeClr val="accent1"/>
-          </a:lnRef>
-          <a:fillRef idx="3">
-            <a:schemeClr val="accent1"/>
-          </a:fillRef>
-          <a:effectRef idx="2">
-            <a:schemeClr val="accent1"/>
-          </a:effectRef>
-          <a:fontRef idx="minor">
-            <a:schemeClr val="lt1"/>
-          </a:fontRef>
-        </p:style>
-        <p:txBody>
-          <a:bodyPr rtlCol="0" anchor="ctr"/>
-          <a:lstStyle/>
-          <a:p>
-            <a:pPr algn="ctr"/>
-          </a:p>
-        </p:txBody>
-      </p:sp>
-      <p:sp>
-        <p:nvSpPr>
-          <p:cNvPr id="4" name="TextBox 3"/>
-          <p:cNvSpPr txBox="1"/>
-          <p:nvPr/>
-        </p:nvSpPr>
-        <p:spPr>
-          <a:xfrm>
-            <a:off x="457200" y="2468880"/>
-            <a:ext cx="11247120" cy="1097280"/>
-          </a:xfrm>
-          <a:prstGeom prst="rect">
-            <a:avLst/>
-          </a:prstGeom>
-          <a:noFill/>
-        </p:spPr>
-        <p:txBody>
-          <a:bodyPr wrap="square" lIns="45720" rIns="45720" tIns="18288" bIns="18288">
-            <a:spAutoFit/>
-          </a:bodyPr>
-          <a:lstStyle/>
-          <a:p>
-            <a:pPr algn="ctr"/>
-            <a:r>
-              <a:rPr sz="7200" b="1">
-                <a:solidFill>
-                  <a:srgbClr val="38BDF8"/>
-                </a:solidFill>
-                <a:latin typeface="Segoe UI"/>
-              </a:rPr>
               <a:t>Thank You</a:t>
-            </a:r>
-          </a:p>
-        </p:txBody>
-      </p:sp>
-      <p:sp>
-        <p:nvSpPr>
-          <p:cNvPr id="5" name="TextBox 4"/>
-          <p:cNvSpPr txBox="1"/>
-          <p:nvPr/>
-        </p:nvSpPr>
-        <p:spPr>
-          <a:xfrm>
-            <a:off x="457200" y="3657600"/>
-            <a:ext cx="11247120" cy="548640"/>
-          </a:xfrm>
-          <a:prstGeom prst="rect">
-            <a:avLst/>
-          </a:prstGeom>
-          <a:noFill/>
-        </p:spPr>
-        <p:txBody>
-          <a:bodyPr wrap="square" lIns="45720" rIns="45720" tIns="18288" bIns="18288">
-            <a:spAutoFit/>
-          </a:bodyPr>
-          <a:lstStyle/>
-          <a:p>
-            <a:pPr algn="ctr"/>
-            <a:r>
-              <a:rPr sz="2800" b="0">
-                <a:solidFill>
-                  <a:srgbClr val="E2E8F0"/>
-                </a:solidFill>
-                <a:latin typeface="Segoe UI"/>
-              </a:rPr>
-              <a:t>Questions?</a:t>
-            </a:r>
-          </a:p>
-        </p:txBody>
-      </p:sp>
-      <p:sp>
-        <p:nvSpPr>
-          <p:cNvPr id="6" name="TextBox 5"/>
-          <p:cNvSpPr txBox="1"/>
-          <p:nvPr/>
-        </p:nvSpPr>
-        <p:spPr>
-          <a:xfrm>
-            <a:off x="457200" y="4754880"/>
-            <a:ext cx="11247120" cy="457200"/>
-          </a:xfrm>
-          <a:prstGeom prst="rect">
-            <a:avLst/>
-          </a:prstGeom>
-          <a:noFill/>
-        </p:spPr>
-        <p:txBody>
-          <a:bodyPr wrap="square" lIns="45720" rIns="45720" tIns="18288" bIns="18288">
-            <a:spAutoFit/>
-          </a:bodyPr>
-          <a:lstStyle/>
-          <a:p>
-            <a:pPr algn="ctr"/>
-            <a:r>
-              <a:rPr sz="1200" b="0">
-                <a:solidFill>
-                  <a:srgbClr val="94A3B8"/>
-                </a:solidFill>
-                <a:latin typeface="Segoe UI"/>
-              </a:rPr>
-              <a:t>Repository: github.com/&lt;your-username&gt;/information_security_final_projects</a:t>
             </a:r>
           </a:p>
         </p:txBody>
@@ -8040,7 +6400,7 @@
 </file>
 
 <file path=ppt/slides/slide2.xml><?xml version="1.0" encoding="utf-8"?>
-<p:sld xmlns:a="http://schemas.openxmlformats.org/drawingml/2006/main" xmlns:p="http://schemas.openxmlformats.org/presentationml/2006/main" xmlns:r="http://schemas.openxmlformats.org/officeDocument/2006/relationships">
+<p:sld xmlns:a="http://schemas.openxmlformats.org/drawingml/2006/main" xmlns:r="http://schemas.openxmlformats.org/officeDocument/2006/relationships" xmlns:p="http://schemas.openxmlformats.org/presentationml/2006/main">
   <p:cSld>
     <p:spTree>
       <p:nvGrpSpPr>
@@ -8048,7 +6408,14 @@
         <p:cNvGrpSpPr/>
         <p:nvPr/>
       </p:nvGrpSpPr>
-      <p:grpSpPr/>
+      <p:grpSpPr>
+        <a:xfrm>
+          <a:off x="0" y="0"/>
+          <a:ext cx="0" cy="0"/>
+          <a:chOff x="0" y="0"/>
+          <a:chExt cx="0" cy="0"/>
+        </a:xfrm>
+      </p:grpSpPr>
       <p:sp>
         <p:nvSpPr>
           <p:cNvPr id="2" name="Rectangle 1"/>
@@ -8089,6 +6456,7 @@
           <a:lstStyle/>
           <a:p>
             <a:pPr algn="ctr"/>
+            <a:endParaRPr/>
           </a:p>
         </p:txBody>
       </p:sp>
@@ -8132,6 +6500,7 @@
           <a:lstStyle/>
           <a:p>
             <a:pPr algn="ctr"/>
+            <a:endParaRPr/>
           </a:p>
         </p:txBody>
       </p:sp>
@@ -8152,7 +6521,7 @@
           <a:noFill/>
         </p:spPr>
         <p:txBody>
-          <a:bodyPr wrap="square" lIns="45720" rIns="45720" tIns="18288" bIns="18288">
+          <a:bodyPr wrap="square" lIns="45720" tIns="18288" rIns="45720" bIns="18288">
             <a:spAutoFit/>
           </a:bodyPr>
           <a:lstStyle/>
@@ -8212,7 +6581,9 @@
         <p:txBody>
           <a:bodyPr rtlCol="0" anchor="ctr"/>
           <a:lstStyle/>
-          <a:p/>
+          <a:p>
+            <a:endParaRPr/>
+          </a:p>
         </p:txBody>
       </p:sp>
       <p:sp>
@@ -8232,7 +6603,7 @@
           <a:noFill/>
         </p:spPr>
         <p:txBody>
-          <a:bodyPr wrap="square" lIns="45720" rIns="45720" tIns="18288" bIns="18288">
+          <a:bodyPr wrap="square" lIns="45720" tIns="18288" rIns="45720" bIns="18288">
             <a:spAutoFit/>
           </a:bodyPr>
           <a:lstStyle/>
@@ -8395,7 +6766,9 @@
         <p:txBody>
           <a:bodyPr rtlCol="0" anchor="ctr"/>
           <a:lstStyle/>
-          <a:p/>
+          <a:p>
+            <a:endParaRPr/>
+          </a:p>
         </p:txBody>
       </p:sp>
       <p:sp>
@@ -8415,7 +6788,7 @@
           <a:noFill/>
         </p:spPr>
         <p:txBody>
-          <a:bodyPr wrap="square" lIns="45720" rIns="45720" tIns="18288" bIns="18288">
+          <a:bodyPr wrap="square" lIns="45720" tIns="18288" rIns="45720" bIns="18288">
             <a:spAutoFit/>
           </a:bodyPr>
           <a:lstStyle/>
@@ -8553,7 +6926,7 @@
           <a:noFill/>
         </p:spPr>
         <p:txBody>
-          <a:bodyPr wrap="square" lIns="45720" rIns="45720" tIns="18288" bIns="18288">
+          <a:bodyPr wrap="square" lIns="45720" tIns="18288" rIns="45720" bIns="18288">
             <a:spAutoFit/>
           </a:bodyPr>
           <a:lstStyle/>
@@ -8588,7 +6961,7 @@
           <a:noFill/>
         </p:spPr>
         <p:txBody>
-          <a:bodyPr wrap="square" lIns="45720" rIns="45720" tIns="18288" bIns="18288">
+          <a:bodyPr wrap="square" lIns="45720" tIns="18288" rIns="45720" bIns="18288">
             <a:spAutoFit/>
           </a:bodyPr>
           <a:lstStyle/>
@@ -8615,7 +6988,7 @@
 </file>
 
 <file path=ppt/slides/slide3.xml><?xml version="1.0" encoding="utf-8"?>
-<p:sld xmlns:a="http://schemas.openxmlformats.org/drawingml/2006/main" xmlns:p="http://schemas.openxmlformats.org/presentationml/2006/main" xmlns:r="http://schemas.openxmlformats.org/officeDocument/2006/relationships">
+<p:sld xmlns:a="http://schemas.openxmlformats.org/drawingml/2006/main" xmlns:r="http://schemas.openxmlformats.org/officeDocument/2006/relationships" xmlns:p="http://schemas.openxmlformats.org/presentationml/2006/main">
   <p:cSld>
     <p:spTree>
       <p:nvGrpSpPr>
@@ -8623,7 +6996,14 @@
         <p:cNvGrpSpPr/>
         <p:nvPr/>
       </p:nvGrpSpPr>
-      <p:grpSpPr/>
+      <p:grpSpPr>
+        <a:xfrm>
+          <a:off x="0" y="0"/>
+          <a:ext cx="0" cy="0"/>
+          <a:chOff x="0" y="0"/>
+          <a:chExt cx="0" cy="0"/>
+        </a:xfrm>
+      </p:grpSpPr>
       <p:sp>
         <p:nvSpPr>
           <p:cNvPr id="2" name="Rectangle 1"/>
@@ -8664,6 +7044,7 @@
           <a:lstStyle/>
           <a:p>
             <a:pPr algn="ctr"/>
+            <a:endParaRPr/>
           </a:p>
         </p:txBody>
       </p:sp>
@@ -8707,6 +7088,7 @@
           <a:lstStyle/>
           <a:p>
             <a:pPr algn="ctr"/>
+            <a:endParaRPr/>
           </a:p>
         </p:txBody>
       </p:sp>
@@ -8727,7 +7109,7 @@
           <a:noFill/>
         </p:spPr>
         <p:txBody>
-          <a:bodyPr wrap="square" lIns="45720" rIns="45720" tIns="18288" bIns="18288">
+          <a:bodyPr wrap="square" lIns="45720" tIns="18288" rIns="45720" bIns="18288">
             <a:spAutoFit/>
           </a:bodyPr>
           <a:lstStyle/>
@@ -8762,7 +7144,7 @@
           <a:noFill/>
         </p:spPr>
         <p:txBody>
-          <a:bodyPr wrap="square" lIns="45720" rIns="45720" tIns="18288" bIns="18288">
+          <a:bodyPr wrap="square" lIns="45720" tIns="18288" rIns="45720" bIns="18288">
             <a:spAutoFit/>
           </a:bodyPr>
           <a:lstStyle/>
@@ -8822,7 +7204,9 @@
         <p:txBody>
           <a:bodyPr rtlCol="0" anchor="ctr"/>
           <a:lstStyle/>
-          <a:p/>
+          <a:p>
+            <a:endParaRPr/>
+          </a:p>
         </p:txBody>
       </p:sp>
       <p:sp>
@@ -8842,7 +7226,7 @@
           <a:noFill/>
         </p:spPr>
         <p:txBody>
-          <a:bodyPr wrap="square" lIns="45720" rIns="45720" tIns="18288" bIns="18288">
+          <a:bodyPr wrap="square" lIns="45720" tIns="18288" rIns="45720" bIns="18288">
             <a:spAutoFit/>
           </a:bodyPr>
           <a:lstStyle/>
@@ -8989,7 +7373,9 @@
         <p:txBody>
           <a:bodyPr rtlCol="0" anchor="ctr"/>
           <a:lstStyle/>
-          <a:p/>
+          <a:p>
+            <a:endParaRPr/>
+          </a:p>
         </p:txBody>
       </p:sp>
       <p:sp>
@@ -9009,7 +7395,7 @@
           <a:noFill/>
         </p:spPr>
         <p:txBody>
-          <a:bodyPr wrap="square" lIns="45720" rIns="45720" tIns="18288" bIns="18288">
+          <a:bodyPr wrap="square" lIns="45720" tIns="18288" rIns="45720" bIns="18288">
             <a:spAutoFit/>
           </a:bodyPr>
           <a:lstStyle/>
@@ -9156,7 +7542,9 @@
         <p:txBody>
           <a:bodyPr rtlCol="0" anchor="ctr"/>
           <a:lstStyle/>
-          <a:p/>
+          <a:p>
+            <a:endParaRPr/>
+          </a:p>
         </p:txBody>
       </p:sp>
       <p:sp>
@@ -9176,7 +7564,7 @@
           <a:noFill/>
         </p:spPr>
         <p:txBody>
-          <a:bodyPr wrap="square" lIns="45720" rIns="45720" tIns="18288" bIns="18288">
+          <a:bodyPr wrap="square" lIns="45720" tIns="18288" rIns="45720" bIns="18288">
             <a:spAutoFit/>
           </a:bodyPr>
           <a:lstStyle/>
@@ -9298,7 +7686,7 @@
           <a:noFill/>
         </p:spPr>
         <p:txBody>
-          <a:bodyPr wrap="square" lIns="45720" rIns="45720" tIns="18288" bIns="18288">
+          <a:bodyPr wrap="square" lIns="45720" tIns="18288" rIns="45720" bIns="18288">
             <a:spAutoFit/>
           </a:bodyPr>
           <a:lstStyle/>
@@ -9333,7 +7721,7 @@
           <a:noFill/>
         </p:spPr>
         <p:txBody>
-          <a:bodyPr wrap="square" lIns="45720" rIns="45720" tIns="18288" bIns="18288">
+          <a:bodyPr wrap="square" lIns="45720" tIns="18288" rIns="45720" bIns="18288">
             <a:spAutoFit/>
           </a:bodyPr>
           <a:lstStyle/>
@@ -9360,7 +7748,7 @@
 </file>
 
 <file path=ppt/slides/slide4.xml><?xml version="1.0" encoding="utf-8"?>
-<p:sld xmlns:a="http://schemas.openxmlformats.org/drawingml/2006/main" xmlns:p="http://schemas.openxmlformats.org/presentationml/2006/main" xmlns:r="http://schemas.openxmlformats.org/officeDocument/2006/relationships">
+<p:sld xmlns:a="http://schemas.openxmlformats.org/drawingml/2006/main" xmlns:r="http://schemas.openxmlformats.org/officeDocument/2006/relationships" xmlns:p="http://schemas.openxmlformats.org/presentationml/2006/main">
   <p:cSld>
     <p:spTree>
       <p:nvGrpSpPr>
@@ -9368,7 +7756,14 @@
         <p:cNvGrpSpPr/>
         <p:nvPr/>
       </p:nvGrpSpPr>
-      <p:grpSpPr/>
+      <p:grpSpPr>
+        <a:xfrm>
+          <a:off x="0" y="0"/>
+          <a:ext cx="0" cy="0"/>
+          <a:chOff x="0" y="0"/>
+          <a:chExt cx="0" cy="0"/>
+        </a:xfrm>
+      </p:grpSpPr>
       <p:sp>
         <p:nvSpPr>
           <p:cNvPr id="2" name="Rectangle 1"/>
@@ -9409,6 +7804,7 @@
           <a:lstStyle/>
           <a:p>
             <a:pPr algn="ctr"/>
+            <a:endParaRPr/>
           </a:p>
         </p:txBody>
       </p:sp>
@@ -9452,6 +7848,7 @@
           <a:lstStyle/>
           <a:p>
             <a:pPr algn="ctr"/>
+            <a:endParaRPr/>
           </a:p>
         </p:txBody>
       </p:sp>
@@ -9472,7 +7869,7 @@
           <a:noFill/>
         </p:spPr>
         <p:txBody>
-          <a:bodyPr wrap="square" lIns="45720" rIns="45720" tIns="18288" bIns="18288">
+          <a:bodyPr wrap="square" lIns="45720" tIns="18288" rIns="45720" bIns="18288">
             <a:spAutoFit/>
           </a:bodyPr>
           <a:lstStyle/>
@@ -9535,6 +7932,7 @@
           <a:lstStyle/>
           <a:p>
             <a:pPr algn="ctr"/>
+            <a:endParaRPr/>
           </a:p>
         </p:txBody>
       </p:sp>
@@ -9555,7 +7953,7 @@
           <a:noFill/>
         </p:spPr>
         <p:txBody>
-          <a:bodyPr wrap="square" lIns="45720" rIns="45720" tIns="18288" bIns="18288">
+          <a:bodyPr wrap="square" lIns="45720" tIns="18288" rIns="45720" bIns="18288">
             <a:spAutoFit/>
           </a:bodyPr>
           <a:lstStyle/>
@@ -9710,7 +8108,7 @@
           </a:fontRef>
         </p:style>
         <p:txBody>
-          <a:bodyPr rtlCol="0" anchor="ctr" wrap="square"/>
+          <a:bodyPr wrap="square" rtlCol="0" anchor="ctr"/>
           <a:lstStyle/>
           <a:p>
             <a:pPr algn="ctr"/>
@@ -10000,7 +8398,7 @@
           <a:noFill/>
         </p:spPr>
         <p:txBody>
-          <a:bodyPr wrap="square" lIns="45720" rIns="45720" tIns="18288" bIns="18288">
+          <a:bodyPr wrap="square" lIns="45720" tIns="18288" rIns="45720" bIns="18288">
             <a:spAutoFit/>
           </a:bodyPr>
           <a:lstStyle/>
@@ -10035,7 +8433,7 @@
           <a:noFill/>
         </p:spPr>
         <p:txBody>
-          <a:bodyPr wrap="square" lIns="45720" rIns="45720" tIns="18288" bIns="18288">
+          <a:bodyPr wrap="square" lIns="45720" tIns="18288" rIns="45720" bIns="18288">
             <a:spAutoFit/>
           </a:bodyPr>
           <a:lstStyle/>
@@ -10070,7 +8468,7 @@
           <a:noFill/>
         </p:spPr>
         <p:txBody>
-          <a:bodyPr wrap="square" lIns="45720" rIns="45720" tIns="18288" bIns="18288">
+          <a:bodyPr wrap="square" lIns="45720" tIns="18288" rIns="45720" bIns="18288">
             <a:spAutoFit/>
           </a:bodyPr>
           <a:lstStyle/>
@@ -10097,7 +8495,7 @@
 </file>
 
 <file path=ppt/slides/slide5.xml><?xml version="1.0" encoding="utf-8"?>
-<p:sld xmlns:a="http://schemas.openxmlformats.org/drawingml/2006/main" xmlns:p="http://schemas.openxmlformats.org/presentationml/2006/main" xmlns:r="http://schemas.openxmlformats.org/officeDocument/2006/relationships">
+<p:sld xmlns:a="http://schemas.openxmlformats.org/drawingml/2006/main" xmlns:r="http://schemas.openxmlformats.org/officeDocument/2006/relationships" xmlns:p="http://schemas.openxmlformats.org/presentationml/2006/main">
   <p:cSld>
     <p:spTree>
       <p:nvGrpSpPr>
@@ -10105,7 +8503,14 @@
         <p:cNvGrpSpPr/>
         <p:nvPr/>
       </p:nvGrpSpPr>
-      <p:grpSpPr/>
+      <p:grpSpPr>
+        <a:xfrm>
+          <a:off x="0" y="0"/>
+          <a:ext cx="0" cy="0"/>
+          <a:chOff x="0" y="0"/>
+          <a:chExt cx="0" cy="0"/>
+        </a:xfrm>
+      </p:grpSpPr>
       <p:sp>
         <p:nvSpPr>
           <p:cNvPr id="2" name="Rectangle 1"/>
@@ -10146,6 +8551,7 @@
           <a:lstStyle/>
           <a:p>
             <a:pPr algn="ctr"/>
+            <a:endParaRPr/>
           </a:p>
         </p:txBody>
       </p:sp>
@@ -10189,6 +8595,7 @@
           <a:lstStyle/>
           <a:p>
             <a:pPr algn="ctr"/>
+            <a:endParaRPr/>
           </a:p>
         </p:txBody>
       </p:sp>
@@ -10209,7 +8616,7 @@
           <a:noFill/>
         </p:spPr>
         <p:txBody>
-          <a:bodyPr wrap="square" lIns="45720" rIns="45720" tIns="18288" bIns="18288">
+          <a:bodyPr wrap="square" lIns="45720" tIns="18288" rIns="45720" bIns="18288">
             <a:spAutoFit/>
           </a:bodyPr>
           <a:lstStyle/>
@@ -10267,6 +8674,7 @@
           <a:lstStyle/>
           <a:p>
             <a:pPr algn="ctr"/>
+            <a:endParaRPr/>
           </a:p>
         </p:txBody>
       </p:sp>
@@ -10287,7 +8695,7 @@
           <a:noFill/>
         </p:spPr>
         <p:txBody>
-          <a:bodyPr wrap="square" lIns="45720" rIns="45720" tIns="18288" bIns="18288">
+          <a:bodyPr wrap="square" lIns="45720" tIns="18288" rIns="45720" bIns="18288">
             <a:spAutoFit/>
           </a:bodyPr>
           <a:lstStyle/>
@@ -10322,7 +8730,7 @@
           <a:noFill/>
         </p:spPr>
         <p:txBody>
-          <a:bodyPr wrap="square" lIns="45720" rIns="45720" tIns="18288" bIns="18288">
+          <a:bodyPr wrap="square" lIns="45720" tIns="18288" rIns="45720" bIns="18288">
             <a:spAutoFit/>
           </a:bodyPr>
           <a:lstStyle/>
@@ -10380,6 +8788,7 @@
           <a:lstStyle/>
           <a:p>
             <a:pPr algn="ctr"/>
+            <a:endParaRPr/>
           </a:p>
         </p:txBody>
       </p:sp>
@@ -10400,7 +8809,7 @@
           <a:noFill/>
         </p:spPr>
         <p:txBody>
-          <a:bodyPr wrap="square" lIns="45720" rIns="45720" tIns="18288" bIns="18288">
+          <a:bodyPr wrap="square" lIns="45720" tIns="18288" rIns="45720" bIns="18288">
             <a:spAutoFit/>
           </a:bodyPr>
           <a:lstStyle/>
@@ -10435,7 +8844,7 @@
           <a:noFill/>
         </p:spPr>
         <p:txBody>
-          <a:bodyPr wrap="square" lIns="45720" rIns="45720" tIns="18288" bIns="18288">
+          <a:bodyPr wrap="square" lIns="45720" tIns="18288" rIns="45720" bIns="18288">
             <a:spAutoFit/>
           </a:bodyPr>
           <a:lstStyle/>
@@ -10455,13 +8864,13 @@
       </p:sp>
       <p:sp>
         <p:nvSpPr>
-          <p:cNvPr id="11" name="Oval 10"/>
+          <p:cNvPr id="14" name="Oval 13"/>
           <p:cNvSpPr/>
           <p:nvPr/>
         </p:nvSpPr>
         <p:spPr>
           <a:xfrm>
-            <a:off x="457200" y="2889504"/>
+            <a:off x="457200" y="3730752"/>
             <a:ext cx="182880" cy="182880"/>
           </a:xfrm>
           <a:prstGeom prst="ellipse">
@@ -10493,18 +8902,19 @@
           <a:lstStyle/>
           <a:p>
             <a:pPr algn="ctr"/>
-          </a:p>
-        </p:txBody>
-      </p:sp>
-      <p:sp>
-        <p:nvSpPr>
-          <p:cNvPr id="12" name="TextBox 11"/>
-          <p:cNvSpPr txBox="1"/>
-          <p:nvPr/>
-        </p:nvSpPr>
-        <p:spPr>
-          <a:xfrm>
-            <a:off x="777240" y="2779776"/>
+            <a:endParaRPr/>
+          </a:p>
+        </p:txBody>
+      </p:sp>
+      <p:sp>
+        <p:nvSpPr>
+          <p:cNvPr id="15" name="TextBox 14"/>
+          <p:cNvSpPr txBox="1"/>
+          <p:nvPr/>
+        </p:nvSpPr>
+        <p:spPr>
+          <a:xfrm>
+            <a:off x="777240" y="3621024"/>
             <a:ext cx="10789920" cy="365760"/>
           </a:xfrm>
           <a:prstGeom prst="rect">
@@ -10513,7 +8923,7 @@
           <a:noFill/>
         </p:spPr>
         <p:txBody>
-          <a:bodyPr wrap="square" lIns="45720" rIns="45720" tIns="18288" bIns="18288">
+          <a:bodyPr wrap="square" lIns="45720" tIns="18288" rIns="45720" bIns="18288">
             <a:spAutoFit/>
           </a:bodyPr>
           <a:lstStyle/>
@@ -10526,20 +8936,20 @@
                 </a:solidFill>
                 <a:latin typeface="Segoe UI"/>
               </a:rPr>
-              <a:t>`$binary_remote_addr` for rate-limit key</a:t>
-            </a:r>
-          </a:p>
-        </p:txBody>
-      </p:sp>
-      <p:sp>
-        <p:nvSpPr>
-          <p:cNvPr id="13" name="TextBox 12"/>
-          <p:cNvSpPr txBox="1"/>
-          <p:nvPr/>
-        </p:nvSpPr>
-        <p:spPr>
-          <a:xfrm>
-            <a:off x="777240" y="3099816"/>
+              <a:t>Return HTTP 429 instead of default 503</a:t>
+            </a:r>
+          </a:p>
+        </p:txBody>
+      </p:sp>
+      <p:sp>
+        <p:nvSpPr>
+          <p:cNvPr id="16" name="TextBox 15"/>
+          <p:cNvSpPr txBox="1"/>
+          <p:nvPr/>
+        </p:nvSpPr>
+        <p:spPr>
+          <a:xfrm>
+            <a:off x="777240" y="3941064"/>
             <a:ext cx="10789920" cy="457200"/>
           </a:xfrm>
           <a:prstGeom prst="rect">
@@ -10548,7 +8958,7 @@
           <a:noFill/>
         </p:spPr>
         <p:txBody>
-          <a:bodyPr wrap="square" lIns="45720" rIns="45720" tIns="18288" bIns="18288">
+          <a:bodyPr wrap="square" lIns="45720" tIns="18288" rIns="45720" bIns="18288">
             <a:spAutoFit/>
           </a:bodyPr>
           <a:lstStyle/>
@@ -10561,20 +8971,20 @@
                 </a:solidFill>
                 <a:latin typeface="Segoe UI"/>
               </a:rPr>
-              <a:t>Stores IPs in ~64 bytes vs ~64+ for string form. A 10MB zone tracks ~160,000 unique IPs — efficient at scale.</a:t>
-            </a:r>
-          </a:p>
-        </p:txBody>
-      </p:sp>
-      <p:sp>
-        <p:nvSpPr>
-          <p:cNvPr id="14" name="Oval 13"/>
+              <a:t>429 = 'Too Many Requests' is semantically correct and tells well-behaved clients to back off. 503 implies server failure.</a:t>
+            </a:r>
+          </a:p>
+        </p:txBody>
+      </p:sp>
+      <p:sp>
+        <p:nvSpPr>
+          <p:cNvPr id="17" name="Oval 16"/>
           <p:cNvSpPr/>
           <p:nvPr/>
         </p:nvSpPr>
         <p:spPr>
           <a:xfrm>
-            <a:off x="457200" y="3730752"/>
+            <a:off x="457200" y="4572000"/>
             <a:ext cx="182880" cy="182880"/>
           </a:xfrm>
           <a:prstGeom prst="ellipse">
@@ -10606,119 +9016,7 @@
           <a:lstStyle/>
           <a:p>
             <a:pPr algn="ctr"/>
-          </a:p>
-        </p:txBody>
-      </p:sp>
-      <p:sp>
-        <p:nvSpPr>
-          <p:cNvPr id="15" name="TextBox 14"/>
-          <p:cNvSpPr txBox="1"/>
-          <p:nvPr/>
-        </p:nvSpPr>
-        <p:spPr>
-          <a:xfrm>
-            <a:off x="777240" y="3621024"/>
-            <a:ext cx="10789920" cy="365760"/>
-          </a:xfrm>
-          <a:prstGeom prst="rect">
-            <a:avLst/>
-          </a:prstGeom>
-          <a:noFill/>
-        </p:spPr>
-        <p:txBody>
-          <a:bodyPr wrap="square" lIns="45720" rIns="45720" tIns="18288" bIns="18288">
-            <a:spAutoFit/>
-          </a:bodyPr>
-          <a:lstStyle/>
-          <a:p>
-            <a:pPr algn="l"/>
-            <a:r>
-              <a:rPr sz="1500" b="1">
-                <a:solidFill>
-                  <a:srgbClr val="38BDF8"/>
-                </a:solidFill>
-                <a:latin typeface="Segoe UI"/>
-              </a:rPr>
-              <a:t>Return HTTP 429 instead of default 503</a:t>
-            </a:r>
-          </a:p>
-        </p:txBody>
-      </p:sp>
-      <p:sp>
-        <p:nvSpPr>
-          <p:cNvPr id="16" name="TextBox 15"/>
-          <p:cNvSpPr txBox="1"/>
-          <p:nvPr/>
-        </p:nvSpPr>
-        <p:spPr>
-          <a:xfrm>
-            <a:off x="777240" y="3941064"/>
-            <a:ext cx="10789920" cy="457200"/>
-          </a:xfrm>
-          <a:prstGeom prst="rect">
-            <a:avLst/>
-          </a:prstGeom>
-          <a:noFill/>
-        </p:spPr>
-        <p:txBody>
-          <a:bodyPr wrap="square" lIns="45720" rIns="45720" tIns="18288" bIns="18288">
-            <a:spAutoFit/>
-          </a:bodyPr>
-          <a:lstStyle/>
-          <a:p>
-            <a:pPr algn="l"/>
-            <a:r>
-              <a:rPr sz="1200" b="0">
-                <a:solidFill>
-                  <a:srgbClr val="E2E8F0"/>
-                </a:solidFill>
-                <a:latin typeface="Segoe UI"/>
-              </a:rPr>
-              <a:t>429 = 'Too Many Requests' is semantically correct and tells well-behaved clients to back off. 503 implies server failure.</a:t>
-            </a:r>
-          </a:p>
-        </p:txBody>
-      </p:sp>
-      <p:sp>
-        <p:nvSpPr>
-          <p:cNvPr id="17" name="Oval 16"/>
-          <p:cNvSpPr/>
-          <p:nvPr/>
-        </p:nvSpPr>
-        <p:spPr>
-          <a:xfrm>
-            <a:off x="457200" y="4572000"/>
-            <a:ext cx="182880" cy="182880"/>
-          </a:xfrm>
-          <a:prstGeom prst="ellipse">
-            <a:avLst/>
-          </a:prstGeom>
-          <a:solidFill>
-            <a:srgbClr val="38BDF8"/>
-          </a:solidFill>
-          <a:ln>
-            <a:noFill/>
-          </a:ln>
-        </p:spPr>
-        <p:style>
-          <a:lnRef idx="1">
-            <a:schemeClr val="accent1"/>
-          </a:lnRef>
-          <a:fillRef idx="3">
-            <a:schemeClr val="accent1"/>
-          </a:fillRef>
-          <a:effectRef idx="2">
-            <a:schemeClr val="accent1"/>
-          </a:effectRef>
-          <a:fontRef idx="minor">
-            <a:schemeClr val="lt1"/>
-          </a:fontRef>
-        </p:style>
-        <p:txBody>
-          <a:bodyPr rtlCol="0" anchor="ctr"/>
-          <a:lstStyle/>
-          <a:p>
-            <a:pPr algn="ctr"/>
+            <a:endParaRPr/>
           </a:p>
         </p:txBody>
       </p:sp>
@@ -10739,7 +9037,7 @@
           <a:noFill/>
         </p:spPr>
         <p:txBody>
-          <a:bodyPr wrap="square" lIns="45720" rIns="45720" tIns="18288" bIns="18288">
+          <a:bodyPr wrap="square" lIns="45720" tIns="18288" rIns="45720" bIns="18288">
             <a:spAutoFit/>
           </a:bodyPr>
           <a:lstStyle/>
@@ -10774,7 +9072,7 @@
           <a:noFill/>
         </p:spPr>
         <p:txBody>
-          <a:bodyPr wrap="square" lIns="45720" rIns="45720" tIns="18288" bIns="18288">
+          <a:bodyPr wrap="square" lIns="45720" tIns="18288" rIns="45720" bIns="18288">
             <a:spAutoFit/>
           </a:bodyPr>
           <a:lstStyle/>
@@ -10788,119 +9086,6 @@
                 <a:latin typeface="Segoe UI"/>
               </a:rPr>
               <a:t>Two replicas of every tier (gateway, frontend, backend) — survives pod failures, distributes load, demonstrates K8s self-healing.</a:t>
-            </a:r>
-          </a:p>
-        </p:txBody>
-      </p:sp>
-      <p:sp>
-        <p:nvSpPr>
-          <p:cNvPr id="20" name="Oval 19"/>
-          <p:cNvSpPr/>
-          <p:nvPr/>
-        </p:nvSpPr>
-        <p:spPr>
-          <a:xfrm>
-            <a:off x="457200" y="5413248"/>
-            <a:ext cx="182880" cy="182880"/>
-          </a:xfrm>
-          <a:prstGeom prst="ellipse">
-            <a:avLst/>
-          </a:prstGeom>
-          <a:solidFill>
-            <a:srgbClr val="38BDF8"/>
-          </a:solidFill>
-          <a:ln>
-            <a:noFill/>
-          </a:ln>
-        </p:spPr>
-        <p:style>
-          <a:lnRef idx="1">
-            <a:schemeClr val="accent1"/>
-          </a:lnRef>
-          <a:fillRef idx="3">
-            <a:schemeClr val="accent1"/>
-          </a:fillRef>
-          <a:effectRef idx="2">
-            <a:schemeClr val="accent1"/>
-          </a:effectRef>
-          <a:fontRef idx="minor">
-            <a:schemeClr val="lt1"/>
-          </a:fontRef>
-        </p:style>
-        <p:txBody>
-          <a:bodyPr rtlCol="0" anchor="ctr"/>
-          <a:lstStyle/>
-          <a:p>
-            <a:pPr algn="ctr"/>
-          </a:p>
-        </p:txBody>
-      </p:sp>
-      <p:sp>
-        <p:nvSpPr>
-          <p:cNvPr id="21" name="TextBox 20"/>
-          <p:cNvSpPr txBox="1"/>
-          <p:nvPr/>
-        </p:nvSpPr>
-        <p:spPr>
-          <a:xfrm>
-            <a:off x="777240" y="5303520"/>
-            <a:ext cx="10789920" cy="365760"/>
-          </a:xfrm>
-          <a:prstGeom prst="rect">
-            <a:avLst/>
-          </a:prstGeom>
-          <a:noFill/>
-        </p:spPr>
-        <p:txBody>
-          <a:bodyPr wrap="square" lIns="45720" rIns="45720" tIns="18288" bIns="18288">
-            <a:spAutoFit/>
-          </a:bodyPr>
-          <a:lstStyle/>
-          <a:p>
-            <a:pPr algn="l"/>
-            <a:r>
-              <a:rPr sz="1500" b="1">
-                <a:solidFill>
-                  <a:srgbClr val="38BDF8"/>
-                </a:solidFill>
-                <a:latin typeface="Segoe UI"/>
-              </a:rPr>
-              <a:t>Readiness + liveness probes</a:t>
-            </a:r>
-          </a:p>
-        </p:txBody>
-      </p:sp>
-      <p:sp>
-        <p:nvSpPr>
-          <p:cNvPr id="22" name="TextBox 21"/>
-          <p:cNvSpPr txBox="1"/>
-          <p:nvPr/>
-        </p:nvSpPr>
-        <p:spPr>
-          <a:xfrm>
-            <a:off x="777240" y="5623560"/>
-            <a:ext cx="10789920" cy="457200"/>
-          </a:xfrm>
-          <a:prstGeom prst="rect">
-            <a:avLst/>
-          </a:prstGeom>
-          <a:noFill/>
-        </p:spPr>
-        <p:txBody>
-          <a:bodyPr wrap="square" lIns="45720" rIns="45720" tIns="18288" bIns="18288">
-            <a:spAutoFit/>
-          </a:bodyPr>
-          <a:lstStyle/>
-          <a:p>
-            <a:pPr algn="l"/>
-            <a:r>
-              <a:rPr sz="1200" b="0">
-                <a:solidFill>
-                  <a:srgbClr val="E2E8F0"/>
-                </a:solidFill>
-                <a:latin typeface="Segoe UI"/>
-              </a:rPr>
-              <a:t>Readiness keeps unready pods out of the service. Liveness restarts pods that hang — both required for production resilience.</a:t>
             </a:r>
           </a:p>
         </p:txBody>
@@ -10922,7 +9107,7 @@
           <a:noFill/>
         </p:spPr>
         <p:txBody>
-          <a:bodyPr wrap="square" lIns="45720" rIns="45720" tIns="18288" bIns="18288">
+          <a:bodyPr wrap="square" lIns="45720" tIns="18288" rIns="45720" bIns="18288">
             <a:spAutoFit/>
           </a:bodyPr>
           <a:lstStyle/>
@@ -10957,7 +9142,7 @@
           <a:noFill/>
         </p:spPr>
         <p:txBody>
-          <a:bodyPr wrap="square" lIns="45720" rIns="45720" tIns="18288" bIns="18288">
+          <a:bodyPr wrap="square" lIns="45720" tIns="18288" rIns="45720" bIns="18288">
             <a:spAutoFit/>
           </a:bodyPr>
           <a:lstStyle/>
@@ -10984,7 +9169,7 @@
 </file>
 
 <file path=ppt/slides/slide6.xml><?xml version="1.0" encoding="utf-8"?>
-<p:sld xmlns:a="http://schemas.openxmlformats.org/drawingml/2006/main" xmlns:p="http://schemas.openxmlformats.org/presentationml/2006/main" xmlns:r="http://schemas.openxmlformats.org/officeDocument/2006/relationships">
+<p:sld xmlns:a="http://schemas.openxmlformats.org/drawingml/2006/main" xmlns:r="http://schemas.openxmlformats.org/officeDocument/2006/relationships" xmlns:p="http://schemas.openxmlformats.org/presentationml/2006/main">
   <p:cSld>
     <p:spTree>
       <p:nvGrpSpPr>
@@ -10992,7 +9177,14 @@
         <p:cNvGrpSpPr/>
         <p:nvPr/>
       </p:nvGrpSpPr>
-      <p:grpSpPr/>
+      <p:grpSpPr>
+        <a:xfrm>
+          <a:off x="0" y="0"/>
+          <a:ext cx="0" cy="0"/>
+          <a:chOff x="0" y="0"/>
+          <a:chExt cx="0" cy="0"/>
+        </a:xfrm>
+      </p:grpSpPr>
       <p:sp>
         <p:nvSpPr>
           <p:cNvPr id="2" name="Rectangle 1"/>
@@ -11033,6 +9225,7 @@
           <a:lstStyle/>
           <a:p>
             <a:pPr algn="ctr"/>
+            <a:endParaRPr/>
           </a:p>
         </p:txBody>
       </p:sp>
@@ -11076,6 +9269,7 @@
           <a:lstStyle/>
           <a:p>
             <a:pPr algn="ctr"/>
+            <a:endParaRPr/>
           </a:p>
         </p:txBody>
       </p:sp>
@@ -11096,7 +9290,7 @@
           <a:noFill/>
         </p:spPr>
         <p:txBody>
-          <a:bodyPr wrap="square" lIns="45720" rIns="45720" tIns="18288" bIns="18288">
+          <a:bodyPr wrap="square" lIns="45720" tIns="18288" rIns="45720" bIns="18288">
             <a:spAutoFit/>
           </a:bodyPr>
           <a:lstStyle/>
@@ -11154,6 +9348,7 @@
           <a:lstStyle/>
           <a:p>
             <a:pPr algn="ctr"/>
+            <a:endParaRPr/>
           </a:p>
         </p:txBody>
       </p:sp>
@@ -11174,7 +9369,7 @@
           <a:noFill/>
         </p:spPr>
         <p:txBody>
-          <a:bodyPr wrap="square" lIns="45720" rIns="45720" tIns="18288" bIns="18288">
+          <a:bodyPr wrap="square" lIns="45720" tIns="18288" rIns="45720" bIns="18288">
             <a:spAutoFit/>
           </a:bodyPr>
           <a:lstStyle/>
@@ -11209,7 +9404,7 @@
           <a:noFill/>
         </p:spPr>
         <p:txBody>
-          <a:bodyPr wrap="square" lIns="45720" rIns="45720" tIns="18288" bIns="18288">
+          <a:bodyPr wrap="square" lIns="45720" tIns="18288" rIns="45720" bIns="18288">
             <a:spAutoFit/>
           </a:bodyPr>
           <a:lstStyle/>
@@ -11244,7 +9439,7 @@
           <a:noFill/>
         </p:spPr>
         <p:txBody>
-          <a:bodyPr wrap="square" lIns="45720" rIns="45720" tIns="18288" bIns="18288">
+          <a:bodyPr wrap="square" lIns="45720" tIns="18288" rIns="45720" bIns="18288">
             <a:spAutoFit/>
           </a:bodyPr>
           <a:lstStyle/>
@@ -11302,6 +9497,7 @@
           <a:lstStyle/>
           <a:p>
             <a:pPr algn="ctr"/>
+            <a:endParaRPr/>
           </a:p>
         </p:txBody>
       </p:sp>
@@ -11322,7 +9518,7 @@
           <a:noFill/>
         </p:spPr>
         <p:txBody>
-          <a:bodyPr wrap="square" lIns="45720" rIns="45720" tIns="18288" bIns="18288">
+          <a:bodyPr wrap="square" lIns="45720" tIns="18288" rIns="45720" bIns="18288">
             <a:spAutoFit/>
           </a:bodyPr>
           <a:lstStyle/>
@@ -11357,7 +9553,7 @@
           <a:noFill/>
         </p:spPr>
         <p:txBody>
-          <a:bodyPr wrap="square" lIns="45720" rIns="45720" tIns="18288" bIns="18288">
+          <a:bodyPr wrap="square" lIns="45720" tIns="18288" rIns="45720" bIns="18288">
             <a:spAutoFit/>
           </a:bodyPr>
           <a:lstStyle/>
@@ -11392,7 +9588,7 @@
           <a:noFill/>
         </p:spPr>
         <p:txBody>
-          <a:bodyPr wrap="square" lIns="45720" rIns="45720" tIns="18288" bIns="18288">
+          <a:bodyPr wrap="square" lIns="45720" tIns="18288" rIns="45720" bIns="18288">
             <a:spAutoFit/>
           </a:bodyPr>
           <a:lstStyle/>
@@ -11427,7 +9623,7 @@
           <a:noFill/>
         </p:spPr>
         <p:txBody>
-          <a:bodyPr wrap="square" lIns="45720" rIns="45720" tIns="18288" bIns="18288">
+          <a:bodyPr wrap="square" lIns="45720" tIns="18288" rIns="45720" bIns="18288">
             <a:spAutoFit/>
           </a:bodyPr>
           <a:lstStyle/>
@@ -11462,7 +9658,7 @@
           <a:noFill/>
         </p:spPr>
         <p:txBody>
-          <a:bodyPr wrap="square" lIns="45720" rIns="45720" tIns="18288" bIns="18288">
+          <a:bodyPr wrap="square" lIns="45720" tIns="18288" rIns="45720" bIns="18288">
             <a:spAutoFit/>
           </a:bodyPr>
           <a:lstStyle/>
@@ -11497,7 +9693,7 @@
           <a:noFill/>
         </p:spPr>
         <p:txBody>
-          <a:bodyPr wrap="square" lIns="45720" rIns="45720" tIns="18288" bIns="18288">
+          <a:bodyPr wrap="square" lIns="45720" tIns="18288" rIns="45720" bIns="18288">
             <a:spAutoFit/>
           </a:bodyPr>
           <a:lstStyle/>
@@ -11555,6 +9751,7 @@
           <a:lstStyle/>
           <a:p>
             <a:pPr algn="ctr"/>
+            <a:endParaRPr/>
           </a:p>
         </p:txBody>
       </p:sp>
@@ -11575,7 +9772,7 @@
           <a:noFill/>
         </p:spPr>
         <p:txBody>
-          <a:bodyPr wrap="square" lIns="45720" rIns="45720" tIns="18288" bIns="18288">
+          <a:bodyPr wrap="square" lIns="45720" tIns="18288" rIns="45720" bIns="18288">
             <a:spAutoFit/>
           </a:bodyPr>
           <a:lstStyle/>
@@ -11610,7 +9807,7 @@
           <a:noFill/>
         </p:spPr>
         <p:txBody>
-          <a:bodyPr wrap="square" lIns="45720" rIns="45720" tIns="18288" bIns="18288">
+          <a:bodyPr wrap="square" lIns="45720" tIns="18288" rIns="45720" bIns="18288">
             <a:spAutoFit/>
           </a:bodyPr>
           <a:lstStyle/>
@@ -11645,7 +9842,7 @@
           <a:noFill/>
         </p:spPr>
         <p:txBody>
-          <a:bodyPr wrap="square" lIns="45720" rIns="45720" tIns="18288" bIns="18288">
+          <a:bodyPr wrap="square" lIns="45720" tIns="18288" rIns="45720" bIns="18288">
             <a:spAutoFit/>
           </a:bodyPr>
           <a:lstStyle/>
@@ -11680,7 +9877,7 @@
           <a:noFill/>
         </p:spPr>
         <p:txBody>
-          <a:bodyPr wrap="square" lIns="45720" rIns="45720" tIns="18288" bIns="18288">
+          <a:bodyPr wrap="square" lIns="45720" tIns="18288" rIns="45720" bIns="18288">
             <a:spAutoFit/>
           </a:bodyPr>
           <a:lstStyle/>
@@ -11715,7 +9912,7 @@
           <a:noFill/>
         </p:spPr>
         <p:txBody>
-          <a:bodyPr wrap="square" lIns="45720" rIns="45720" tIns="18288" bIns="18288">
+          <a:bodyPr wrap="square" lIns="45720" tIns="18288" rIns="45720" bIns="18288">
             <a:spAutoFit/>
           </a:bodyPr>
           <a:lstStyle/>
@@ -11750,7 +9947,7 @@
           <a:noFill/>
         </p:spPr>
         <p:txBody>
-          <a:bodyPr wrap="square" lIns="45720" rIns="45720" tIns="18288" bIns="18288">
+          <a:bodyPr wrap="square" lIns="45720" tIns="18288" rIns="45720" bIns="18288">
             <a:spAutoFit/>
           </a:bodyPr>
           <a:lstStyle/>
@@ -11808,6 +10005,7 @@
           <a:lstStyle/>
           <a:p>
             <a:pPr algn="ctr"/>
+            <a:endParaRPr/>
           </a:p>
         </p:txBody>
       </p:sp>
@@ -11828,7 +10026,7 @@
           <a:noFill/>
         </p:spPr>
         <p:txBody>
-          <a:bodyPr wrap="square" lIns="45720" rIns="45720" tIns="18288" bIns="18288">
+          <a:bodyPr wrap="square" lIns="45720" tIns="18288" rIns="45720" bIns="18288">
             <a:spAutoFit/>
           </a:bodyPr>
           <a:lstStyle/>
@@ -11863,7 +10061,7 @@
           <a:noFill/>
         </p:spPr>
         <p:txBody>
-          <a:bodyPr wrap="square" lIns="45720" rIns="45720" tIns="18288" bIns="18288">
+          <a:bodyPr wrap="square" lIns="45720" tIns="18288" rIns="45720" bIns="18288">
             <a:spAutoFit/>
           </a:bodyPr>
           <a:lstStyle/>
@@ -11898,7 +10096,7 @@
           <a:noFill/>
         </p:spPr>
         <p:txBody>
-          <a:bodyPr wrap="square" lIns="45720" rIns="45720" tIns="18288" bIns="18288">
+          <a:bodyPr wrap="square" lIns="45720" tIns="18288" rIns="45720" bIns="18288">
             <a:spAutoFit/>
           </a:bodyPr>
           <a:lstStyle/>
@@ -11933,7 +10131,7 @@
           <a:noFill/>
         </p:spPr>
         <p:txBody>
-          <a:bodyPr wrap="square" lIns="45720" rIns="45720" tIns="18288" bIns="18288">
+          <a:bodyPr wrap="square" lIns="45720" tIns="18288" rIns="45720" bIns="18288">
             <a:spAutoFit/>
           </a:bodyPr>
           <a:lstStyle/>
@@ -11968,7 +10166,7 @@
           <a:noFill/>
         </p:spPr>
         <p:txBody>
-          <a:bodyPr wrap="square" lIns="45720" rIns="45720" tIns="18288" bIns="18288">
+          <a:bodyPr wrap="square" lIns="45720" tIns="18288" rIns="45720" bIns="18288">
             <a:spAutoFit/>
           </a:bodyPr>
           <a:lstStyle/>
@@ -12003,7 +10201,7 @@
           <a:noFill/>
         </p:spPr>
         <p:txBody>
-          <a:bodyPr wrap="square" lIns="45720" rIns="45720" tIns="18288" bIns="18288">
+          <a:bodyPr wrap="square" lIns="45720" tIns="18288" rIns="45720" bIns="18288">
             <a:spAutoFit/>
           </a:bodyPr>
           <a:lstStyle/>
@@ -12061,6 +10259,7 @@
           <a:lstStyle/>
           <a:p>
             <a:pPr algn="ctr"/>
+            <a:endParaRPr/>
           </a:p>
         </p:txBody>
       </p:sp>
@@ -12081,7 +10280,7 @@
           <a:noFill/>
         </p:spPr>
         <p:txBody>
-          <a:bodyPr wrap="square" lIns="45720" rIns="45720" tIns="18288" bIns="18288">
+          <a:bodyPr wrap="square" lIns="45720" tIns="18288" rIns="45720" bIns="18288">
             <a:spAutoFit/>
           </a:bodyPr>
           <a:lstStyle/>
@@ -12116,7 +10315,7 @@
           <a:noFill/>
         </p:spPr>
         <p:txBody>
-          <a:bodyPr wrap="square" lIns="45720" rIns="45720" tIns="18288" bIns="18288">
+          <a:bodyPr wrap="square" lIns="45720" tIns="18288" rIns="45720" bIns="18288">
             <a:spAutoFit/>
           </a:bodyPr>
           <a:lstStyle/>
@@ -12151,7 +10350,7 @@
           <a:noFill/>
         </p:spPr>
         <p:txBody>
-          <a:bodyPr wrap="square" lIns="45720" rIns="45720" tIns="18288" bIns="18288">
+          <a:bodyPr wrap="square" lIns="45720" tIns="18288" rIns="45720" bIns="18288">
             <a:spAutoFit/>
           </a:bodyPr>
           <a:lstStyle/>
@@ -12186,7 +10385,7 @@
           <a:noFill/>
         </p:spPr>
         <p:txBody>
-          <a:bodyPr wrap="square" lIns="45720" rIns="45720" tIns="18288" bIns="18288">
+          <a:bodyPr wrap="square" lIns="45720" tIns="18288" rIns="45720" bIns="18288">
             <a:spAutoFit/>
           </a:bodyPr>
           <a:lstStyle/>
@@ -12221,7 +10420,7 @@
           <a:noFill/>
         </p:spPr>
         <p:txBody>
-          <a:bodyPr wrap="square" lIns="45720" rIns="45720" tIns="18288" bIns="18288">
+          <a:bodyPr wrap="square" lIns="45720" tIns="18288" rIns="45720" bIns="18288">
             <a:spAutoFit/>
           </a:bodyPr>
           <a:lstStyle/>
@@ -12256,7 +10455,7 @@
           <a:noFill/>
         </p:spPr>
         <p:txBody>
-          <a:bodyPr wrap="square" lIns="45720" rIns="45720" tIns="18288" bIns="18288">
+          <a:bodyPr wrap="square" lIns="45720" tIns="18288" rIns="45720" bIns="18288">
             <a:spAutoFit/>
           </a:bodyPr>
           <a:lstStyle/>
@@ -12291,7 +10490,7 @@
           <a:noFill/>
         </p:spPr>
         <p:txBody>
-          <a:bodyPr wrap="square" lIns="45720" rIns="45720" tIns="18288" bIns="18288">
+          <a:bodyPr wrap="square" lIns="45720" tIns="18288" rIns="45720" bIns="18288">
             <a:spAutoFit/>
           </a:bodyPr>
           <a:lstStyle/>
@@ -12326,7 +10525,7 @@
           <a:noFill/>
         </p:spPr>
         <p:txBody>
-          <a:bodyPr wrap="square" lIns="45720" rIns="45720" tIns="18288" bIns="18288">
+          <a:bodyPr wrap="square" lIns="45720" tIns="18288" rIns="45720" bIns="18288">
             <a:spAutoFit/>
           </a:bodyPr>
           <a:lstStyle/>
@@ -12353,7 +10552,7 @@
 </file>
 
 <file path=ppt/slides/slide7.xml><?xml version="1.0" encoding="utf-8"?>
-<p:sld xmlns:a="http://schemas.openxmlformats.org/drawingml/2006/main" xmlns:p="http://schemas.openxmlformats.org/presentationml/2006/main" xmlns:r="http://schemas.openxmlformats.org/officeDocument/2006/relationships">
+<p:sld xmlns:a="http://schemas.openxmlformats.org/drawingml/2006/main" xmlns:r="http://schemas.openxmlformats.org/officeDocument/2006/relationships" xmlns:p="http://schemas.openxmlformats.org/presentationml/2006/main">
   <p:cSld>
     <p:spTree>
       <p:nvGrpSpPr>
@@ -12361,7 +10560,14 @@
         <p:cNvGrpSpPr/>
         <p:nvPr/>
       </p:nvGrpSpPr>
-      <p:grpSpPr/>
+      <p:grpSpPr>
+        <a:xfrm>
+          <a:off x="0" y="0"/>
+          <a:ext cx="0" cy="0"/>
+          <a:chOff x="0" y="0"/>
+          <a:chExt cx="0" cy="0"/>
+        </a:xfrm>
+      </p:grpSpPr>
       <p:sp>
         <p:nvSpPr>
           <p:cNvPr id="2" name="Rectangle 1"/>
@@ -12402,6 +10608,7 @@
           <a:lstStyle/>
           <a:p>
             <a:pPr algn="ctr"/>
+            <a:endParaRPr/>
           </a:p>
         </p:txBody>
       </p:sp>
@@ -12445,6 +10652,7 @@
           <a:lstStyle/>
           <a:p>
             <a:pPr algn="ctr"/>
+            <a:endParaRPr/>
           </a:p>
         </p:txBody>
       </p:sp>
@@ -12465,7 +10673,7 @@
           <a:noFill/>
         </p:spPr>
         <p:txBody>
-          <a:bodyPr wrap="square" lIns="45720" rIns="45720" tIns="18288" bIns="18288">
+          <a:bodyPr wrap="square" lIns="45720" tIns="18288" rIns="45720" bIns="18288">
             <a:spAutoFit/>
           </a:bodyPr>
           <a:lstStyle/>
@@ -12500,7 +10708,7 @@
           <a:noFill/>
         </p:spPr>
         <p:txBody>
-          <a:bodyPr wrap="square" lIns="45720" rIns="45720" tIns="18288" bIns="18288">
+          <a:bodyPr wrap="square" lIns="45720" tIns="18288" rIns="45720" bIns="18288">
             <a:spAutoFit/>
           </a:bodyPr>
           <a:lstStyle/>
@@ -12535,7 +10743,7 @@
           <a:noFill/>
         </p:spPr>
         <p:txBody>
-          <a:bodyPr wrap="square" lIns="45720" rIns="45720" tIns="18288" bIns="18288">
+          <a:bodyPr wrap="square" lIns="45720" tIns="18288" rIns="45720" bIns="18288">
             <a:spAutoFit/>
           </a:bodyPr>
           <a:lstStyle/>
@@ -12570,7 +10778,7 @@
           <a:noFill/>
         </p:spPr>
         <p:txBody>
-          <a:bodyPr wrap="square" lIns="45720" rIns="45720" tIns="18288" bIns="18288">
+          <a:bodyPr wrap="square" lIns="45720" tIns="18288" rIns="45720" bIns="18288">
             <a:spAutoFit/>
           </a:bodyPr>
           <a:lstStyle/>
@@ -12605,7 +10813,7 @@
           <a:noFill/>
         </p:spPr>
         <p:txBody>
-          <a:bodyPr wrap="square" lIns="45720" rIns="45720" tIns="18288" bIns="18288">
+          <a:bodyPr wrap="square" lIns="45720" tIns="18288" rIns="45720" bIns="18288">
             <a:spAutoFit/>
           </a:bodyPr>
           <a:lstStyle/>
@@ -12640,7 +10848,7 @@
           <a:noFill/>
         </p:spPr>
         <p:txBody>
-          <a:bodyPr wrap="square" lIns="45720" rIns="45720" tIns="18288" bIns="18288">
+          <a:bodyPr wrap="square" lIns="45720" tIns="18288" rIns="45720" bIns="18288">
             <a:spAutoFit/>
           </a:bodyPr>
           <a:lstStyle/>
@@ -12675,7 +10883,7 @@
           <a:noFill/>
         </p:spPr>
         <p:txBody>
-          <a:bodyPr wrap="square" lIns="45720" rIns="45720" tIns="18288" bIns="18288">
+          <a:bodyPr wrap="square" lIns="45720" tIns="18288" rIns="45720" bIns="18288">
             <a:spAutoFit/>
           </a:bodyPr>
           <a:lstStyle/>
@@ -12710,7 +10918,7 @@
           <a:noFill/>
         </p:spPr>
         <p:txBody>
-          <a:bodyPr wrap="square" lIns="45720" rIns="45720" tIns="18288" bIns="18288">
+          <a:bodyPr wrap="square" lIns="45720" tIns="18288" rIns="45720" bIns="18288">
             <a:spAutoFit/>
           </a:bodyPr>
           <a:lstStyle/>
@@ -12745,7 +10953,7 @@
           <a:noFill/>
         </p:spPr>
         <p:txBody>
-          <a:bodyPr wrap="square" lIns="45720" rIns="45720" tIns="18288" bIns="18288">
+          <a:bodyPr wrap="square" lIns="45720" tIns="18288" rIns="45720" bIns="18288">
             <a:spAutoFit/>
           </a:bodyPr>
           <a:lstStyle/>
@@ -12780,7 +10988,7 @@
           <a:noFill/>
         </p:spPr>
         <p:txBody>
-          <a:bodyPr wrap="square" lIns="45720" rIns="45720" tIns="18288" bIns="18288">
+          <a:bodyPr wrap="square" lIns="45720" tIns="18288" rIns="45720" bIns="18288">
             <a:spAutoFit/>
           </a:bodyPr>
           <a:lstStyle/>
@@ -12815,7 +11023,7 @@
           <a:noFill/>
         </p:spPr>
         <p:txBody>
-          <a:bodyPr wrap="square" lIns="45720" rIns="45720" tIns="18288" bIns="18288">
+          <a:bodyPr wrap="square" lIns="45720" tIns="18288" rIns="45720" bIns="18288">
             <a:spAutoFit/>
           </a:bodyPr>
           <a:lstStyle/>
@@ -12850,7 +11058,7 @@
           <a:noFill/>
         </p:spPr>
         <p:txBody>
-          <a:bodyPr wrap="square" lIns="45720" rIns="45720" tIns="18288" bIns="18288">
+          <a:bodyPr wrap="square" lIns="45720" tIns="18288" rIns="45720" bIns="18288">
             <a:spAutoFit/>
           </a:bodyPr>
           <a:lstStyle/>
@@ -12885,7 +11093,7 @@
           <a:noFill/>
         </p:spPr>
         <p:txBody>
-          <a:bodyPr wrap="square" lIns="45720" rIns="45720" tIns="18288" bIns="18288">
+          <a:bodyPr wrap="square" lIns="45720" tIns="18288" rIns="45720" bIns="18288">
             <a:spAutoFit/>
           </a:bodyPr>
           <a:lstStyle/>
@@ -12920,7 +11128,7 @@
           <a:noFill/>
         </p:spPr>
         <p:txBody>
-          <a:bodyPr wrap="square" lIns="45720" rIns="45720" tIns="18288" bIns="18288">
+          <a:bodyPr wrap="square" lIns="45720" tIns="18288" rIns="45720" bIns="18288">
             <a:spAutoFit/>
           </a:bodyPr>
           <a:lstStyle/>
@@ -12955,7 +11163,7 @@
           <a:noFill/>
         </p:spPr>
         <p:txBody>
-          <a:bodyPr wrap="square" lIns="45720" rIns="45720" tIns="18288" bIns="18288">
+          <a:bodyPr wrap="square" lIns="45720" tIns="18288" rIns="45720" bIns="18288">
             <a:spAutoFit/>
           </a:bodyPr>
           <a:lstStyle/>
@@ -12990,7 +11198,7 @@
           <a:noFill/>
         </p:spPr>
         <p:txBody>
-          <a:bodyPr wrap="square" lIns="45720" rIns="45720" tIns="18288" bIns="18288">
+          <a:bodyPr wrap="square" lIns="45720" tIns="18288" rIns="45720" bIns="18288">
             <a:spAutoFit/>
           </a:bodyPr>
           <a:lstStyle/>
@@ -13025,7 +11233,7 @@
           <a:noFill/>
         </p:spPr>
         <p:txBody>
-          <a:bodyPr wrap="square" lIns="45720" rIns="45720" tIns="18288" bIns="18288">
+          <a:bodyPr wrap="square" lIns="45720" tIns="18288" rIns="45720" bIns="18288">
             <a:spAutoFit/>
           </a:bodyPr>
           <a:lstStyle/>
@@ -13060,7 +11268,7 @@
           <a:noFill/>
         </p:spPr>
         <p:txBody>
-          <a:bodyPr wrap="square" lIns="45720" rIns="45720" tIns="18288" bIns="18288">
+          <a:bodyPr wrap="square" lIns="45720" tIns="18288" rIns="45720" bIns="18288">
             <a:spAutoFit/>
           </a:bodyPr>
           <a:lstStyle/>
@@ -13095,7 +11303,7 @@
           <a:noFill/>
         </p:spPr>
         <p:txBody>
-          <a:bodyPr wrap="square" lIns="45720" rIns="45720" tIns="18288" bIns="18288">
+          <a:bodyPr wrap="square" lIns="45720" tIns="18288" rIns="45720" bIns="18288">
             <a:spAutoFit/>
           </a:bodyPr>
           <a:lstStyle/>
@@ -13130,7 +11338,7 @@
           <a:noFill/>
         </p:spPr>
         <p:txBody>
-          <a:bodyPr wrap="square" lIns="45720" rIns="45720" tIns="18288" bIns="18288">
+          <a:bodyPr wrap="square" lIns="45720" tIns="18288" rIns="45720" bIns="18288">
             <a:spAutoFit/>
           </a:bodyPr>
           <a:lstStyle/>
@@ -13165,7 +11373,7 @@
           <a:noFill/>
         </p:spPr>
         <p:txBody>
-          <a:bodyPr wrap="square" lIns="45720" rIns="45720" tIns="18288" bIns="18288">
+          <a:bodyPr wrap="square" lIns="45720" tIns="18288" rIns="45720" bIns="18288">
             <a:spAutoFit/>
           </a:bodyPr>
           <a:lstStyle/>
@@ -13200,7 +11408,7 @@
           <a:noFill/>
         </p:spPr>
         <p:txBody>
-          <a:bodyPr wrap="square" lIns="45720" rIns="45720" tIns="18288" bIns="18288">
+          <a:bodyPr wrap="square" lIns="45720" tIns="18288" rIns="45720" bIns="18288">
             <a:spAutoFit/>
           </a:bodyPr>
           <a:lstStyle/>
@@ -13235,7 +11443,7 @@
           <a:noFill/>
         </p:spPr>
         <p:txBody>
-          <a:bodyPr wrap="square" lIns="45720" rIns="45720" tIns="18288" bIns="18288">
+          <a:bodyPr wrap="square" lIns="45720" tIns="18288" rIns="45720" bIns="18288">
             <a:spAutoFit/>
           </a:bodyPr>
           <a:lstStyle/>
@@ -13270,7 +11478,7 @@
           <a:noFill/>
         </p:spPr>
         <p:txBody>
-          <a:bodyPr wrap="square" lIns="45720" rIns="45720" tIns="18288" bIns="18288">
+          <a:bodyPr wrap="square" lIns="45720" tIns="18288" rIns="45720" bIns="18288">
             <a:spAutoFit/>
           </a:bodyPr>
           <a:lstStyle/>
@@ -13305,7 +11513,7 @@
           <a:noFill/>
         </p:spPr>
         <p:txBody>
-          <a:bodyPr wrap="square" lIns="45720" rIns="45720" tIns="18288" bIns="18288">
+          <a:bodyPr wrap="square" lIns="45720" tIns="18288" rIns="45720" bIns="18288">
             <a:spAutoFit/>
           </a:bodyPr>
           <a:lstStyle/>
@@ -13340,7 +11548,7 @@
           <a:noFill/>
         </p:spPr>
         <p:txBody>
-          <a:bodyPr wrap="square" lIns="45720" rIns="45720" tIns="18288" bIns="18288">
+          <a:bodyPr wrap="square" lIns="45720" tIns="18288" rIns="45720" bIns="18288">
             <a:spAutoFit/>
           </a:bodyPr>
           <a:lstStyle/>
@@ -13375,7 +11583,7 @@
           <a:noFill/>
         </p:spPr>
         <p:txBody>
-          <a:bodyPr wrap="square" lIns="45720" rIns="45720" tIns="18288" bIns="18288">
+          <a:bodyPr wrap="square" lIns="45720" tIns="18288" rIns="45720" bIns="18288">
             <a:spAutoFit/>
           </a:bodyPr>
           <a:lstStyle/>
@@ -13402,7 +11610,7 @@
 </file>
 
 <file path=ppt/slides/slide8.xml><?xml version="1.0" encoding="utf-8"?>
-<p:sld xmlns:a="http://schemas.openxmlformats.org/drawingml/2006/main" xmlns:p="http://schemas.openxmlformats.org/presentationml/2006/main" xmlns:r="http://schemas.openxmlformats.org/officeDocument/2006/relationships">
+<p:sld xmlns:a="http://schemas.openxmlformats.org/drawingml/2006/main" xmlns:r="http://schemas.openxmlformats.org/officeDocument/2006/relationships" xmlns:p="http://schemas.openxmlformats.org/presentationml/2006/main">
   <p:cSld>
     <p:spTree>
       <p:nvGrpSpPr>
@@ -13410,7 +11618,14 @@
         <p:cNvGrpSpPr/>
         <p:nvPr/>
       </p:nvGrpSpPr>
-      <p:grpSpPr/>
+      <p:grpSpPr>
+        <a:xfrm>
+          <a:off x="0" y="0"/>
+          <a:ext cx="0" cy="0"/>
+          <a:chOff x="0" y="0"/>
+          <a:chExt cx="0" cy="0"/>
+        </a:xfrm>
+      </p:grpSpPr>
       <p:sp>
         <p:nvSpPr>
           <p:cNvPr id="2" name="Rectangle 1"/>
@@ -13451,6 +11666,7 @@
           <a:lstStyle/>
           <a:p>
             <a:pPr algn="ctr"/>
+            <a:endParaRPr/>
           </a:p>
         </p:txBody>
       </p:sp>
@@ -13494,6 +11710,7 @@
           <a:lstStyle/>
           <a:p>
             <a:pPr algn="ctr"/>
+            <a:endParaRPr/>
           </a:p>
         </p:txBody>
       </p:sp>
@@ -13514,7 +11731,7 @@
           <a:noFill/>
         </p:spPr>
         <p:txBody>
-          <a:bodyPr wrap="square" lIns="45720" rIns="45720" tIns="18288" bIns="18288">
+          <a:bodyPr wrap="square" lIns="45720" tIns="18288" rIns="45720" bIns="18288">
             <a:spAutoFit/>
           </a:bodyPr>
           <a:lstStyle/>
@@ -13549,7 +11766,7 @@
           <a:noFill/>
         </p:spPr>
         <p:txBody>
-          <a:bodyPr wrap="square" lIns="45720" rIns="45720" tIns="18288" bIns="18288">
+          <a:bodyPr wrap="square" lIns="45720" tIns="18288" rIns="45720" bIns="18288">
             <a:spAutoFit/>
           </a:bodyPr>
           <a:lstStyle/>
@@ -13583,8 +11800,8 @@
         </p:blipFill>
         <p:spPr>
           <a:xfrm>
-            <a:off x="457200" y="1463040"/>
-            <a:ext cx="11247120" cy="8834842"/>
+            <a:off x="365760" y="1236980"/>
+            <a:ext cx="6457349" cy="5072380"/>
           </a:xfrm>
           <a:prstGeom prst="rect">
             <a:avLst/>
@@ -13608,7 +11825,7 @@
           <a:noFill/>
         </p:spPr>
         <p:txBody>
-          <a:bodyPr wrap="square" lIns="45720" rIns="45720" tIns="18288" bIns="18288">
+          <a:bodyPr wrap="square" lIns="45720" tIns="18288" rIns="45720" bIns="18288">
             <a:spAutoFit/>
           </a:bodyPr>
           <a:lstStyle/>
@@ -13643,7 +11860,7 @@
           <a:noFill/>
         </p:spPr>
         <p:txBody>
-          <a:bodyPr wrap="square" lIns="45720" rIns="45720" tIns="18288" bIns="18288">
+          <a:bodyPr wrap="square" lIns="45720" tIns="18288" rIns="45720" bIns="18288">
             <a:spAutoFit/>
           </a:bodyPr>
           <a:lstStyle/>
@@ -13670,7 +11887,7 @@
 </file>
 
 <file path=ppt/slides/slide9.xml><?xml version="1.0" encoding="utf-8"?>
-<p:sld xmlns:a="http://schemas.openxmlformats.org/drawingml/2006/main" xmlns:p="http://schemas.openxmlformats.org/presentationml/2006/main" xmlns:r="http://schemas.openxmlformats.org/officeDocument/2006/relationships">
+<p:sld xmlns:a="http://schemas.openxmlformats.org/drawingml/2006/main" xmlns:r="http://schemas.openxmlformats.org/officeDocument/2006/relationships" xmlns:p="http://schemas.openxmlformats.org/presentationml/2006/main">
   <p:cSld>
     <p:spTree>
       <p:nvGrpSpPr>
@@ -13678,7 +11895,14 @@
         <p:cNvGrpSpPr/>
         <p:nvPr/>
       </p:nvGrpSpPr>
-      <p:grpSpPr/>
+      <p:grpSpPr>
+        <a:xfrm>
+          <a:off x="0" y="0"/>
+          <a:ext cx="0" cy="0"/>
+          <a:chOff x="0" y="0"/>
+          <a:chExt cx="0" cy="0"/>
+        </a:xfrm>
+      </p:grpSpPr>
       <p:sp>
         <p:nvSpPr>
           <p:cNvPr id="2" name="Rectangle 1"/>
@@ -13719,6 +11943,7 @@
           <a:lstStyle/>
           <a:p>
             <a:pPr algn="ctr"/>
+            <a:endParaRPr/>
           </a:p>
         </p:txBody>
       </p:sp>
@@ -13762,6 +11987,7 @@
           <a:lstStyle/>
           <a:p>
             <a:pPr algn="ctr"/>
+            <a:endParaRPr/>
           </a:p>
         </p:txBody>
       </p:sp>
@@ -13782,7 +12008,7 @@
           <a:noFill/>
         </p:spPr>
         <p:txBody>
-          <a:bodyPr wrap="square" lIns="45720" rIns="45720" tIns="18288" bIns="18288">
+          <a:bodyPr wrap="square" lIns="45720" tIns="18288" rIns="45720" bIns="18288">
             <a:spAutoFit/>
           </a:bodyPr>
           <a:lstStyle/>
@@ -13817,7 +12043,7 @@
           <a:noFill/>
         </p:spPr>
         <p:txBody>
-          <a:bodyPr wrap="square" lIns="45720" rIns="45720" tIns="18288" bIns="18288">
+          <a:bodyPr wrap="square" lIns="45720" tIns="18288" rIns="45720" bIns="18288">
             <a:spAutoFit/>
           </a:bodyPr>
           <a:lstStyle/>
@@ -13876,7 +12102,7 @@
           <a:noFill/>
         </p:spPr>
         <p:txBody>
-          <a:bodyPr wrap="square" lIns="45720" rIns="45720" tIns="18288" bIns="18288">
+          <a:bodyPr wrap="square" lIns="45720" tIns="18288" rIns="45720" bIns="18288">
             <a:spAutoFit/>
           </a:bodyPr>
           <a:lstStyle/>
@@ -13911,7 +12137,7 @@
           <a:noFill/>
         </p:spPr>
         <p:txBody>
-          <a:bodyPr wrap="square" lIns="45720" rIns="45720" tIns="18288" bIns="18288">
+          <a:bodyPr wrap="square" lIns="45720" tIns="18288" rIns="45720" bIns="18288">
             <a:spAutoFit/>
           </a:bodyPr>
           <a:lstStyle/>
